--- a/S1-CL1-Cloud-Design-Build/delivery/topic_06/Topic_06_Slides.pptx
+++ b/S1-CL1-Cloud-Design-Build/delivery/topic_06/Topic_06_Slides.pptx
@@ -5,33 +5,32 @@
     <p:sldMasterId id="2147483648" r:id="rId1"/>
   </p:sldMasterIdLst>
   <p:sldIdLst>
-    <p:sldId id="256" r:id="rId2"/>
-    <p:sldId id="257" r:id="rId3"/>
-    <p:sldId id="258" r:id="rId4"/>
-    <p:sldId id="259" r:id="rId5"/>
-    <p:sldId id="260" r:id="rId6"/>
-    <p:sldId id="261" r:id="rId7"/>
-    <p:sldId id="262" r:id="rId8"/>
-    <p:sldId id="263" r:id="rId9"/>
-    <p:sldId id="264" r:id="rId10"/>
-    <p:sldId id="265" r:id="rId11"/>
-    <p:sldId id="266" r:id="rId12"/>
-    <p:sldId id="267" r:id="rId13"/>
-    <p:sldId id="268" r:id="rId14"/>
-    <p:sldId id="269" r:id="rId15"/>
-    <p:sldId id="270" r:id="rId16"/>
-    <p:sldId id="271" r:id="rId17"/>
-    <p:sldId id="272" r:id="rId18"/>
-    <p:sldId id="273" r:id="rId19"/>
-    <p:sldId id="280" r:id="rId20"/>
-    <p:sldId id="274" r:id="rId21"/>
-    <p:sldId id="275" r:id="rId22"/>
-    <p:sldId id="276" r:id="rId23"/>
-    <p:sldId id="277" r:id="rId24"/>
-    <p:sldId id="278" r:id="rId25"/>
-    <p:sldId id="279" r:id="rId26"/>
+    <p:sldId id="256" r:id="rId7"/>
+    <p:sldId id="257" r:id="rId8"/>
+    <p:sldId id="258" r:id="rId9"/>
+    <p:sldId id="259" r:id="rId10"/>
+    <p:sldId id="260" r:id="rId11"/>
+    <p:sldId id="261" r:id="rId12"/>
+    <p:sldId id="262" r:id="rId13"/>
+    <p:sldId id="263" r:id="rId14"/>
+    <p:sldId id="264" r:id="rId15"/>
+    <p:sldId id="265" r:id="rId16"/>
+    <p:sldId id="266" r:id="rId17"/>
+    <p:sldId id="267" r:id="rId18"/>
+    <p:sldId id="268" r:id="rId19"/>
+    <p:sldId id="269" r:id="rId20"/>
+    <p:sldId id="270" r:id="rId21"/>
+    <p:sldId id="271" r:id="rId22"/>
+    <p:sldId id="272" r:id="rId23"/>
+    <p:sldId id="273" r:id="rId24"/>
+    <p:sldId id="274" r:id="rId25"/>
+    <p:sldId id="275" r:id="rId26"/>
+    <p:sldId id="276" r:id="rId27"/>
+    <p:sldId id="277" r:id="rId28"/>
+    <p:sldId id="278" r:id="rId29"/>
+    <p:sldId id="279" r:id="rId30"/>
   </p:sldIdLst>
-  <p:sldSz cx="12192000" cy="6858000"/>
+  <p:sldSz cx="12191695" cy="6858000" type="screen4x3"/>
   <p:notesSz cx="6858000" cy="9144000"/>
   <p:defaultTextStyle>
     <a:defPPr>
@@ -128,22 +127,6 @@
       </a:defRPr>
     </a:lvl9pPr>
   </p:defaultTextStyle>
-  <p:extLst>
-    <p:ext uri="{EFAFB233-063F-42B5-8137-9DF3F51BA10A}">
-      <p15:sldGuideLst xmlns:p15="http://schemas.microsoft.com/office/powerpoint/2012/main">
-        <p15:guide id="1" orient="horz" pos="2160">
-          <p15:clr>
-            <a:srgbClr val="A4A3A4"/>
-          </p15:clr>
-        </p15:guide>
-        <p15:guide id="2" pos="2880">
-          <p15:clr>
-            <a:srgbClr val="A4A3A4"/>
-          </p15:clr>
-        </p15:guide>
-      </p15:sldGuideLst>
-    </p:ext>
-  </p:extLst>
 </p:presentation>
 </file>
 
@@ -185,9 +168,10 @@
           <a:lstStyle/>
           <a:p>
             <a:r>
-              <a:rPr lang="en-US"/>
+              <a:rPr lang="en-US" smtClean="0"/>
               <a:t>Click to edit Master title style</a:t>
             </a:r>
+            <a:endParaRPr lang="en-US"/>
           </a:p>
         </p:txBody>
       </p:sp>
@@ -303,9 +287,10 @@
           </a:lstStyle>
           <a:p>
             <a:r>
-              <a:rPr lang="en-US"/>
+              <a:rPr lang="en-US" smtClean="0"/>
               <a:t>Click to edit Master subtitle style</a:t>
             </a:r>
+            <a:endParaRPr lang="en-US"/>
           </a:p>
         </p:txBody>
       </p:sp>
@@ -326,7 +311,7 @@
           <a:p>
             <a:fld id="{5BCAD085-E8A6-8845-BD4E-CB4CCA059FC4}" type="datetimeFigureOut">
               <a:rPr lang="en-US" smtClean="0"/>
-              <a:t>6/2/2026</a:t>
+              <a:t>1/27/13</a:t>
             </a:fld>
             <a:endParaRPr lang="en-US"/>
           </a:p>
@@ -420,9 +405,10 @@
           <a:lstStyle/>
           <a:p>
             <a:r>
-              <a:rPr lang="en-US"/>
+              <a:rPr lang="en-US" smtClean="0"/>
               <a:t>Click to edit Master title style</a:t>
             </a:r>
+            <a:endParaRPr lang="en-US"/>
           </a:p>
         </p:txBody>
       </p:sp>
@@ -443,37 +429,38 @@
           <a:p>
             <a:pPr lvl="0"/>
             <a:r>
-              <a:rPr lang="en-US"/>
+              <a:rPr lang="en-US" smtClean="0"/>
               <a:t>Click to edit Master text styles</a:t>
             </a:r>
           </a:p>
           <a:p>
             <a:pPr lvl="1"/>
             <a:r>
-              <a:rPr lang="en-US"/>
+              <a:rPr lang="en-US" smtClean="0"/>
               <a:t>Second level</a:t>
             </a:r>
           </a:p>
           <a:p>
             <a:pPr lvl="2"/>
             <a:r>
-              <a:rPr lang="en-US"/>
+              <a:rPr lang="en-US" smtClean="0"/>
               <a:t>Third level</a:t>
             </a:r>
           </a:p>
           <a:p>
             <a:pPr lvl="3"/>
             <a:r>
-              <a:rPr lang="en-US"/>
+              <a:rPr lang="en-US" smtClean="0"/>
               <a:t>Fourth level</a:t>
             </a:r>
           </a:p>
           <a:p>
             <a:pPr lvl="4"/>
             <a:r>
-              <a:rPr lang="en-US"/>
+              <a:rPr lang="en-US" smtClean="0"/>
               <a:t>Fifth level</a:t>
             </a:r>
+            <a:endParaRPr lang="en-US"/>
           </a:p>
         </p:txBody>
       </p:sp>
@@ -494,7 +481,7 @@
           <a:p>
             <a:fld id="{5BCAD085-E8A6-8845-BD4E-CB4CCA059FC4}" type="datetimeFigureOut">
               <a:rPr lang="en-US" smtClean="0"/>
-              <a:t>6/2/2026</a:t>
+              <a:t>1/27/13</a:t>
             </a:fld>
             <a:endParaRPr lang="en-US"/>
           </a:p>
@@ -593,9 +580,10 @@
           <a:lstStyle/>
           <a:p>
             <a:r>
-              <a:rPr lang="en-US"/>
+              <a:rPr lang="en-US" smtClean="0"/>
               <a:t>Click to edit Master title style</a:t>
             </a:r>
+            <a:endParaRPr lang="en-US"/>
           </a:p>
         </p:txBody>
       </p:sp>
@@ -621,37 +609,38 @@
           <a:p>
             <a:pPr lvl="0"/>
             <a:r>
-              <a:rPr lang="en-US"/>
+              <a:rPr lang="en-US" smtClean="0"/>
               <a:t>Click to edit Master text styles</a:t>
             </a:r>
           </a:p>
           <a:p>
             <a:pPr lvl="1"/>
             <a:r>
-              <a:rPr lang="en-US"/>
+              <a:rPr lang="en-US" smtClean="0"/>
               <a:t>Second level</a:t>
             </a:r>
           </a:p>
           <a:p>
             <a:pPr lvl="2"/>
             <a:r>
-              <a:rPr lang="en-US"/>
+              <a:rPr lang="en-US" smtClean="0"/>
               <a:t>Third level</a:t>
             </a:r>
           </a:p>
           <a:p>
             <a:pPr lvl="3"/>
             <a:r>
-              <a:rPr lang="en-US"/>
+              <a:rPr lang="en-US" smtClean="0"/>
               <a:t>Fourth level</a:t>
             </a:r>
           </a:p>
           <a:p>
             <a:pPr lvl="4"/>
             <a:r>
-              <a:rPr lang="en-US"/>
+              <a:rPr lang="en-US" smtClean="0"/>
               <a:t>Fifth level</a:t>
             </a:r>
+            <a:endParaRPr lang="en-US"/>
           </a:p>
         </p:txBody>
       </p:sp>
@@ -672,7 +661,7 @@
           <a:p>
             <a:fld id="{5BCAD085-E8A6-8845-BD4E-CB4CCA059FC4}" type="datetimeFigureOut">
               <a:rPr lang="en-US" smtClean="0"/>
-              <a:t>6/2/2026</a:t>
+              <a:t>1/27/13</a:t>
             </a:fld>
             <a:endParaRPr lang="en-US"/>
           </a:p>
@@ -766,9 +755,10 @@
           <a:lstStyle/>
           <a:p>
             <a:r>
-              <a:rPr lang="en-US"/>
+              <a:rPr lang="en-US" smtClean="0"/>
               <a:t>Click to edit Master title style</a:t>
             </a:r>
+            <a:endParaRPr lang="en-US"/>
           </a:p>
         </p:txBody>
       </p:sp>
@@ -789,37 +779,38 @@
           <a:p>
             <a:pPr lvl="0"/>
             <a:r>
-              <a:rPr lang="en-US"/>
+              <a:rPr lang="en-US" smtClean="0"/>
               <a:t>Click to edit Master text styles</a:t>
             </a:r>
           </a:p>
           <a:p>
             <a:pPr lvl="1"/>
             <a:r>
-              <a:rPr lang="en-US"/>
+              <a:rPr lang="en-US" smtClean="0"/>
               <a:t>Second level</a:t>
             </a:r>
           </a:p>
           <a:p>
             <a:pPr lvl="2"/>
             <a:r>
-              <a:rPr lang="en-US"/>
+              <a:rPr lang="en-US" smtClean="0"/>
               <a:t>Third level</a:t>
             </a:r>
           </a:p>
           <a:p>
             <a:pPr lvl="3"/>
             <a:r>
-              <a:rPr lang="en-US"/>
+              <a:rPr lang="en-US" smtClean="0"/>
               <a:t>Fourth level</a:t>
             </a:r>
           </a:p>
           <a:p>
             <a:pPr lvl="4"/>
             <a:r>
-              <a:rPr lang="en-US"/>
+              <a:rPr lang="en-US" smtClean="0"/>
               <a:t>Fifth level</a:t>
             </a:r>
+            <a:endParaRPr lang="en-US"/>
           </a:p>
         </p:txBody>
       </p:sp>
@@ -840,7 +831,7 @@
           <a:p>
             <a:fld id="{5BCAD085-E8A6-8845-BD4E-CB4CCA059FC4}" type="datetimeFigureOut">
               <a:rPr lang="en-US" smtClean="0"/>
-              <a:t>6/2/2026</a:t>
+              <a:t>1/27/13</a:t>
             </a:fld>
             <a:endParaRPr lang="en-US"/>
           </a:p>
@@ -943,9 +934,10 @@
           </a:lstStyle>
           <a:p>
             <a:r>
-              <a:rPr lang="en-US"/>
+              <a:rPr lang="en-US" smtClean="0"/>
               <a:t>Click to edit Master title style</a:t>
             </a:r>
+            <a:endParaRPr lang="en-US"/>
           </a:p>
         </p:txBody>
       </p:sp>
@@ -1062,7 +1054,7 @@
           <a:p>
             <a:pPr lvl="0"/>
             <a:r>
-              <a:rPr lang="en-US"/>
+              <a:rPr lang="en-US" smtClean="0"/>
               <a:t>Click to edit Master text styles</a:t>
             </a:r>
           </a:p>
@@ -1085,7 +1077,7 @@
           <a:p>
             <a:fld id="{5BCAD085-E8A6-8845-BD4E-CB4CCA059FC4}" type="datetimeFigureOut">
               <a:rPr lang="en-US" smtClean="0"/>
-              <a:t>6/2/2026</a:t>
+              <a:t>1/27/13</a:t>
             </a:fld>
             <a:endParaRPr lang="en-US"/>
           </a:p>
@@ -1179,9 +1171,10 @@
           <a:lstStyle/>
           <a:p>
             <a:r>
-              <a:rPr lang="en-US"/>
+              <a:rPr lang="en-US" smtClean="0"/>
               <a:t>Click to edit Master title style</a:t>
             </a:r>
+            <a:endParaRPr lang="en-US"/>
           </a:p>
         </p:txBody>
       </p:sp>
@@ -1235,37 +1228,38 @@
           <a:p>
             <a:pPr lvl="0"/>
             <a:r>
-              <a:rPr lang="en-US"/>
+              <a:rPr lang="en-US" smtClean="0"/>
               <a:t>Click to edit Master text styles</a:t>
             </a:r>
           </a:p>
           <a:p>
             <a:pPr lvl="1"/>
             <a:r>
-              <a:rPr lang="en-US"/>
+              <a:rPr lang="en-US" smtClean="0"/>
               <a:t>Second level</a:t>
             </a:r>
           </a:p>
           <a:p>
             <a:pPr lvl="2"/>
             <a:r>
-              <a:rPr lang="en-US"/>
+              <a:rPr lang="en-US" smtClean="0"/>
               <a:t>Third level</a:t>
             </a:r>
           </a:p>
           <a:p>
             <a:pPr lvl="3"/>
             <a:r>
-              <a:rPr lang="en-US"/>
+              <a:rPr lang="en-US" smtClean="0"/>
               <a:t>Fourth level</a:t>
             </a:r>
           </a:p>
           <a:p>
             <a:pPr lvl="4"/>
             <a:r>
-              <a:rPr lang="en-US"/>
+              <a:rPr lang="en-US" smtClean="0"/>
               <a:t>Fifth level</a:t>
             </a:r>
+            <a:endParaRPr lang="en-US"/>
           </a:p>
         </p:txBody>
       </p:sp>
@@ -1319,37 +1313,38 @@
           <a:p>
             <a:pPr lvl="0"/>
             <a:r>
-              <a:rPr lang="en-US"/>
+              <a:rPr lang="en-US" smtClean="0"/>
               <a:t>Click to edit Master text styles</a:t>
             </a:r>
           </a:p>
           <a:p>
             <a:pPr lvl="1"/>
             <a:r>
-              <a:rPr lang="en-US"/>
+              <a:rPr lang="en-US" smtClean="0"/>
               <a:t>Second level</a:t>
             </a:r>
           </a:p>
           <a:p>
             <a:pPr lvl="2"/>
             <a:r>
-              <a:rPr lang="en-US"/>
+              <a:rPr lang="en-US" smtClean="0"/>
               <a:t>Third level</a:t>
             </a:r>
           </a:p>
           <a:p>
             <a:pPr lvl="3"/>
             <a:r>
-              <a:rPr lang="en-US"/>
+              <a:rPr lang="en-US" smtClean="0"/>
               <a:t>Fourth level</a:t>
             </a:r>
           </a:p>
           <a:p>
             <a:pPr lvl="4"/>
             <a:r>
-              <a:rPr lang="en-US"/>
+              <a:rPr lang="en-US" smtClean="0"/>
               <a:t>Fifth level</a:t>
             </a:r>
+            <a:endParaRPr lang="en-US"/>
           </a:p>
         </p:txBody>
       </p:sp>
@@ -1370,7 +1365,7 @@
           <a:p>
             <a:fld id="{5BCAD085-E8A6-8845-BD4E-CB4CCA059FC4}" type="datetimeFigureOut">
               <a:rPr lang="en-US" smtClean="0"/>
-              <a:t>6/2/2026</a:t>
+              <a:t>1/27/13</a:t>
             </a:fld>
             <a:endParaRPr lang="en-US"/>
           </a:p>
@@ -1468,9 +1463,10 @@
           </a:lstStyle>
           <a:p>
             <a:r>
-              <a:rPr lang="en-US"/>
+              <a:rPr lang="en-US" smtClean="0"/>
               <a:t>Click to edit Master title style</a:t>
             </a:r>
+            <a:endParaRPr lang="en-US"/>
           </a:p>
         </p:txBody>
       </p:sp>
@@ -1533,7 +1529,7 @@
           <a:p>
             <a:pPr lvl="0"/>
             <a:r>
-              <a:rPr lang="en-US"/>
+              <a:rPr lang="en-US" smtClean="0"/>
               <a:t>Click to edit Master text styles</a:t>
             </a:r>
           </a:p>
@@ -1589,37 +1585,38 @@
           <a:p>
             <a:pPr lvl="0"/>
             <a:r>
-              <a:rPr lang="en-US"/>
+              <a:rPr lang="en-US" smtClean="0"/>
               <a:t>Click to edit Master text styles</a:t>
             </a:r>
           </a:p>
           <a:p>
             <a:pPr lvl="1"/>
             <a:r>
-              <a:rPr lang="en-US"/>
+              <a:rPr lang="en-US" smtClean="0"/>
               <a:t>Second level</a:t>
             </a:r>
           </a:p>
           <a:p>
             <a:pPr lvl="2"/>
             <a:r>
-              <a:rPr lang="en-US"/>
+              <a:rPr lang="en-US" smtClean="0"/>
               <a:t>Third level</a:t>
             </a:r>
           </a:p>
           <a:p>
             <a:pPr lvl="3"/>
             <a:r>
-              <a:rPr lang="en-US"/>
+              <a:rPr lang="en-US" smtClean="0"/>
               <a:t>Fourth level</a:t>
             </a:r>
           </a:p>
           <a:p>
             <a:pPr lvl="4"/>
             <a:r>
-              <a:rPr lang="en-US"/>
+              <a:rPr lang="en-US" smtClean="0"/>
               <a:t>Fifth level</a:t>
             </a:r>
+            <a:endParaRPr lang="en-US"/>
           </a:p>
         </p:txBody>
       </p:sp>
@@ -1682,7 +1679,7 @@
           <a:p>
             <a:pPr lvl="0"/>
             <a:r>
-              <a:rPr lang="en-US"/>
+              <a:rPr lang="en-US" smtClean="0"/>
               <a:t>Click to edit Master text styles</a:t>
             </a:r>
           </a:p>
@@ -1738,37 +1735,38 @@
           <a:p>
             <a:pPr lvl="0"/>
             <a:r>
-              <a:rPr lang="en-US"/>
+              <a:rPr lang="en-US" smtClean="0"/>
               <a:t>Click to edit Master text styles</a:t>
             </a:r>
           </a:p>
           <a:p>
             <a:pPr lvl="1"/>
             <a:r>
-              <a:rPr lang="en-US"/>
+              <a:rPr lang="en-US" smtClean="0"/>
               <a:t>Second level</a:t>
             </a:r>
           </a:p>
           <a:p>
             <a:pPr lvl="2"/>
             <a:r>
-              <a:rPr lang="en-US"/>
+              <a:rPr lang="en-US" smtClean="0"/>
               <a:t>Third level</a:t>
             </a:r>
           </a:p>
           <a:p>
             <a:pPr lvl="3"/>
             <a:r>
-              <a:rPr lang="en-US"/>
+              <a:rPr lang="en-US" smtClean="0"/>
               <a:t>Fourth level</a:t>
             </a:r>
           </a:p>
           <a:p>
             <a:pPr lvl="4"/>
             <a:r>
-              <a:rPr lang="en-US"/>
+              <a:rPr lang="en-US" smtClean="0"/>
               <a:t>Fifth level</a:t>
             </a:r>
+            <a:endParaRPr lang="en-US"/>
           </a:p>
         </p:txBody>
       </p:sp>
@@ -1789,7 +1787,7 @@
           <a:p>
             <a:fld id="{5BCAD085-E8A6-8845-BD4E-CB4CCA059FC4}" type="datetimeFigureOut">
               <a:rPr lang="en-US" smtClean="0"/>
-              <a:t>6/2/2026</a:t>
+              <a:t>1/27/13</a:t>
             </a:fld>
             <a:endParaRPr lang="en-US"/>
           </a:p>
@@ -1883,9 +1881,10 @@
           <a:lstStyle/>
           <a:p>
             <a:r>
-              <a:rPr lang="en-US"/>
+              <a:rPr lang="en-US" smtClean="0"/>
               <a:t>Click to edit Master title style</a:t>
             </a:r>
+            <a:endParaRPr lang="en-US"/>
           </a:p>
         </p:txBody>
       </p:sp>
@@ -1906,7 +1905,7 @@
           <a:p>
             <a:fld id="{5BCAD085-E8A6-8845-BD4E-CB4CCA059FC4}" type="datetimeFigureOut">
               <a:rPr lang="en-US" smtClean="0"/>
-              <a:t>6/2/2026</a:t>
+              <a:t>1/27/13</a:t>
             </a:fld>
             <a:endParaRPr lang="en-US"/>
           </a:p>
@@ -2001,7 +2000,7 @@
           <a:p>
             <a:fld id="{5BCAD085-E8A6-8845-BD4E-CB4CCA059FC4}" type="datetimeFigureOut">
               <a:rPr lang="en-US" smtClean="0"/>
-              <a:t>6/2/2026</a:t>
+              <a:t>1/27/13</a:t>
             </a:fld>
             <a:endParaRPr lang="en-US"/>
           </a:p>
@@ -2104,9 +2103,10 @@
           </a:lstStyle>
           <a:p>
             <a:r>
-              <a:rPr lang="en-US"/>
+              <a:rPr lang="en-US" smtClean="0"/>
               <a:t>Click to edit Master title style</a:t>
             </a:r>
+            <a:endParaRPr lang="en-US"/>
           </a:p>
         </p:txBody>
       </p:sp>
@@ -2160,37 +2160,38 @@
           <a:p>
             <a:pPr lvl="0"/>
             <a:r>
-              <a:rPr lang="en-US"/>
+              <a:rPr lang="en-US" smtClean="0"/>
               <a:t>Click to edit Master text styles</a:t>
             </a:r>
           </a:p>
           <a:p>
             <a:pPr lvl="1"/>
             <a:r>
-              <a:rPr lang="en-US"/>
+              <a:rPr lang="en-US" smtClean="0"/>
               <a:t>Second level</a:t>
             </a:r>
           </a:p>
           <a:p>
             <a:pPr lvl="2"/>
             <a:r>
-              <a:rPr lang="en-US"/>
+              <a:rPr lang="en-US" smtClean="0"/>
               <a:t>Third level</a:t>
             </a:r>
           </a:p>
           <a:p>
             <a:pPr lvl="3"/>
             <a:r>
-              <a:rPr lang="en-US"/>
+              <a:rPr lang="en-US" smtClean="0"/>
               <a:t>Fourth level</a:t>
             </a:r>
           </a:p>
           <a:p>
             <a:pPr lvl="4"/>
             <a:r>
-              <a:rPr lang="en-US"/>
+              <a:rPr lang="en-US" smtClean="0"/>
               <a:t>Fifth level</a:t>
             </a:r>
+            <a:endParaRPr lang="en-US"/>
           </a:p>
         </p:txBody>
       </p:sp>
@@ -2253,7 +2254,7 @@
           <a:p>
             <a:pPr lvl="0"/>
             <a:r>
-              <a:rPr lang="en-US"/>
+              <a:rPr lang="en-US" smtClean="0"/>
               <a:t>Click to edit Master text styles</a:t>
             </a:r>
           </a:p>
@@ -2276,7 +2277,7 @@
           <a:p>
             <a:fld id="{5BCAD085-E8A6-8845-BD4E-CB4CCA059FC4}" type="datetimeFigureOut">
               <a:rPr lang="en-US" smtClean="0"/>
-              <a:t>6/2/2026</a:t>
+              <a:t>1/27/13</a:t>
             </a:fld>
             <a:endParaRPr lang="en-US"/>
           </a:p>
@@ -2379,9 +2380,10 @@
           </a:lstStyle>
           <a:p>
             <a:r>
-              <a:rPr lang="en-US"/>
+              <a:rPr lang="en-US" smtClean="0"/>
               <a:t>Click to edit Master title style</a:t>
             </a:r>
+            <a:endParaRPr lang="en-US"/>
           </a:p>
         </p:txBody>
       </p:sp>
@@ -2505,7 +2507,7 @@
           <a:p>
             <a:pPr lvl="0"/>
             <a:r>
-              <a:rPr lang="en-US"/>
+              <a:rPr lang="en-US" smtClean="0"/>
               <a:t>Click to edit Master text styles</a:t>
             </a:r>
           </a:p>
@@ -2528,7 +2530,7 @@
           <a:p>
             <a:fld id="{5BCAD085-E8A6-8845-BD4E-CB4CCA059FC4}" type="datetimeFigureOut">
               <a:rPr lang="en-US" smtClean="0"/>
-              <a:t>6/2/2026</a:t>
+              <a:t>1/27/13</a:t>
             </a:fld>
             <a:endParaRPr lang="en-US"/>
           </a:p>
@@ -2637,9 +2639,10 @@
           <a:lstStyle/>
           <a:p>
             <a:r>
-              <a:rPr lang="en-US"/>
+              <a:rPr lang="en-US" smtClean="0"/>
               <a:t>Click to edit Master title style</a:t>
             </a:r>
+            <a:endParaRPr lang="en-US"/>
           </a:p>
         </p:txBody>
       </p:sp>
@@ -2670,37 +2673,38 @@
           <a:p>
             <a:pPr lvl="0"/>
             <a:r>
-              <a:rPr lang="en-US"/>
+              <a:rPr lang="en-US" smtClean="0"/>
               <a:t>Click to edit Master text styles</a:t>
             </a:r>
           </a:p>
           <a:p>
             <a:pPr lvl="1"/>
             <a:r>
-              <a:rPr lang="en-US"/>
+              <a:rPr lang="en-US" smtClean="0"/>
               <a:t>Second level</a:t>
             </a:r>
           </a:p>
           <a:p>
             <a:pPr lvl="2"/>
             <a:r>
-              <a:rPr lang="en-US"/>
+              <a:rPr lang="en-US" smtClean="0"/>
               <a:t>Third level</a:t>
             </a:r>
           </a:p>
           <a:p>
             <a:pPr lvl="3"/>
             <a:r>
-              <a:rPr lang="en-US"/>
+              <a:rPr lang="en-US" smtClean="0"/>
               <a:t>Fourth level</a:t>
             </a:r>
           </a:p>
           <a:p>
             <a:pPr lvl="4"/>
             <a:r>
-              <a:rPr lang="en-US"/>
+              <a:rPr lang="en-US" smtClean="0"/>
               <a:t>Fifth level</a:t>
             </a:r>
+            <a:endParaRPr lang="en-US"/>
           </a:p>
         </p:txBody>
       </p:sp>
@@ -2739,7 +2743,7 @@
           <a:p>
             <a:fld id="{5BCAD085-E8A6-8845-BD4E-CB4CCA059FC4}" type="datetimeFigureOut">
               <a:rPr lang="en-US" smtClean="0"/>
-              <a:t>6/2/2026</a:t>
+              <a:t>1/27/13</a:t>
             </a:fld>
             <a:endParaRPr lang="en-US"/>
           </a:p>
@@ -3098,7 +3102,7 @@
 </file>
 
 <file path=ppt/slides/slide1.xml><?xml version="1.0" encoding="utf-8"?>
-<p:sld xmlns:a="http://schemas.openxmlformats.org/drawingml/2006/main" xmlns:r="http://schemas.openxmlformats.org/officeDocument/2006/relationships" xmlns:p="http://schemas.openxmlformats.org/presentationml/2006/main">
+<p:sld xmlns:a="http://schemas.openxmlformats.org/drawingml/2006/main" xmlns:p="http://schemas.openxmlformats.org/presentationml/2006/main" xmlns:r="http://schemas.openxmlformats.org/officeDocument/2006/relationships">
   <p:cSld>
     <p:bg>
       <p:bgPr>
@@ -3114,14 +3118,7 @@
         <p:cNvGrpSpPr/>
         <p:nvPr/>
       </p:nvGrpSpPr>
-      <p:grpSpPr>
-        <a:xfrm>
-          <a:off x="0" y="0"/>
-          <a:ext cx="0" cy="0"/>
-          <a:chOff x="0" y="0"/>
-          <a:chExt cx="0" cy="0"/>
-        </a:xfrm>
-      </p:grpSpPr>
+      <p:grpSpPr/>
       <p:sp>
         <p:nvSpPr>
           <p:cNvPr id="2" name="Rectangle 1"/>
@@ -3163,7 +3160,6 @@
           <a:lstStyle/>
           <a:p>
             <a:pPr algn="ctr"/>
-            <a:endParaRPr/>
           </a:p>
         </p:txBody>
       </p:sp>
@@ -3184,7 +3180,7 @@
           <a:noFill/>
         </p:spPr>
         <p:txBody>
-          <a:bodyPr wrap="square" lIns="0" tIns="0" rIns="0" bIns="0" anchor="t">
+          <a:bodyPr wrap="square" anchor="t" lIns="0" rIns="0" tIns="0" bIns="0">
             <a:spAutoFit/>
           </a:bodyPr>
           <a:lstStyle/>
@@ -3250,7 +3246,7 @@
           <a:noFill/>
         </p:spPr>
         <p:txBody>
-          <a:bodyPr wrap="square" lIns="0" tIns="0" rIns="0" bIns="0" anchor="t">
+          <a:bodyPr wrap="square" anchor="t" lIns="0" rIns="0" tIns="0" bIns="0">
             <a:spAutoFit/>
           </a:bodyPr>
           <a:lstStyle/>
@@ -3285,7 +3281,7 @@
 </file>
 
 <file path=ppt/slides/slide10.xml><?xml version="1.0" encoding="utf-8"?>
-<p:sld xmlns:a="http://schemas.openxmlformats.org/drawingml/2006/main" xmlns:r="http://schemas.openxmlformats.org/officeDocument/2006/relationships" xmlns:p="http://schemas.openxmlformats.org/presentationml/2006/main">
+<p:sld xmlns:a="http://schemas.openxmlformats.org/drawingml/2006/main" xmlns:p="http://schemas.openxmlformats.org/presentationml/2006/main" xmlns:r="http://schemas.openxmlformats.org/officeDocument/2006/relationships">
   <p:cSld>
     <p:bg>
       <p:bgPr>
@@ -3301,14 +3297,7 @@
         <p:cNvGrpSpPr/>
         <p:nvPr/>
       </p:nvGrpSpPr>
-      <p:grpSpPr>
-        <a:xfrm>
-          <a:off x="0" y="0"/>
-          <a:ext cx="0" cy="0"/>
-          <a:chOff x="0" y="0"/>
-          <a:chExt cx="0" cy="0"/>
-        </a:xfrm>
-      </p:grpSpPr>
+      <p:grpSpPr/>
       <p:sp>
         <p:nvSpPr>
           <p:cNvPr id="2" name="TextBox 1"/>
@@ -3326,7 +3315,7 @@
           <a:noFill/>
         </p:spPr>
         <p:txBody>
-          <a:bodyPr wrap="square" lIns="0" tIns="0" rIns="0" bIns="0" anchor="t">
+          <a:bodyPr wrap="square" anchor="t" lIns="0" rIns="0" tIns="0" bIns="0">
             <a:spAutoFit/>
           </a:bodyPr>
           <a:lstStyle/>
@@ -3400,7 +3389,6 @@
           <a:lstStyle/>
           <a:p>
             <a:pPr algn="ctr"/>
-            <a:endParaRPr/>
           </a:p>
         </p:txBody>
       </p:sp>
@@ -3447,7 +3435,6 @@
           <a:lstStyle/>
           <a:p>
             <a:pPr algn="ctr"/>
-            <a:endParaRPr/>
           </a:p>
         </p:txBody>
       </p:sp>
@@ -3492,7 +3479,6 @@
           <a:lstStyle/>
           <a:p>
             <a:pPr algn="ctr"/>
-            <a:endParaRPr/>
           </a:p>
         </p:txBody>
       </p:sp>
@@ -3513,7 +3499,7 @@
           <a:noFill/>
         </p:spPr>
         <p:txBody>
-          <a:bodyPr wrap="square" lIns="0" tIns="0" rIns="0" bIns="0" anchor="ctr">
+          <a:bodyPr wrap="square" anchor="ctr" lIns="0" rIns="0" tIns="0" bIns="0">
             <a:spAutoFit/>
           </a:bodyPr>
           <a:lstStyle/>
@@ -3578,7 +3564,6 @@
           <a:lstStyle/>
           <a:p>
             <a:pPr algn="ctr"/>
-            <a:endParaRPr/>
           </a:p>
         </p:txBody>
       </p:sp>
@@ -3623,7 +3608,6 @@
           <a:lstStyle/>
           <a:p>
             <a:pPr algn="ctr"/>
-            <a:endParaRPr/>
           </a:p>
         </p:txBody>
       </p:sp>
@@ -3644,7 +3628,7 @@
           <a:noFill/>
         </p:spPr>
         <p:txBody>
-          <a:bodyPr wrap="square" lIns="0" tIns="0" rIns="0" bIns="0" anchor="ctr">
+          <a:bodyPr wrap="square" anchor="ctr" lIns="0" rIns="0" tIns="0" bIns="0">
             <a:spAutoFit/>
           </a:bodyPr>
           <a:lstStyle/>
@@ -3661,7 +3645,7 @@
                 </a:solidFill>
                 <a:latin typeface="Roboto"/>
               </a:rPr>
-              <a:t>Region first — ap-southeast-2 for data residency; visible in all evidence.</a:t>
+              <a:t>Region first — the design mandates Sydney (ap-southeast-2) for residency; you deploy to us-east-1 in the lab, visible in all evidence.</a:t>
             </a:r>
           </a:p>
         </p:txBody>
@@ -3709,7 +3693,6 @@
           <a:lstStyle/>
           <a:p>
             <a:pPr algn="ctr"/>
-            <a:endParaRPr/>
           </a:p>
         </p:txBody>
       </p:sp>
@@ -3754,7 +3737,6 @@
           <a:lstStyle/>
           <a:p>
             <a:pPr algn="ctr"/>
-            <a:endParaRPr/>
           </a:p>
         </p:txBody>
       </p:sp>
@@ -3775,7 +3757,7 @@
           <a:noFill/>
         </p:spPr>
         <p:txBody>
-          <a:bodyPr wrap="square" lIns="0" tIns="0" rIns="0" bIns="0" anchor="ctr">
+          <a:bodyPr wrap="square" anchor="ctr" lIns="0" rIns="0" tIns="0" bIns="0">
             <a:spAutoFit/>
           </a:bodyPr>
           <a:lstStyle/>
@@ -3838,7 +3820,6 @@
           <a:lstStyle/>
           <a:p>
             <a:pPr algn="ctr"/>
-            <a:endParaRPr/>
           </a:p>
         </p:txBody>
       </p:sp>
@@ -3859,7 +3840,7 @@
           <a:noFill/>
         </p:spPr>
         <p:txBody>
-          <a:bodyPr wrap="square" lIns="0" tIns="0" rIns="0" bIns="0" anchor="t">
+          <a:bodyPr wrap="square" anchor="t" lIns="0" rIns="0" tIns="0" bIns="0">
             <a:spAutoFit/>
           </a:bodyPr>
           <a:lstStyle/>
@@ -3902,7 +3883,7 @@
           <a:noFill/>
         </p:spPr>
         <p:txBody>
-          <a:bodyPr wrap="square" lIns="0" tIns="0" rIns="0" bIns="0" anchor="t">
+          <a:bodyPr wrap="square" anchor="t" lIns="0" rIns="0" tIns="0" bIns="0">
             <a:spAutoFit/>
           </a:bodyPr>
           <a:lstStyle/>
@@ -3929,7 +3910,7 @@
 </file>
 
 <file path=ppt/slides/slide11.xml><?xml version="1.0" encoding="utf-8"?>
-<p:sld xmlns:a="http://schemas.openxmlformats.org/drawingml/2006/main" xmlns:r="http://schemas.openxmlformats.org/officeDocument/2006/relationships" xmlns:p="http://schemas.openxmlformats.org/presentationml/2006/main">
+<p:sld xmlns:a="http://schemas.openxmlformats.org/drawingml/2006/main" xmlns:p="http://schemas.openxmlformats.org/presentationml/2006/main" xmlns:r="http://schemas.openxmlformats.org/officeDocument/2006/relationships">
   <p:cSld>
     <p:bg>
       <p:bgPr>
@@ -3945,14 +3926,7 @@
         <p:cNvGrpSpPr/>
         <p:nvPr/>
       </p:nvGrpSpPr>
-      <p:grpSpPr>
-        <a:xfrm>
-          <a:off x="0" y="0"/>
-          <a:ext cx="0" cy="0"/>
-          <a:chOff x="0" y="0"/>
-          <a:chExt cx="0" cy="0"/>
-        </a:xfrm>
-      </p:grpSpPr>
+      <p:grpSpPr/>
       <p:sp>
         <p:nvSpPr>
           <p:cNvPr id="2" name="Rectangle 1"/>
@@ -3994,7 +3968,6 @@
           <a:lstStyle/>
           <a:p>
             <a:pPr algn="ctr"/>
-            <a:endParaRPr/>
           </a:p>
         </p:txBody>
       </p:sp>
@@ -4015,7 +3988,7 @@
           <a:noFill/>
         </p:spPr>
         <p:txBody>
-          <a:bodyPr wrap="square" lIns="0" tIns="0" rIns="0" bIns="0" anchor="t">
+          <a:bodyPr wrap="square" anchor="t" lIns="0" rIns="0" tIns="0" bIns="0">
             <a:spAutoFit/>
           </a:bodyPr>
           <a:lstStyle/>
@@ -4049,7 +4022,7 @@
           <a:noFill/>
         </p:spPr>
         <p:txBody>
-          <a:bodyPr wrap="square" lIns="0" tIns="0" rIns="0" bIns="0" anchor="t">
+          <a:bodyPr wrap="square" anchor="t" lIns="0" rIns="0" tIns="0" bIns="0">
             <a:spAutoFit/>
           </a:bodyPr>
           <a:lstStyle/>
@@ -4139,7 +4112,6 @@
           <a:lstStyle/>
           <a:p>
             <a:pPr algn="ctr"/>
-            <a:endParaRPr/>
           </a:p>
         </p:txBody>
       </p:sp>
@@ -4160,7 +4132,7 @@
           <a:noFill/>
         </p:spPr>
         <p:txBody>
-          <a:bodyPr wrap="square" lIns="0" tIns="0" rIns="0" bIns="0" anchor="t">
+          <a:bodyPr wrap="square" anchor="t" lIns="0" rIns="0" tIns="0" bIns="0">
             <a:spAutoFit/>
           </a:bodyPr>
           <a:lstStyle/>
@@ -4203,13 +4175,21 @@
           <a:noFill/>
         </p:spPr>
         <p:txBody>
-          <a:bodyPr wrap="square" lIns="0" tIns="0" rIns="0" bIns="0" anchor="t">
+          <a:bodyPr wrap="square" anchor="t" lIns="0" rIns="0" tIns="0" bIns="0">
             <a:spAutoFit/>
           </a:bodyPr>
           <a:lstStyle/>
           <a:p>
             <a:pPr algn="r"/>
-            <a:endParaRPr/>
+            <a:r>
+              <a:rPr sz="1100" b="0" i="0">
+                <a:solidFill>
+                  <a:srgbClr val="7A7A7A"/>
+                </a:solidFill>
+                <a:latin typeface="Roboto"/>
+              </a:rPr>
+              <a:t/>
+            </a:r>
           </a:p>
         </p:txBody>
       </p:sp>
@@ -4222,7 +4202,7 @@
 </file>
 
 <file path=ppt/slides/slide12.xml><?xml version="1.0" encoding="utf-8"?>
-<p:sld xmlns:a="http://schemas.openxmlformats.org/drawingml/2006/main" xmlns:r="http://schemas.openxmlformats.org/officeDocument/2006/relationships" xmlns:p="http://schemas.openxmlformats.org/presentationml/2006/main">
+<p:sld xmlns:a="http://schemas.openxmlformats.org/drawingml/2006/main" xmlns:p="http://schemas.openxmlformats.org/presentationml/2006/main" xmlns:r="http://schemas.openxmlformats.org/officeDocument/2006/relationships">
   <p:cSld>
     <p:bg>
       <p:bgPr>
@@ -4238,14 +4218,7 @@
         <p:cNvGrpSpPr/>
         <p:nvPr/>
       </p:nvGrpSpPr>
-      <p:grpSpPr>
-        <a:xfrm>
-          <a:off x="0" y="0"/>
-          <a:ext cx="0" cy="0"/>
-          <a:chOff x="0" y="0"/>
-          <a:chExt cx="0" cy="0"/>
-        </a:xfrm>
-      </p:grpSpPr>
+      <p:grpSpPr/>
       <p:sp>
         <p:nvSpPr>
           <p:cNvPr id="2" name="TextBox 1"/>
@@ -4263,7 +4236,7 @@
           <a:noFill/>
         </p:spPr>
         <p:txBody>
-          <a:bodyPr wrap="square" lIns="0" tIns="0" rIns="0" bIns="0" anchor="t">
+          <a:bodyPr wrap="square" anchor="t" lIns="0" rIns="0" tIns="0" bIns="0">
             <a:spAutoFit/>
           </a:bodyPr>
           <a:lstStyle/>
@@ -4337,7 +4310,267 @@
           <a:lstStyle/>
           <a:p>
             <a:pPr algn="ctr"/>
-            <a:endParaRPr/>
+          </a:p>
+        </p:txBody>
+      </p:sp>
+      <p:sp>
+        <p:nvSpPr>
+          <p:cNvPr id="4" name="TextBox 3"/>
+          <p:cNvSpPr txBox="1"/>
+          <p:nvPr/>
+        </p:nvSpPr>
+        <p:spPr>
+          <a:xfrm>
+            <a:off x="658368" y="1737360"/>
+            <a:ext cx="5486400" cy="4297680"/>
+          </a:xfrm>
+          <a:prstGeom prst="rect">
+            <a:avLst/>
+          </a:prstGeom>
+          <a:noFill/>
+        </p:spPr>
+        <p:txBody>
+          <a:bodyPr wrap="square" anchor="t" lIns="0" rIns="0" tIns="0" bIns="0">
+            <a:spAutoFit/>
+          </a:bodyPr>
+          <a:lstStyle/>
+          <a:p>
+            <a:pPr marL="0" indent="0">
+              <a:lnSpc>
+                <a:spcPct val="105000"/>
+              </a:lnSpc>
+              <a:spcBef>
+                <a:spcPts val="0"/>
+              </a:spcBef>
+              <a:spcAft>
+                <a:spcPts val="1000"/>
+              </a:spcAft>
+            </a:pPr>
+            <a:r>
+              <a:rPr sz="1700" b="1" i="0">
+                <a:solidFill>
+                  <a:srgbClr val="EDAB0C"/>
+                </a:solidFill>
+                <a:latin typeface="Roboto"/>
+              </a:rPr>
+              <a:t>■  </a:t>
+            </a:r>
+            <a:r>
+              <a:rPr sz="1700" b="0" i="0">
+                <a:solidFill>
+                  <a:srgbClr val="2A2929"/>
+                </a:solidFill>
+                <a:latin typeface="Roboto"/>
+              </a:rPr>
+              <a:t>IAM user — a person or application that authenticates to the account.</a:t>
+            </a:r>
+          </a:p>
+          <a:p>
+            <a:pPr marL="0" indent="0">
+              <a:lnSpc>
+                <a:spcPct val="105000"/>
+              </a:lnSpc>
+              <a:spcBef>
+                <a:spcPts val="0"/>
+              </a:spcBef>
+              <a:spcAft>
+                <a:spcPts val="1000"/>
+              </a:spcAft>
+            </a:pPr>
+            <a:r>
+              <a:rPr sz="1700" b="1" i="0">
+                <a:solidFill>
+                  <a:srgbClr val="EDAB0C"/>
+                </a:solidFill>
+                <a:latin typeface="Roboto"/>
+              </a:rPr>
+              <a:t>■  </a:t>
+            </a:r>
+            <a:r>
+              <a:rPr sz="1700" b="0" i="0">
+                <a:solidFill>
+                  <a:srgbClr val="2A2929"/>
+                </a:solidFill>
+                <a:latin typeface="Roboto"/>
+              </a:rPr>
+              <a:t>IAM group — a collection of users granted identical permissions.</a:t>
+            </a:r>
+          </a:p>
+          <a:p>
+            <a:pPr marL="0" indent="0">
+              <a:lnSpc>
+                <a:spcPct val="105000"/>
+              </a:lnSpc>
+              <a:spcBef>
+                <a:spcPts val="0"/>
+              </a:spcBef>
+              <a:spcAft>
+                <a:spcPts val="1000"/>
+              </a:spcAft>
+            </a:pPr>
+            <a:r>
+              <a:rPr sz="1700" b="1" i="0">
+                <a:solidFill>
+                  <a:srgbClr val="EDAB0C"/>
+                </a:solidFill>
+                <a:latin typeface="Roboto"/>
+              </a:rPr>
+              <a:t>■  </a:t>
+            </a:r>
+            <a:r>
+              <a:rPr sz="1700" b="0" i="0">
+                <a:solidFill>
+                  <a:srgbClr val="2A2929"/>
+                </a:solidFill>
+                <a:latin typeface="Roboto"/>
+              </a:rPr>
+              <a:t>IAM role — temporary permissions, assumable by a person, application or service (e.g. an EC2 instance).</a:t>
+            </a:r>
+          </a:p>
+          <a:p>
+            <a:pPr marL="0" indent="0">
+              <a:lnSpc>
+                <a:spcPct val="105000"/>
+              </a:lnSpc>
+              <a:spcBef>
+                <a:spcPts val="0"/>
+              </a:spcBef>
+              <a:spcAft>
+                <a:spcPts val="1000"/>
+              </a:spcAft>
+            </a:pPr>
+            <a:r>
+              <a:rPr sz="1700" b="1" i="0">
+                <a:solidFill>
+                  <a:srgbClr val="EDAB0C"/>
+                </a:solidFill>
+                <a:latin typeface="Roboto"/>
+              </a:rPr>
+              <a:t>■  </a:t>
+            </a:r>
+            <a:r>
+              <a:rPr sz="1700" b="0" i="0">
+                <a:solidFill>
+                  <a:srgbClr val="2A2929"/>
+                </a:solidFill>
+                <a:latin typeface="Roboto"/>
+              </a:rPr>
+              <a:t>IAM policy — a JSON document defining which resources can be accessed, and how.</a:t>
+            </a:r>
+          </a:p>
+        </p:txBody>
+      </p:sp>
+      <p:sp>
+        <p:nvSpPr>
+          <p:cNvPr id="5" name="Rounded Rectangle 4"/>
+          <p:cNvSpPr/>
+          <p:nvPr/>
+        </p:nvSpPr>
+        <p:spPr>
+          <a:xfrm>
+            <a:off x="6400800" y="1783080"/>
+            <a:ext cx="5120640" cy="4023360"/>
+          </a:xfrm>
+          <a:prstGeom prst="roundRect">
+            <a:avLst/>
+          </a:prstGeom>
+          <a:solidFill>
+            <a:srgbClr val="FBF6E6"/>
+          </a:solidFill>
+          <a:ln w="12700">
+            <a:solidFill>
+              <a:srgbClr val="27B5CE"/>
+            </a:solidFill>
+            <a:prstDash val="dash"/>
+          </a:ln>
+          <a:effectLst/>
+        </p:spPr>
+        <p:style>
+          <a:lnRef idx="1">
+            <a:schemeClr val="accent1"/>
+          </a:lnRef>
+          <a:fillRef idx="3">
+            <a:schemeClr val="accent1"/>
+          </a:fillRef>
+          <a:effectRef idx="2">
+            <a:schemeClr val="accent1"/>
+          </a:effectRef>
+          <a:fontRef idx="minor">
+            <a:schemeClr val="lt1"/>
+          </a:fontRef>
+        </p:style>
+        <p:txBody>
+          <a:bodyPr rtlCol="0" anchor="ctr"/>
+          <a:lstStyle/>
+          <a:p>
+            <a:pPr algn="ctr"/>
+          </a:p>
+        </p:txBody>
+      </p:sp>
+      <p:sp>
+        <p:nvSpPr>
+          <p:cNvPr id="6" name="TextBox 5"/>
+          <p:cNvSpPr txBox="1"/>
+          <p:nvPr/>
+        </p:nvSpPr>
+        <p:spPr>
+          <a:xfrm>
+            <a:off x="6400800" y="1783080"/>
+            <a:ext cx="5120640" cy="4023360"/>
+          </a:xfrm>
+          <a:prstGeom prst="rect">
+            <a:avLst/>
+          </a:prstGeom>
+          <a:noFill/>
+        </p:spPr>
+        <p:txBody>
+          <a:bodyPr wrap="square" anchor="ctr" lIns="0" rIns="0" tIns="0" bIns="0">
+            <a:spAutoFit/>
+          </a:bodyPr>
+          <a:lstStyle/>
+          <a:p>
+            <a:pPr algn="ctr"/>
+            <a:r>
+              <a:rPr sz="3000" b="0" i="0">
+                <a:solidFill>
+                  <a:srgbClr val="27B5CE"/>
+                </a:solidFill>
+                <a:latin typeface="Roboto"/>
+              </a:rPr>
+              <a:t>🖼</a:t>
+            </a:r>
+          </a:p>
+          <a:p>
+            <a:pPr algn="ctr">
+              <a:spcBef>
+                <a:spcPts val="400"/>
+              </a:spcBef>
+            </a:pPr>
+            <a:r>
+              <a:rPr sz="1200" b="1" i="0">
+                <a:solidFill>
+                  <a:srgbClr val="27B5CE"/>
+                </a:solidFill>
+                <a:latin typeface="Roboto"/>
+              </a:rPr>
+              <a:t>IMAGE</a:t>
+            </a:r>
+          </a:p>
+          <a:p>
+            <a:pPr algn="ctr">
+              <a:spcBef>
+                <a:spcPts val="200"/>
+              </a:spcBef>
+            </a:pPr>
+            <a:r>
+              <a:rPr sz="1200" b="0" i="1">
+                <a:solidFill>
+                  <a:srgbClr val="484848"/>
+                </a:solidFill>
+                <a:latin typeface="Roboto Light"/>
+              </a:rPr>
+              <a:t>AWS — IAM components: user / group / role / policy (ACF M04 S18)</a:t>
+            </a:r>
           </a:p>
         </p:txBody>
       </p:sp>
@@ -4382,7 +4615,6 @@
           <a:lstStyle/>
           <a:p>
             <a:pPr algn="ctr"/>
-            <a:endParaRPr/>
           </a:p>
         </p:txBody>
       </p:sp>
@@ -4403,7 +4635,7 @@
           <a:noFill/>
         </p:spPr>
         <p:txBody>
-          <a:bodyPr wrap="square" lIns="0" tIns="0" rIns="0" bIns="0" anchor="t">
+          <a:bodyPr wrap="square" anchor="t" lIns="0" rIns="0" tIns="0" bIns="0">
             <a:spAutoFit/>
           </a:bodyPr>
           <a:lstStyle/>
@@ -4446,7 +4678,7 @@
           <a:noFill/>
         </p:spPr>
         <p:txBody>
-          <a:bodyPr wrap="square" lIns="0" tIns="0" rIns="0" bIns="0" anchor="t">
+          <a:bodyPr wrap="square" anchor="t" lIns="0" rIns="0" tIns="0" bIns="0">
             <a:spAutoFit/>
           </a:bodyPr>
           <a:lstStyle/>
@@ -4464,1424 +4696,6 @@
           </a:p>
         </p:txBody>
       </p:sp>
-      <p:sp>
-        <p:nvSpPr>
-          <p:cNvPr id="22" name="TextBox 21">
-            <a:extLst>
-              <a:ext uri="{FF2B5EF4-FFF2-40B4-BE49-F238E27FC236}">
-                <a16:creationId xmlns:a16="http://schemas.microsoft.com/office/drawing/2014/main" id="{01DCB293-464F-D113-7F36-0EE5670D04EE}"/>
-              </a:ext>
-            </a:extLst>
-          </p:cNvPr>
-          <p:cNvSpPr txBox="1"/>
-          <p:nvPr/>
-        </p:nvSpPr>
-        <p:spPr>
-          <a:xfrm>
-            <a:off x="1211049" y="2252198"/>
-            <a:ext cx="1315104" cy="544765"/>
-          </a:xfrm>
-          <a:prstGeom prst="rect">
-            <a:avLst/>
-          </a:prstGeom>
-          <a:noFill/>
-        </p:spPr>
-        <p:txBody>
-          <a:bodyPr wrap="none" lIns="182880" tIns="146304" rIns="182880" bIns="146304" rtlCol="0">
-            <a:spAutoFit/>
-          </a:bodyPr>
-          <a:lstStyle/>
-          <a:p>
-            <a:pPr algn="ctr">
-              <a:lnSpc>
-                <a:spcPct val="90000"/>
-              </a:lnSpc>
-              <a:spcAft>
-                <a:spcPts val="1800"/>
-              </a:spcAft>
-            </a:pPr>
-            <a:r>
-              <a:rPr lang="en-US" b="1">
-                <a:solidFill>
-                  <a:srgbClr val="504BAB"/>
-                </a:solidFill>
-              </a:rPr>
-              <a:t>IAM user</a:t>
-            </a:r>
-            <a:endParaRPr lang="en-US" b="1">
-              <a:solidFill>
-                <a:srgbClr val="504BAB"/>
-              </a:solidFill>
-              <a:latin typeface="Amazon Ember Light" panose="020B0403020204020204"/>
-            </a:endParaRPr>
-          </a:p>
-        </p:txBody>
-      </p:sp>
-      <p:sp>
-        <p:nvSpPr>
-          <p:cNvPr id="23" name="Content Placeholder 5">
-            <a:extLst>
-              <a:ext uri="{FF2B5EF4-FFF2-40B4-BE49-F238E27FC236}">
-                <a16:creationId xmlns:a16="http://schemas.microsoft.com/office/drawing/2014/main" id="{EE025352-A04D-913D-6B4C-227C0F1B5EF7}"/>
-              </a:ext>
-            </a:extLst>
-          </p:cNvPr>
-          <p:cNvSpPr txBox="1">
-            <a:spLocks/>
-          </p:cNvSpPr>
-          <p:nvPr/>
-        </p:nvSpPr>
-        <p:spPr>
-          <a:xfrm>
-            <a:off x="2754426" y="1694509"/>
-            <a:ext cx="7761174" cy="863795"/>
-          </a:xfrm>
-          <a:prstGeom prst="rect">
-            <a:avLst/>
-          </a:prstGeom>
-        </p:spPr>
-        <p:txBody>
-          <a:bodyPr/>
-          <a:lstStyle>
-            <a:lvl1pPr marL="0" marR="0" indent="0" algn="l" defTabSz="914362" rtl="0" eaLnBrk="1" fontAlgn="auto" latinLnBrk="0" hangingPunct="1">
-              <a:lnSpc>
-                <a:spcPct val="90000"/>
-              </a:lnSpc>
-              <a:spcBef>
-                <a:spcPct val="20000"/>
-              </a:spcBef>
-              <a:spcAft>
-                <a:spcPts val="0"/>
-              </a:spcAft>
-              <a:buClrTx/>
-              <a:buSzPct val="90000"/>
-              <a:buFont typeface="Arial" pitchFamily="34" charset="0"/>
-              <a:buNone/>
-              <a:tabLst/>
-              <a:defRPr sz="2667" b="0" kern="1200" spc="0" baseline="0">
-                <a:solidFill>
-                  <a:schemeClr val="tx1"/>
-                </a:solidFill>
-                <a:latin typeface="Amazon Ember" panose="020B0603020204020204" pitchFamily="34" charset="0"/>
-                <a:ea typeface="Amazon Ember" panose="020B0603020204020204" pitchFamily="34" charset="0"/>
-                <a:cs typeface="Amazon Ember" panose="020B0603020204020204" pitchFamily="34" charset="0"/>
-              </a:defRPr>
-            </a:lvl1pPr>
-            <a:lvl2pPr marL="336143" marR="0" indent="0" algn="l" defTabSz="914362" rtl="0" eaLnBrk="1" fontAlgn="auto" latinLnBrk="0" hangingPunct="1">
-              <a:lnSpc>
-                <a:spcPct val="90000"/>
-              </a:lnSpc>
-              <a:spcBef>
-                <a:spcPts val="500"/>
-              </a:spcBef>
-              <a:spcAft>
-                <a:spcPts val="0"/>
-              </a:spcAft>
-              <a:buClrTx/>
-              <a:buSzPct val="90000"/>
-              <a:buFont typeface="Arial" pitchFamily="34" charset="0"/>
-              <a:buNone/>
-              <a:tabLst/>
-              <a:defRPr sz="2000" kern="1200" spc="0" baseline="0">
-                <a:solidFill>
-                  <a:schemeClr val="tx1"/>
-                </a:solidFill>
-                <a:latin typeface="Amazon Ember" panose="020B0603020204020204" pitchFamily="34" charset="0"/>
-                <a:ea typeface="Amazon Ember" panose="020B0603020204020204" pitchFamily="34" charset="0"/>
-                <a:cs typeface="Amazon Ember" panose="020B0603020204020204" pitchFamily="34" charset="0"/>
-              </a:defRPr>
-            </a:lvl2pPr>
-            <a:lvl3pPr marL="560238" marR="0" indent="0" algn="l" defTabSz="914362" rtl="0" eaLnBrk="1" fontAlgn="auto" latinLnBrk="0" hangingPunct="1">
-              <a:lnSpc>
-                <a:spcPct val="90000"/>
-              </a:lnSpc>
-              <a:spcBef>
-                <a:spcPts val="500"/>
-              </a:spcBef>
-              <a:spcAft>
-                <a:spcPts val="0"/>
-              </a:spcAft>
-              <a:buClrTx/>
-              <a:buSzPct val="90000"/>
-              <a:buFont typeface="Arial" pitchFamily="34" charset="0"/>
-              <a:buNone/>
-              <a:tabLst/>
-              <a:defRPr sz="2000" kern="1200" spc="0" baseline="0">
-                <a:solidFill>
-                  <a:schemeClr val="tx1"/>
-                </a:solidFill>
-                <a:latin typeface="Amazon Ember" panose="020B0603020204020204" pitchFamily="34" charset="0"/>
-                <a:ea typeface="Amazon Ember" panose="020B0603020204020204" pitchFamily="34" charset="0"/>
-                <a:cs typeface="Amazon Ember" panose="020B0603020204020204" pitchFamily="34" charset="0"/>
-              </a:defRPr>
-            </a:lvl3pPr>
-            <a:lvl4pPr marL="784334" marR="0" indent="0" algn="l" defTabSz="914362" rtl="0" eaLnBrk="1" fontAlgn="auto" latinLnBrk="0" hangingPunct="1">
-              <a:lnSpc>
-                <a:spcPct val="90000"/>
-              </a:lnSpc>
-              <a:spcBef>
-                <a:spcPts val="500"/>
-              </a:spcBef>
-              <a:spcAft>
-                <a:spcPts val="0"/>
-              </a:spcAft>
-              <a:buClrTx/>
-              <a:buSzPct val="90000"/>
-              <a:buFont typeface="Arial" pitchFamily="34" charset="0"/>
-              <a:buNone/>
-              <a:tabLst/>
-              <a:defRPr sz="1667" kern="1200" spc="0" baseline="0">
-                <a:solidFill>
-                  <a:schemeClr val="tx1"/>
-                </a:solidFill>
-                <a:latin typeface="Amazon Ember" panose="020B0603020204020204" pitchFamily="34" charset="0"/>
-                <a:ea typeface="Amazon Ember" panose="020B0603020204020204" pitchFamily="34" charset="0"/>
-                <a:cs typeface="Amazon Ember" panose="020B0603020204020204" pitchFamily="34" charset="0"/>
-              </a:defRPr>
-            </a:lvl4pPr>
-            <a:lvl5pPr marL="1008429" marR="0" indent="0" algn="l" defTabSz="914362" rtl="0" eaLnBrk="1" fontAlgn="auto" latinLnBrk="0" hangingPunct="1">
-              <a:lnSpc>
-                <a:spcPct val="90000"/>
-              </a:lnSpc>
-              <a:spcBef>
-                <a:spcPts val="500"/>
-              </a:spcBef>
-              <a:spcAft>
-                <a:spcPts val="0"/>
-              </a:spcAft>
-              <a:buClrTx/>
-              <a:buSzPct val="90000"/>
-              <a:buFont typeface="Arial" pitchFamily="34" charset="0"/>
-              <a:buNone/>
-              <a:tabLst/>
-              <a:defRPr sz="1667" kern="1200" spc="0" baseline="0">
-                <a:solidFill>
-                  <a:schemeClr val="tx1"/>
-                </a:solidFill>
-                <a:latin typeface="Amazon Ember" panose="020B0603020204020204" pitchFamily="34" charset="0"/>
-                <a:ea typeface="Amazon Ember" panose="020B0603020204020204" pitchFamily="34" charset="0"/>
-                <a:cs typeface="Amazon Ember" panose="020B0603020204020204" pitchFamily="34" charset="0"/>
-              </a:defRPr>
-            </a:lvl5pPr>
-            <a:lvl6pPr marL="2514494" indent="-228591" algn="l" defTabSz="914362" rtl="0" eaLnBrk="1" latinLnBrk="0" hangingPunct="1">
-              <a:spcBef>
-                <a:spcPct val="20000"/>
-              </a:spcBef>
-              <a:buFont typeface="Arial" pitchFamily="34" charset="0"/>
-              <a:buChar char="•"/>
-              <a:defRPr sz="1961" kern="1200">
-                <a:solidFill>
-                  <a:schemeClr val="tx1"/>
-                </a:solidFill>
-                <a:latin typeface="+mn-lt"/>
-                <a:ea typeface="+mn-ea"/>
-                <a:cs typeface="+mn-cs"/>
-              </a:defRPr>
-            </a:lvl6pPr>
-            <a:lvl7pPr marL="2971675" indent="-228591" algn="l" defTabSz="914362" rtl="0" eaLnBrk="1" latinLnBrk="0" hangingPunct="1">
-              <a:spcBef>
-                <a:spcPct val="20000"/>
-              </a:spcBef>
-              <a:buFont typeface="Arial" pitchFamily="34" charset="0"/>
-              <a:buChar char="•"/>
-              <a:defRPr sz="1961" kern="1200">
-                <a:solidFill>
-                  <a:schemeClr val="tx1"/>
-                </a:solidFill>
-                <a:latin typeface="+mn-lt"/>
-                <a:ea typeface="+mn-ea"/>
-                <a:cs typeface="+mn-cs"/>
-              </a:defRPr>
-            </a:lvl7pPr>
-            <a:lvl8pPr marL="3428856" indent="-228591" algn="l" defTabSz="914362" rtl="0" eaLnBrk="1" latinLnBrk="0" hangingPunct="1">
-              <a:spcBef>
-                <a:spcPct val="20000"/>
-              </a:spcBef>
-              <a:buFont typeface="Arial" pitchFamily="34" charset="0"/>
-              <a:buChar char="•"/>
-              <a:defRPr sz="1961" kern="1200">
-                <a:solidFill>
-                  <a:schemeClr val="tx1"/>
-                </a:solidFill>
-                <a:latin typeface="+mn-lt"/>
-                <a:ea typeface="+mn-ea"/>
-                <a:cs typeface="+mn-cs"/>
-              </a:defRPr>
-            </a:lvl8pPr>
-            <a:lvl9pPr marL="3886038" indent="-228591" algn="l" defTabSz="914362" rtl="0" eaLnBrk="1" latinLnBrk="0" hangingPunct="1">
-              <a:spcBef>
-                <a:spcPct val="20000"/>
-              </a:spcBef>
-              <a:buFont typeface="Arial" pitchFamily="34" charset="0"/>
-              <a:buChar char="•"/>
-              <a:defRPr sz="1961" kern="1200">
-                <a:solidFill>
-                  <a:schemeClr val="tx1"/>
-                </a:solidFill>
-                <a:latin typeface="+mn-lt"/>
-                <a:ea typeface="+mn-ea"/>
-                <a:cs typeface="+mn-cs"/>
-              </a:defRPr>
-            </a:lvl9pPr>
-          </a:lstStyle>
-          <a:p>
-            <a:pPr>
-              <a:lnSpc>
-                <a:spcPct val="100000"/>
-              </a:lnSpc>
-            </a:pPr>
-            <a:r>
-              <a:rPr lang="en-US" sz="2400">
-                <a:latin typeface="+mn-lt"/>
-              </a:rPr>
-              <a:t>A </a:t>
-            </a:r>
-            <a:r>
-              <a:rPr lang="en-US" sz="2400" b="1">
-                <a:solidFill>
-                  <a:srgbClr val="504BAB"/>
-                </a:solidFill>
-                <a:latin typeface="+mn-lt"/>
-              </a:rPr>
-              <a:t>person</a:t>
-            </a:r>
-            <a:r>
-              <a:rPr lang="en-US" sz="2400">
-                <a:latin typeface="+mn-lt"/>
-              </a:rPr>
-              <a:t> </a:t>
-            </a:r>
-            <a:r>
-              <a:rPr lang="en-US" sz="2400" i="1">
-                <a:latin typeface="+mn-lt"/>
-              </a:rPr>
-              <a:t>or</a:t>
-            </a:r>
-            <a:r>
-              <a:rPr lang="en-US" sz="2400">
-                <a:latin typeface="+mn-lt"/>
-              </a:rPr>
-              <a:t> </a:t>
-            </a:r>
-            <a:r>
-              <a:rPr lang="en-US" sz="2400" b="1">
-                <a:solidFill>
-                  <a:srgbClr val="504BAB"/>
-                </a:solidFill>
-                <a:latin typeface="+mn-lt"/>
-              </a:rPr>
-              <a:t>application</a:t>
-            </a:r>
-            <a:r>
-              <a:rPr lang="en-US" sz="2400">
-                <a:latin typeface="+mn-lt"/>
-              </a:rPr>
-              <a:t> that can authenticate with an AWS account.</a:t>
-            </a:r>
-            <a:endParaRPr lang="en-US" sz="2400">
-              <a:solidFill>
-                <a:srgbClr val="000000"/>
-              </a:solidFill>
-              <a:latin typeface="Amazon Ember Light" panose="020B0403020204020204"/>
-            </a:endParaRPr>
-          </a:p>
-        </p:txBody>
-      </p:sp>
-      <p:pic>
-        <p:nvPicPr>
-          <p:cNvPr id="24" name="Graphic 39">
-            <a:extLst>
-              <a:ext uri="{FF2B5EF4-FFF2-40B4-BE49-F238E27FC236}">
-                <a16:creationId xmlns:a16="http://schemas.microsoft.com/office/drawing/2014/main" id="{76B0BC0A-32A9-5F6C-D1B4-CD15E9677FE8}"/>
-              </a:ext>
-              <a:ext uri="{C183D7F6-B498-43B3-948B-1728B52AA6E4}">
-                <adec:decorative xmlns:adec="http://schemas.microsoft.com/office/drawing/2017/decorative" val="1"/>
-              </a:ext>
-            </a:extLst>
-          </p:cNvPr>
-          <p:cNvPicPr>
-            <a:picLocks noChangeAspect="1"/>
-          </p:cNvPicPr>
-          <p:nvPr/>
-        </p:nvPicPr>
-        <p:blipFill>
-          <a:blip>
-            <a:extLst>
-              <a:ext uri="{96DAC541-7B7A-43D3-8B79-37D633B846F1}">
-                <asvg:svgBlip xmlns:asvg="http://schemas.microsoft.com/office/drawing/2016/SVG/main" r:embed="rId2"/>
-              </a:ext>
-            </a:extLst>
-          </a:blip>
-          <a:stretch>
-            <a:fillRect/>
-          </a:stretch>
-        </p:blipFill>
-        <p:spPr>
-          <a:xfrm>
-            <a:off x="1592964" y="1694509"/>
-            <a:ext cx="651502" cy="651502"/>
-          </a:xfrm>
-          <a:prstGeom prst="rect">
-            <a:avLst/>
-          </a:prstGeom>
-        </p:spPr>
-      </p:pic>
-      <p:sp>
-        <p:nvSpPr>
-          <p:cNvPr id="25" name="TextBox 24">
-            <a:extLst>
-              <a:ext uri="{FF2B5EF4-FFF2-40B4-BE49-F238E27FC236}">
-                <a16:creationId xmlns:a16="http://schemas.microsoft.com/office/drawing/2014/main" id="{F9A1C0D0-8179-5930-7B2A-8AD198EE46C9}"/>
-              </a:ext>
-            </a:extLst>
-          </p:cNvPr>
-          <p:cNvSpPr txBox="1"/>
-          <p:nvPr/>
-        </p:nvSpPr>
-        <p:spPr>
-          <a:xfrm>
-            <a:off x="1126557" y="3448612"/>
-            <a:ext cx="1505861" cy="544765"/>
-          </a:xfrm>
-          <a:prstGeom prst="rect">
-            <a:avLst/>
-          </a:prstGeom>
-          <a:noFill/>
-        </p:spPr>
-        <p:txBody>
-          <a:bodyPr wrap="none" lIns="182880" tIns="146304" rIns="182880" bIns="146304" rtlCol="0">
-            <a:spAutoFit/>
-          </a:bodyPr>
-          <a:lstStyle/>
-          <a:p>
-            <a:pPr algn="ctr">
-              <a:lnSpc>
-                <a:spcPct val="90000"/>
-              </a:lnSpc>
-              <a:spcAft>
-                <a:spcPts val="1800"/>
-              </a:spcAft>
-            </a:pPr>
-            <a:r>
-              <a:rPr lang="en-US" b="1">
-                <a:solidFill>
-                  <a:srgbClr val="504BAB"/>
-                </a:solidFill>
-              </a:rPr>
-              <a:t>IAM group</a:t>
-            </a:r>
-            <a:endParaRPr lang="en-US" b="1">
-              <a:solidFill>
-                <a:srgbClr val="504BAB"/>
-              </a:solidFill>
-              <a:latin typeface="Amazon Ember Light" panose="020B0403020204020204"/>
-            </a:endParaRPr>
-          </a:p>
-        </p:txBody>
-      </p:sp>
-      <p:sp>
-        <p:nvSpPr>
-          <p:cNvPr id="26" name="Content Placeholder 5">
-            <a:extLst>
-              <a:ext uri="{FF2B5EF4-FFF2-40B4-BE49-F238E27FC236}">
-                <a16:creationId xmlns:a16="http://schemas.microsoft.com/office/drawing/2014/main" id="{B43C407E-E2F0-A0C7-7263-8473ADB0ACA8}"/>
-              </a:ext>
-            </a:extLst>
-          </p:cNvPr>
-          <p:cNvSpPr txBox="1">
-            <a:spLocks/>
-          </p:cNvSpPr>
-          <p:nvPr/>
-        </p:nvSpPr>
-        <p:spPr>
-          <a:xfrm>
-            <a:off x="2754426" y="2796963"/>
-            <a:ext cx="7350034" cy="888701"/>
-          </a:xfrm>
-          <a:prstGeom prst="rect">
-            <a:avLst/>
-          </a:prstGeom>
-        </p:spPr>
-        <p:txBody>
-          <a:bodyPr/>
-          <a:lstStyle>
-            <a:lvl1pPr marL="0" marR="0" indent="0" algn="l" defTabSz="914362" rtl="0" eaLnBrk="1" fontAlgn="auto" latinLnBrk="0" hangingPunct="1">
-              <a:lnSpc>
-                <a:spcPct val="90000"/>
-              </a:lnSpc>
-              <a:spcBef>
-                <a:spcPct val="20000"/>
-              </a:spcBef>
-              <a:spcAft>
-                <a:spcPts val="0"/>
-              </a:spcAft>
-              <a:buClrTx/>
-              <a:buSzPct val="90000"/>
-              <a:buFont typeface="Arial" pitchFamily="34" charset="0"/>
-              <a:buNone/>
-              <a:tabLst/>
-              <a:defRPr sz="2667" b="0" kern="1200" spc="0" baseline="0">
-                <a:solidFill>
-                  <a:schemeClr val="tx1"/>
-                </a:solidFill>
-                <a:latin typeface="Amazon Ember" panose="020B0603020204020204" pitchFamily="34" charset="0"/>
-                <a:ea typeface="Amazon Ember" panose="020B0603020204020204" pitchFamily="34" charset="0"/>
-                <a:cs typeface="Amazon Ember" panose="020B0603020204020204" pitchFamily="34" charset="0"/>
-              </a:defRPr>
-            </a:lvl1pPr>
-            <a:lvl2pPr marL="336143" marR="0" indent="0" algn="l" defTabSz="914362" rtl="0" eaLnBrk="1" fontAlgn="auto" latinLnBrk="0" hangingPunct="1">
-              <a:lnSpc>
-                <a:spcPct val="90000"/>
-              </a:lnSpc>
-              <a:spcBef>
-                <a:spcPts val="500"/>
-              </a:spcBef>
-              <a:spcAft>
-                <a:spcPts val="0"/>
-              </a:spcAft>
-              <a:buClrTx/>
-              <a:buSzPct val="90000"/>
-              <a:buFont typeface="Arial" pitchFamily="34" charset="0"/>
-              <a:buNone/>
-              <a:tabLst/>
-              <a:defRPr sz="2000" kern="1200" spc="0" baseline="0">
-                <a:solidFill>
-                  <a:schemeClr val="tx1"/>
-                </a:solidFill>
-                <a:latin typeface="Amazon Ember" panose="020B0603020204020204" pitchFamily="34" charset="0"/>
-                <a:ea typeface="Amazon Ember" panose="020B0603020204020204" pitchFamily="34" charset="0"/>
-                <a:cs typeface="Amazon Ember" panose="020B0603020204020204" pitchFamily="34" charset="0"/>
-              </a:defRPr>
-            </a:lvl2pPr>
-            <a:lvl3pPr marL="560238" marR="0" indent="0" algn="l" defTabSz="914362" rtl="0" eaLnBrk="1" fontAlgn="auto" latinLnBrk="0" hangingPunct="1">
-              <a:lnSpc>
-                <a:spcPct val="90000"/>
-              </a:lnSpc>
-              <a:spcBef>
-                <a:spcPts val="500"/>
-              </a:spcBef>
-              <a:spcAft>
-                <a:spcPts val="0"/>
-              </a:spcAft>
-              <a:buClrTx/>
-              <a:buSzPct val="90000"/>
-              <a:buFont typeface="Arial" pitchFamily="34" charset="0"/>
-              <a:buNone/>
-              <a:tabLst/>
-              <a:defRPr sz="2000" kern="1200" spc="0" baseline="0">
-                <a:solidFill>
-                  <a:schemeClr val="tx1"/>
-                </a:solidFill>
-                <a:latin typeface="Amazon Ember" panose="020B0603020204020204" pitchFamily="34" charset="0"/>
-                <a:ea typeface="Amazon Ember" panose="020B0603020204020204" pitchFamily="34" charset="0"/>
-                <a:cs typeface="Amazon Ember" panose="020B0603020204020204" pitchFamily="34" charset="0"/>
-              </a:defRPr>
-            </a:lvl3pPr>
-            <a:lvl4pPr marL="784334" marR="0" indent="0" algn="l" defTabSz="914362" rtl="0" eaLnBrk="1" fontAlgn="auto" latinLnBrk="0" hangingPunct="1">
-              <a:lnSpc>
-                <a:spcPct val="90000"/>
-              </a:lnSpc>
-              <a:spcBef>
-                <a:spcPts val="500"/>
-              </a:spcBef>
-              <a:spcAft>
-                <a:spcPts val="0"/>
-              </a:spcAft>
-              <a:buClrTx/>
-              <a:buSzPct val="90000"/>
-              <a:buFont typeface="Arial" pitchFamily="34" charset="0"/>
-              <a:buNone/>
-              <a:tabLst/>
-              <a:defRPr sz="1667" kern="1200" spc="0" baseline="0">
-                <a:solidFill>
-                  <a:schemeClr val="tx1"/>
-                </a:solidFill>
-                <a:latin typeface="Amazon Ember" panose="020B0603020204020204" pitchFamily="34" charset="0"/>
-                <a:ea typeface="Amazon Ember" panose="020B0603020204020204" pitchFamily="34" charset="0"/>
-                <a:cs typeface="Amazon Ember" panose="020B0603020204020204" pitchFamily="34" charset="0"/>
-              </a:defRPr>
-            </a:lvl4pPr>
-            <a:lvl5pPr marL="1008429" marR="0" indent="0" algn="l" defTabSz="914362" rtl="0" eaLnBrk="1" fontAlgn="auto" latinLnBrk="0" hangingPunct="1">
-              <a:lnSpc>
-                <a:spcPct val="90000"/>
-              </a:lnSpc>
-              <a:spcBef>
-                <a:spcPts val="500"/>
-              </a:spcBef>
-              <a:spcAft>
-                <a:spcPts val="0"/>
-              </a:spcAft>
-              <a:buClrTx/>
-              <a:buSzPct val="90000"/>
-              <a:buFont typeface="Arial" pitchFamily="34" charset="0"/>
-              <a:buNone/>
-              <a:tabLst/>
-              <a:defRPr sz="1667" kern="1200" spc="0" baseline="0">
-                <a:solidFill>
-                  <a:schemeClr val="tx1"/>
-                </a:solidFill>
-                <a:latin typeface="Amazon Ember" panose="020B0603020204020204" pitchFamily="34" charset="0"/>
-                <a:ea typeface="Amazon Ember" panose="020B0603020204020204" pitchFamily="34" charset="0"/>
-                <a:cs typeface="Amazon Ember" panose="020B0603020204020204" pitchFamily="34" charset="0"/>
-              </a:defRPr>
-            </a:lvl5pPr>
-            <a:lvl6pPr marL="2514494" indent="-228591" algn="l" defTabSz="914362" rtl="0" eaLnBrk="1" latinLnBrk="0" hangingPunct="1">
-              <a:spcBef>
-                <a:spcPct val="20000"/>
-              </a:spcBef>
-              <a:buFont typeface="Arial" pitchFamily="34" charset="0"/>
-              <a:buChar char="•"/>
-              <a:defRPr sz="1961" kern="1200">
-                <a:solidFill>
-                  <a:schemeClr val="tx1"/>
-                </a:solidFill>
-                <a:latin typeface="+mn-lt"/>
-                <a:ea typeface="+mn-ea"/>
-                <a:cs typeface="+mn-cs"/>
-              </a:defRPr>
-            </a:lvl6pPr>
-            <a:lvl7pPr marL="2971675" indent="-228591" algn="l" defTabSz="914362" rtl="0" eaLnBrk="1" latinLnBrk="0" hangingPunct="1">
-              <a:spcBef>
-                <a:spcPct val="20000"/>
-              </a:spcBef>
-              <a:buFont typeface="Arial" pitchFamily="34" charset="0"/>
-              <a:buChar char="•"/>
-              <a:defRPr sz="1961" kern="1200">
-                <a:solidFill>
-                  <a:schemeClr val="tx1"/>
-                </a:solidFill>
-                <a:latin typeface="+mn-lt"/>
-                <a:ea typeface="+mn-ea"/>
-                <a:cs typeface="+mn-cs"/>
-              </a:defRPr>
-            </a:lvl7pPr>
-            <a:lvl8pPr marL="3428856" indent="-228591" algn="l" defTabSz="914362" rtl="0" eaLnBrk="1" latinLnBrk="0" hangingPunct="1">
-              <a:spcBef>
-                <a:spcPct val="20000"/>
-              </a:spcBef>
-              <a:buFont typeface="Arial" pitchFamily="34" charset="0"/>
-              <a:buChar char="•"/>
-              <a:defRPr sz="1961" kern="1200">
-                <a:solidFill>
-                  <a:schemeClr val="tx1"/>
-                </a:solidFill>
-                <a:latin typeface="+mn-lt"/>
-                <a:ea typeface="+mn-ea"/>
-                <a:cs typeface="+mn-cs"/>
-              </a:defRPr>
-            </a:lvl8pPr>
-            <a:lvl9pPr marL="3886038" indent="-228591" algn="l" defTabSz="914362" rtl="0" eaLnBrk="1" latinLnBrk="0" hangingPunct="1">
-              <a:spcBef>
-                <a:spcPct val="20000"/>
-              </a:spcBef>
-              <a:buFont typeface="Arial" pitchFamily="34" charset="0"/>
-              <a:buChar char="•"/>
-              <a:defRPr sz="1961" kern="1200">
-                <a:solidFill>
-                  <a:schemeClr val="tx1"/>
-                </a:solidFill>
-                <a:latin typeface="+mn-lt"/>
-                <a:ea typeface="+mn-ea"/>
-                <a:cs typeface="+mn-cs"/>
-              </a:defRPr>
-            </a:lvl9pPr>
-          </a:lstStyle>
-          <a:p>
-            <a:pPr>
-              <a:lnSpc>
-                <a:spcPct val="100000"/>
-              </a:lnSpc>
-            </a:pPr>
-            <a:r>
-              <a:rPr lang="en-US" sz="2400">
-                <a:latin typeface="+mn-lt"/>
-              </a:rPr>
-              <a:t>A </a:t>
-            </a:r>
-            <a:r>
-              <a:rPr lang="en-US" sz="2400" b="1">
-                <a:solidFill>
-                  <a:srgbClr val="504BAB"/>
-                </a:solidFill>
-                <a:latin typeface="+mn-lt"/>
-              </a:rPr>
-              <a:t>collection</a:t>
-            </a:r>
-            <a:r>
-              <a:rPr lang="en-US" sz="2400">
-                <a:solidFill>
-                  <a:srgbClr val="504BAB"/>
-                </a:solidFill>
-                <a:latin typeface="+mn-lt"/>
-              </a:rPr>
-              <a:t> </a:t>
-            </a:r>
-            <a:r>
-              <a:rPr lang="en-US" sz="2400" b="1">
-                <a:solidFill>
-                  <a:srgbClr val="504BAB"/>
-                </a:solidFill>
-                <a:latin typeface="+mn-lt"/>
-              </a:rPr>
-              <a:t>of IAM users </a:t>
-            </a:r>
-            <a:r>
-              <a:rPr lang="en-US" sz="2400">
-                <a:latin typeface="+mn-lt"/>
-              </a:rPr>
-              <a:t>that are granted identical authorization.</a:t>
-            </a:r>
-          </a:p>
-        </p:txBody>
-      </p:sp>
-      <p:pic>
-        <p:nvPicPr>
-          <p:cNvPr id="27" name="Graphic 41">
-            <a:extLst>
-              <a:ext uri="{FF2B5EF4-FFF2-40B4-BE49-F238E27FC236}">
-                <a16:creationId xmlns:a16="http://schemas.microsoft.com/office/drawing/2014/main" id="{88AEC283-3492-D2B1-A3F3-AF4B0BBEA4DC}"/>
-              </a:ext>
-              <a:ext uri="{C183D7F6-B498-43B3-948B-1728B52AA6E4}">
-                <adec:decorative xmlns:adec="http://schemas.microsoft.com/office/drawing/2017/decorative" val="1"/>
-              </a:ext>
-            </a:extLst>
-          </p:cNvPr>
-          <p:cNvPicPr>
-            <a:picLocks noChangeAspect="1"/>
-          </p:cNvPicPr>
-          <p:nvPr/>
-        </p:nvPicPr>
-        <p:blipFill>
-          <a:blip>
-            <a:extLst>
-              <a:ext uri="{96DAC541-7B7A-43D3-8B79-37D633B846F1}">
-                <asvg:svgBlip xmlns:asvg="http://schemas.microsoft.com/office/drawing/2016/SVG/main" r:embed="rId3"/>
-              </a:ext>
-            </a:extLst>
-          </a:blip>
-          <a:stretch>
-            <a:fillRect/>
-          </a:stretch>
-        </p:blipFill>
-        <p:spPr>
-          <a:xfrm flipH="1">
-            <a:off x="1560196" y="2849569"/>
-            <a:ext cx="717038" cy="696745"/>
-          </a:xfrm>
-          <a:prstGeom prst="rect">
-            <a:avLst/>
-          </a:prstGeom>
-        </p:spPr>
-      </p:pic>
-      <p:sp>
-        <p:nvSpPr>
-          <p:cNvPr id="28" name="TextBox 27">
-            <a:extLst>
-              <a:ext uri="{FF2B5EF4-FFF2-40B4-BE49-F238E27FC236}">
-                <a16:creationId xmlns:a16="http://schemas.microsoft.com/office/drawing/2014/main" id="{B37CFDDE-E015-4C75-24BE-067E73912249}"/>
-              </a:ext>
-            </a:extLst>
-          </p:cNvPr>
-          <p:cNvSpPr txBox="1"/>
-          <p:nvPr/>
-        </p:nvSpPr>
-        <p:spPr>
-          <a:xfrm>
-            <a:off x="1128915" y="4645026"/>
-            <a:ext cx="1579600" cy="572464"/>
-          </a:xfrm>
-          <a:prstGeom prst="rect">
-            <a:avLst/>
-          </a:prstGeom>
-          <a:noFill/>
-          <a:effectLst/>
-        </p:spPr>
-        <p:txBody>
-          <a:bodyPr wrap="none" lIns="182880" tIns="146304" rIns="182880" bIns="146304" rtlCol="0">
-            <a:spAutoFit/>
-          </a:bodyPr>
-          <a:lstStyle/>
-          <a:p>
-            <a:pPr algn="ctr">
-              <a:lnSpc>
-                <a:spcPct val="90000"/>
-              </a:lnSpc>
-              <a:spcAft>
-                <a:spcPts val="1800"/>
-              </a:spcAft>
-            </a:pPr>
-            <a:r>
-              <a:rPr lang="en-US" sz="2000" b="1">
-                <a:solidFill>
-                  <a:srgbClr val="504BAB"/>
-                </a:solidFill>
-              </a:rPr>
-              <a:t>IAM p</a:t>
-            </a:r>
-            <a:r>
-              <a:rPr lang="en-US" b="1">
-                <a:solidFill>
-                  <a:srgbClr val="504BAB"/>
-                </a:solidFill>
-              </a:rPr>
-              <a:t>olicy</a:t>
-            </a:r>
-            <a:endParaRPr lang="en-US" sz="2000" b="1">
-              <a:solidFill>
-                <a:srgbClr val="504BAB"/>
-              </a:solidFill>
-              <a:latin typeface="Amazon Ember Light" panose="020B0403020204020204"/>
-            </a:endParaRPr>
-          </a:p>
-        </p:txBody>
-      </p:sp>
-      <p:sp>
-        <p:nvSpPr>
-          <p:cNvPr id="29" name="Content Placeholder 5">
-            <a:extLst>
-              <a:ext uri="{FF2B5EF4-FFF2-40B4-BE49-F238E27FC236}">
-                <a16:creationId xmlns:a16="http://schemas.microsoft.com/office/drawing/2014/main" id="{D88EEBBB-1810-CC1A-14B7-6EB90A9DD7F1}"/>
-              </a:ext>
-            </a:extLst>
-          </p:cNvPr>
-          <p:cNvSpPr txBox="1">
-            <a:spLocks/>
-          </p:cNvSpPr>
-          <p:nvPr/>
-        </p:nvSpPr>
-        <p:spPr>
-          <a:xfrm>
-            <a:off x="2754426" y="3977120"/>
-            <a:ext cx="7350034" cy="888701"/>
-          </a:xfrm>
-          <a:prstGeom prst="rect">
-            <a:avLst/>
-          </a:prstGeom>
-        </p:spPr>
-        <p:txBody>
-          <a:bodyPr/>
-          <a:lstStyle>
-            <a:lvl1pPr marL="0" marR="0" indent="0" algn="l" defTabSz="914362" rtl="0" eaLnBrk="1" fontAlgn="auto" latinLnBrk="0" hangingPunct="1">
-              <a:lnSpc>
-                <a:spcPct val="90000"/>
-              </a:lnSpc>
-              <a:spcBef>
-                <a:spcPct val="20000"/>
-              </a:spcBef>
-              <a:spcAft>
-                <a:spcPts val="0"/>
-              </a:spcAft>
-              <a:buClrTx/>
-              <a:buSzPct val="90000"/>
-              <a:buFont typeface="Arial" pitchFamily="34" charset="0"/>
-              <a:buNone/>
-              <a:tabLst/>
-              <a:defRPr sz="2667" b="0" kern="1200" spc="0" baseline="0">
-                <a:solidFill>
-                  <a:schemeClr val="tx1"/>
-                </a:solidFill>
-                <a:latin typeface="Amazon Ember" panose="020B0603020204020204" pitchFamily="34" charset="0"/>
-                <a:ea typeface="Amazon Ember" panose="020B0603020204020204" pitchFamily="34" charset="0"/>
-                <a:cs typeface="Amazon Ember" panose="020B0603020204020204" pitchFamily="34" charset="0"/>
-              </a:defRPr>
-            </a:lvl1pPr>
-            <a:lvl2pPr marL="336143" marR="0" indent="0" algn="l" defTabSz="914362" rtl="0" eaLnBrk="1" fontAlgn="auto" latinLnBrk="0" hangingPunct="1">
-              <a:lnSpc>
-                <a:spcPct val="90000"/>
-              </a:lnSpc>
-              <a:spcBef>
-                <a:spcPts val="500"/>
-              </a:spcBef>
-              <a:spcAft>
-                <a:spcPts val="0"/>
-              </a:spcAft>
-              <a:buClrTx/>
-              <a:buSzPct val="90000"/>
-              <a:buFont typeface="Arial" pitchFamily="34" charset="0"/>
-              <a:buNone/>
-              <a:tabLst/>
-              <a:defRPr sz="2000" kern="1200" spc="0" baseline="0">
-                <a:solidFill>
-                  <a:schemeClr val="tx1"/>
-                </a:solidFill>
-                <a:latin typeface="Amazon Ember" panose="020B0603020204020204" pitchFamily="34" charset="0"/>
-                <a:ea typeface="Amazon Ember" panose="020B0603020204020204" pitchFamily="34" charset="0"/>
-                <a:cs typeface="Amazon Ember" panose="020B0603020204020204" pitchFamily="34" charset="0"/>
-              </a:defRPr>
-            </a:lvl2pPr>
-            <a:lvl3pPr marL="560238" marR="0" indent="0" algn="l" defTabSz="914362" rtl="0" eaLnBrk="1" fontAlgn="auto" latinLnBrk="0" hangingPunct="1">
-              <a:lnSpc>
-                <a:spcPct val="90000"/>
-              </a:lnSpc>
-              <a:spcBef>
-                <a:spcPts val="500"/>
-              </a:spcBef>
-              <a:spcAft>
-                <a:spcPts val="0"/>
-              </a:spcAft>
-              <a:buClrTx/>
-              <a:buSzPct val="90000"/>
-              <a:buFont typeface="Arial" pitchFamily="34" charset="0"/>
-              <a:buNone/>
-              <a:tabLst/>
-              <a:defRPr sz="2000" kern="1200" spc="0" baseline="0">
-                <a:solidFill>
-                  <a:schemeClr val="tx1"/>
-                </a:solidFill>
-                <a:latin typeface="Amazon Ember" panose="020B0603020204020204" pitchFamily="34" charset="0"/>
-                <a:ea typeface="Amazon Ember" panose="020B0603020204020204" pitchFamily="34" charset="0"/>
-                <a:cs typeface="Amazon Ember" panose="020B0603020204020204" pitchFamily="34" charset="0"/>
-              </a:defRPr>
-            </a:lvl3pPr>
-            <a:lvl4pPr marL="784334" marR="0" indent="0" algn="l" defTabSz="914362" rtl="0" eaLnBrk="1" fontAlgn="auto" latinLnBrk="0" hangingPunct="1">
-              <a:lnSpc>
-                <a:spcPct val="90000"/>
-              </a:lnSpc>
-              <a:spcBef>
-                <a:spcPts val="500"/>
-              </a:spcBef>
-              <a:spcAft>
-                <a:spcPts val="0"/>
-              </a:spcAft>
-              <a:buClrTx/>
-              <a:buSzPct val="90000"/>
-              <a:buFont typeface="Arial" pitchFamily="34" charset="0"/>
-              <a:buNone/>
-              <a:tabLst/>
-              <a:defRPr sz="1667" kern="1200" spc="0" baseline="0">
-                <a:solidFill>
-                  <a:schemeClr val="tx1"/>
-                </a:solidFill>
-                <a:latin typeface="Amazon Ember" panose="020B0603020204020204" pitchFamily="34" charset="0"/>
-                <a:ea typeface="Amazon Ember" panose="020B0603020204020204" pitchFamily="34" charset="0"/>
-                <a:cs typeface="Amazon Ember" panose="020B0603020204020204" pitchFamily="34" charset="0"/>
-              </a:defRPr>
-            </a:lvl4pPr>
-            <a:lvl5pPr marL="1008429" marR="0" indent="0" algn="l" defTabSz="914362" rtl="0" eaLnBrk="1" fontAlgn="auto" latinLnBrk="0" hangingPunct="1">
-              <a:lnSpc>
-                <a:spcPct val="90000"/>
-              </a:lnSpc>
-              <a:spcBef>
-                <a:spcPts val="500"/>
-              </a:spcBef>
-              <a:spcAft>
-                <a:spcPts val="0"/>
-              </a:spcAft>
-              <a:buClrTx/>
-              <a:buSzPct val="90000"/>
-              <a:buFont typeface="Arial" pitchFamily="34" charset="0"/>
-              <a:buNone/>
-              <a:tabLst/>
-              <a:defRPr sz="1667" kern="1200" spc="0" baseline="0">
-                <a:solidFill>
-                  <a:schemeClr val="tx1"/>
-                </a:solidFill>
-                <a:latin typeface="Amazon Ember" panose="020B0603020204020204" pitchFamily="34" charset="0"/>
-                <a:ea typeface="Amazon Ember" panose="020B0603020204020204" pitchFamily="34" charset="0"/>
-                <a:cs typeface="Amazon Ember" panose="020B0603020204020204" pitchFamily="34" charset="0"/>
-              </a:defRPr>
-            </a:lvl5pPr>
-            <a:lvl6pPr marL="2514494" indent="-228591" algn="l" defTabSz="914362" rtl="0" eaLnBrk="1" latinLnBrk="0" hangingPunct="1">
-              <a:spcBef>
-                <a:spcPct val="20000"/>
-              </a:spcBef>
-              <a:buFont typeface="Arial" pitchFamily="34" charset="0"/>
-              <a:buChar char="•"/>
-              <a:defRPr sz="1961" kern="1200">
-                <a:solidFill>
-                  <a:schemeClr val="tx1"/>
-                </a:solidFill>
-                <a:latin typeface="+mn-lt"/>
-                <a:ea typeface="+mn-ea"/>
-                <a:cs typeface="+mn-cs"/>
-              </a:defRPr>
-            </a:lvl6pPr>
-            <a:lvl7pPr marL="2971675" indent="-228591" algn="l" defTabSz="914362" rtl="0" eaLnBrk="1" latinLnBrk="0" hangingPunct="1">
-              <a:spcBef>
-                <a:spcPct val="20000"/>
-              </a:spcBef>
-              <a:buFont typeface="Arial" pitchFamily="34" charset="0"/>
-              <a:buChar char="•"/>
-              <a:defRPr sz="1961" kern="1200">
-                <a:solidFill>
-                  <a:schemeClr val="tx1"/>
-                </a:solidFill>
-                <a:latin typeface="+mn-lt"/>
-                <a:ea typeface="+mn-ea"/>
-                <a:cs typeface="+mn-cs"/>
-              </a:defRPr>
-            </a:lvl7pPr>
-            <a:lvl8pPr marL="3428856" indent="-228591" algn="l" defTabSz="914362" rtl="0" eaLnBrk="1" latinLnBrk="0" hangingPunct="1">
-              <a:spcBef>
-                <a:spcPct val="20000"/>
-              </a:spcBef>
-              <a:buFont typeface="Arial" pitchFamily="34" charset="0"/>
-              <a:buChar char="•"/>
-              <a:defRPr sz="1961" kern="1200">
-                <a:solidFill>
-                  <a:schemeClr val="tx1"/>
-                </a:solidFill>
-                <a:latin typeface="+mn-lt"/>
-                <a:ea typeface="+mn-ea"/>
-                <a:cs typeface="+mn-cs"/>
-              </a:defRPr>
-            </a:lvl8pPr>
-            <a:lvl9pPr marL="3886038" indent="-228591" algn="l" defTabSz="914362" rtl="0" eaLnBrk="1" latinLnBrk="0" hangingPunct="1">
-              <a:spcBef>
-                <a:spcPct val="20000"/>
-              </a:spcBef>
-              <a:buFont typeface="Arial" pitchFamily="34" charset="0"/>
-              <a:buChar char="•"/>
-              <a:defRPr sz="1961" kern="1200">
-                <a:solidFill>
-                  <a:schemeClr val="tx1"/>
-                </a:solidFill>
-                <a:latin typeface="+mn-lt"/>
-                <a:ea typeface="+mn-ea"/>
-                <a:cs typeface="+mn-cs"/>
-              </a:defRPr>
-            </a:lvl9pPr>
-          </a:lstStyle>
-          <a:p>
-            <a:pPr>
-              <a:lnSpc>
-                <a:spcPct val="100000"/>
-              </a:lnSpc>
-            </a:pPr>
-            <a:r>
-              <a:rPr lang="en-US" sz="2400">
-                <a:latin typeface="+mn-lt"/>
-              </a:rPr>
-              <a:t>The document that defines</a:t>
-            </a:r>
-            <a:r>
-              <a:rPr lang="en-US" sz="2400" b="1">
-                <a:solidFill>
-                  <a:schemeClr val="accent5"/>
-                </a:solidFill>
-                <a:latin typeface="+mn-lt"/>
-              </a:rPr>
-              <a:t> </a:t>
-            </a:r>
-            <a:r>
-              <a:rPr lang="en-US" sz="2400" b="1">
-                <a:solidFill>
-                  <a:srgbClr val="504BAB"/>
-                </a:solidFill>
-                <a:latin typeface="+mn-lt"/>
-              </a:rPr>
-              <a:t>which resources can be accessed</a:t>
-            </a:r>
-            <a:r>
-              <a:rPr lang="en-US" sz="2400">
-                <a:latin typeface="+mn-lt"/>
-              </a:rPr>
-              <a:t> and the </a:t>
-            </a:r>
-            <a:r>
-              <a:rPr lang="en-US" sz="2400" b="1">
-                <a:solidFill>
-                  <a:srgbClr val="504BAB"/>
-                </a:solidFill>
-                <a:latin typeface="+mn-lt"/>
-              </a:rPr>
-              <a:t>level of access</a:t>
-            </a:r>
-            <a:r>
-              <a:rPr lang="en-US" sz="2400">
-                <a:solidFill>
-                  <a:srgbClr val="504BAB"/>
-                </a:solidFill>
-                <a:latin typeface="+mn-lt"/>
-              </a:rPr>
-              <a:t> </a:t>
-            </a:r>
-            <a:r>
-              <a:rPr lang="en-US" sz="2400">
-                <a:latin typeface="+mn-lt"/>
-              </a:rPr>
-              <a:t>to each resource.</a:t>
-            </a:r>
-          </a:p>
-        </p:txBody>
-      </p:sp>
-      <p:pic>
-        <p:nvPicPr>
-          <p:cNvPr id="30" name="Picture 29">
-            <a:extLst>
-              <a:ext uri="{FF2B5EF4-FFF2-40B4-BE49-F238E27FC236}">
-                <a16:creationId xmlns:a16="http://schemas.microsoft.com/office/drawing/2014/main" id="{93CD5E06-9254-87F7-A638-0794EE47D60A}"/>
-              </a:ext>
-              <a:ext uri="{C183D7F6-B498-43B3-948B-1728B52AA6E4}">
-                <adec:decorative xmlns:adec="http://schemas.microsoft.com/office/drawing/2017/decorative" val="1"/>
-              </a:ext>
-            </a:extLst>
-          </p:cNvPr>
-          <p:cNvPicPr>
-            <a:picLocks noChangeAspect="1"/>
-          </p:cNvPicPr>
-          <p:nvPr/>
-        </p:nvPicPr>
-        <p:blipFill>
-          <a:blip r:embed="rId4">
-            <a:biLevel thresh="75000"/>
-            <a:extLst>
-              <a:ext uri="{BEBA8EAE-BF5A-486C-A8C5-ECC9F3942E4B}">
-                <a14:imgProps xmlns:a14="http://schemas.microsoft.com/office/drawing/2010/main">
-                  <a14:imgLayer r:embed="rId5">
-                    <a14:imgEffect>
-                      <a14:saturation sat="0"/>
-                    </a14:imgEffect>
-                  </a14:imgLayer>
-                </a14:imgProps>
-              </a:ext>
-            </a:extLst>
-          </a:blip>
-          <a:stretch>
-            <a:fillRect/>
-          </a:stretch>
-        </p:blipFill>
-        <p:spPr>
-          <a:xfrm>
-            <a:off x="1580063" y="4049872"/>
-            <a:ext cx="677304" cy="677304"/>
-          </a:xfrm>
-          <a:prstGeom prst="rect">
-            <a:avLst/>
-          </a:prstGeom>
-          <a:noFill/>
-        </p:spPr>
-      </p:pic>
-      <p:sp>
-        <p:nvSpPr>
-          <p:cNvPr id="31" name="TextBox 30">
-            <a:extLst>
-              <a:ext uri="{FF2B5EF4-FFF2-40B4-BE49-F238E27FC236}">
-                <a16:creationId xmlns:a16="http://schemas.microsoft.com/office/drawing/2014/main" id="{80CB20FD-ABE1-8D8E-8114-D9704E3E1885}"/>
-              </a:ext>
-            </a:extLst>
-          </p:cNvPr>
-          <p:cNvSpPr txBox="1"/>
-          <p:nvPr/>
-        </p:nvSpPr>
-        <p:spPr>
-          <a:xfrm>
-            <a:off x="1206651" y="5618221"/>
-            <a:ext cx="1351973" cy="572464"/>
-          </a:xfrm>
-          <a:prstGeom prst="rect">
-            <a:avLst/>
-          </a:prstGeom>
-          <a:noFill/>
-          <a:effectLst/>
-        </p:spPr>
-        <p:txBody>
-          <a:bodyPr wrap="none" lIns="182880" tIns="146304" rIns="182880" bIns="146304" rtlCol="0">
-            <a:spAutoFit/>
-          </a:bodyPr>
-          <a:lstStyle/>
-          <a:p>
-            <a:pPr algn="ctr">
-              <a:lnSpc>
-                <a:spcPct val="90000"/>
-              </a:lnSpc>
-              <a:spcAft>
-                <a:spcPts val="1800"/>
-              </a:spcAft>
-            </a:pPr>
-            <a:r>
-              <a:rPr lang="en-US" sz="2000" b="1">
-                <a:solidFill>
-                  <a:srgbClr val="504BAB"/>
-                </a:solidFill>
-              </a:rPr>
-              <a:t>IAM r</a:t>
-            </a:r>
-            <a:r>
-              <a:rPr lang="en-US" b="1">
-                <a:solidFill>
-                  <a:srgbClr val="504BAB"/>
-                </a:solidFill>
-              </a:rPr>
-              <a:t>ole</a:t>
-            </a:r>
-            <a:endParaRPr lang="en-US" sz="2000" b="1">
-              <a:solidFill>
-                <a:srgbClr val="504BAB"/>
-              </a:solidFill>
-              <a:latin typeface="Amazon Ember Light" panose="020B0403020204020204"/>
-            </a:endParaRPr>
-          </a:p>
-        </p:txBody>
-      </p:sp>
-      <p:sp>
-        <p:nvSpPr>
-          <p:cNvPr id="32" name="Content Placeholder 5">
-            <a:extLst>
-              <a:ext uri="{FF2B5EF4-FFF2-40B4-BE49-F238E27FC236}">
-                <a16:creationId xmlns:a16="http://schemas.microsoft.com/office/drawing/2014/main" id="{CEC4AC02-840F-BC8F-8533-3F00A3BDF196}"/>
-              </a:ext>
-            </a:extLst>
-          </p:cNvPr>
-          <p:cNvSpPr txBox="1">
-            <a:spLocks/>
-          </p:cNvSpPr>
-          <p:nvPr/>
-        </p:nvSpPr>
-        <p:spPr>
-          <a:xfrm>
-            <a:off x="2754426" y="5217490"/>
-            <a:ext cx="7350034" cy="888701"/>
-          </a:xfrm>
-          <a:prstGeom prst="rect">
-            <a:avLst/>
-          </a:prstGeom>
-        </p:spPr>
-        <p:txBody>
-          <a:bodyPr/>
-          <a:lstStyle>
-            <a:lvl1pPr marL="0" marR="0" indent="0" algn="l" defTabSz="914362" rtl="0" eaLnBrk="1" fontAlgn="auto" latinLnBrk="0" hangingPunct="1">
-              <a:lnSpc>
-                <a:spcPct val="90000"/>
-              </a:lnSpc>
-              <a:spcBef>
-                <a:spcPct val="20000"/>
-              </a:spcBef>
-              <a:spcAft>
-                <a:spcPts val="0"/>
-              </a:spcAft>
-              <a:buClrTx/>
-              <a:buSzPct val="90000"/>
-              <a:buFont typeface="Arial" pitchFamily="34" charset="0"/>
-              <a:buNone/>
-              <a:tabLst/>
-              <a:defRPr sz="2667" b="0" kern="1200" spc="0" baseline="0">
-                <a:solidFill>
-                  <a:schemeClr val="tx1"/>
-                </a:solidFill>
-                <a:latin typeface="Amazon Ember" panose="020B0603020204020204" pitchFamily="34" charset="0"/>
-                <a:ea typeface="Amazon Ember" panose="020B0603020204020204" pitchFamily="34" charset="0"/>
-                <a:cs typeface="Amazon Ember" panose="020B0603020204020204" pitchFamily="34" charset="0"/>
-              </a:defRPr>
-            </a:lvl1pPr>
-            <a:lvl2pPr marL="336143" marR="0" indent="0" algn="l" defTabSz="914362" rtl="0" eaLnBrk="1" fontAlgn="auto" latinLnBrk="0" hangingPunct="1">
-              <a:lnSpc>
-                <a:spcPct val="90000"/>
-              </a:lnSpc>
-              <a:spcBef>
-                <a:spcPts val="500"/>
-              </a:spcBef>
-              <a:spcAft>
-                <a:spcPts val="0"/>
-              </a:spcAft>
-              <a:buClrTx/>
-              <a:buSzPct val="90000"/>
-              <a:buFont typeface="Arial" pitchFamily="34" charset="0"/>
-              <a:buNone/>
-              <a:tabLst/>
-              <a:defRPr sz="2000" kern="1200" spc="0" baseline="0">
-                <a:solidFill>
-                  <a:schemeClr val="tx1"/>
-                </a:solidFill>
-                <a:latin typeface="Amazon Ember" panose="020B0603020204020204" pitchFamily="34" charset="0"/>
-                <a:ea typeface="Amazon Ember" panose="020B0603020204020204" pitchFamily="34" charset="0"/>
-                <a:cs typeface="Amazon Ember" panose="020B0603020204020204" pitchFamily="34" charset="0"/>
-              </a:defRPr>
-            </a:lvl2pPr>
-            <a:lvl3pPr marL="560238" marR="0" indent="0" algn="l" defTabSz="914362" rtl="0" eaLnBrk="1" fontAlgn="auto" latinLnBrk="0" hangingPunct="1">
-              <a:lnSpc>
-                <a:spcPct val="90000"/>
-              </a:lnSpc>
-              <a:spcBef>
-                <a:spcPts val="500"/>
-              </a:spcBef>
-              <a:spcAft>
-                <a:spcPts val="0"/>
-              </a:spcAft>
-              <a:buClrTx/>
-              <a:buSzPct val="90000"/>
-              <a:buFont typeface="Arial" pitchFamily="34" charset="0"/>
-              <a:buNone/>
-              <a:tabLst/>
-              <a:defRPr sz="2000" kern="1200" spc="0" baseline="0">
-                <a:solidFill>
-                  <a:schemeClr val="tx1"/>
-                </a:solidFill>
-                <a:latin typeface="Amazon Ember" panose="020B0603020204020204" pitchFamily="34" charset="0"/>
-                <a:ea typeface="Amazon Ember" panose="020B0603020204020204" pitchFamily="34" charset="0"/>
-                <a:cs typeface="Amazon Ember" panose="020B0603020204020204" pitchFamily="34" charset="0"/>
-              </a:defRPr>
-            </a:lvl3pPr>
-            <a:lvl4pPr marL="784334" marR="0" indent="0" algn="l" defTabSz="914362" rtl="0" eaLnBrk="1" fontAlgn="auto" latinLnBrk="0" hangingPunct="1">
-              <a:lnSpc>
-                <a:spcPct val="90000"/>
-              </a:lnSpc>
-              <a:spcBef>
-                <a:spcPts val="500"/>
-              </a:spcBef>
-              <a:spcAft>
-                <a:spcPts val="0"/>
-              </a:spcAft>
-              <a:buClrTx/>
-              <a:buSzPct val="90000"/>
-              <a:buFont typeface="Arial" pitchFamily="34" charset="0"/>
-              <a:buNone/>
-              <a:tabLst/>
-              <a:defRPr sz="1667" kern="1200" spc="0" baseline="0">
-                <a:solidFill>
-                  <a:schemeClr val="tx1"/>
-                </a:solidFill>
-                <a:latin typeface="Amazon Ember" panose="020B0603020204020204" pitchFamily="34" charset="0"/>
-                <a:ea typeface="Amazon Ember" panose="020B0603020204020204" pitchFamily="34" charset="0"/>
-                <a:cs typeface="Amazon Ember" panose="020B0603020204020204" pitchFamily="34" charset="0"/>
-              </a:defRPr>
-            </a:lvl4pPr>
-            <a:lvl5pPr marL="1008429" marR="0" indent="0" algn="l" defTabSz="914362" rtl="0" eaLnBrk="1" fontAlgn="auto" latinLnBrk="0" hangingPunct="1">
-              <a:lnSpc>
-                <a:spcPct val="90000"/>
-              </a:lnSpc>
-              <a:spcBef>
-                <a:spcPts val="500"/>
-              </a:spcBef>
-              <a:spcAft>
-                <a:spcPts val="0"/>
-              </a:spcAft>
-              <a:buClrTx/>
-              <a:buSzPct val="90000"/>
-              <a:buFont typeface="Arial" pitchFamily="34" charset="0"/>
-              <a:buNone/>
-              <a:tabLst/>
-              <a:defRPr sz="1667" kern="1200" spc="0" baseline="0">
-                <a:solidFill>
-                  <a:schemeClr val="tx1"/>
-                </a:solidFill>
-                <a:latin typeface="Amazon Ember" panose="020B0603020204020204" pitchFamily="34" charset="0"/>
-                <a:ea typeface="Amazon Ember" panose="020B0603020204020204" pitchFamily="34" charset="0"/>
-                <a:cs typeface="Amazon Ember" panose="020B0603020204020204" pitchFamily="34" charset="0"/>
-              </a:defRPr>
-            </a:lvl5pPr>
-            <a:lvl6pPr marL="2514494" indent="-228591" algn="l" defTabSz="914362" rtl="0" eaLnBrk="1" latinLnBrk="0" hangingPunct="1">
-              <a:spcBef>
-                <a:spcPct val="20000"/>
-              </a:spcBef>
-              <a:buFont typeface="Arial" pitchFamily="34" charset="0"/>
-              <a:buChar char="•"/>
-              <a:defRPr sz="1961" kern="1200">
-                <a:solidFill>
-                  <a:schemeClr val="tx1"/>
-                </a:solidFill>
-                <a:latin typeface="+mn-lt"/>
-                <a:ea typeface="+mn-ea"/>
-                <a:cs typeface="+mn-cs"/>
-              </a:defRPr>
-            </a:lvl6pPr>
-            <a:lvl7pPr marL="2971675" indent="-228591" algn="l" defTabSz="914362" rtl="0" eaLnBrk="1" latinLnBrk="0" hangingPunct="1">
-              <a:spcBef>
-                <a:spcPct val="20000"/>
-              </a:spcBef>
-              <a:buFont typeface="Arial" pitchFamily="34" charset="0"/>
-              <a:buChar char="•"/>
-              <a:defRPr sz="1961" kern="1200">
-                <a:solidFill>
-                  <a:schemeClr val="tx1"/>
-                </a:solidFill>
-                <a:latin typeface="+mn-lt"/>
-                <a:ea typeface="+mn-ea"/>
-                <a:cs typeface="+mn-cs"/>
-              </a:defRPr>
-            </a:lvl7pPr>
-            <a:lvl8pPr marL="3428856" indent="-228591" algn="l" defTabSz="914362" rtl="0" eaLnBrk="1" latinLnBrk="0" hangingPunct="1">
-              <a:spcBef>
-                <a:spcPct val="20000"/>
-              </a:spcBef>
-              <a:buFont typeface="Arial" pitchFamily="34" charset="0"/>
-              <a:buChar char="•"/>
-              <a:defRPr sz="1961" kern="1200">
-                <a:solidFill>
-                  <a:schemeClr val="tx1"/>
-                </a:solidFill>
-                <a:latin typeface="+mn-lt"/>
-                <a:ea typeface="+mn-ea"/>
-                <a:cs typeface="+mn-cs"/>
-              </a:defRPr>
-            </a:lvl8pPr>
-            <a:lvl9pPr marL="3886038" indent="-228591" algn="l" defTabSz="914362" rtl="0" eaLnBrk="1" latinLnBrk="0" hangingPunct="1">
-              <a:spcBef>
-                <a:spcPct val="20000"/>
-              </a:spcBef>
-              <a:buFont typeface="Arial" pitchFamily="34" charset="0"/>
-              <a:buChar char="•"/>
-              <a:defRPr sz="1961" kern="1200">
-                <a:solidFill>
-                  <a:schemeClr val="tx1"/>
-                </a:solidFill>
-                <a:latin typeface="+mn-lt"/>
-                <a:ea typeface="+mn-ea"/>
-                <a:cs typeface="+mn-cs"/>
-              </a:defRPr>
-            </a:lvl9pPr>
-          </a:lstStyle>
-          <a:p>
-            <a:pPr>
-              <a:lnSpc>
-                <a:spcPct val="100000"/>
-              </a:lnSpc>
-            </a:pPr>
-            <a:r>
-              <a:rPr lang="en-US" sz="2400">
-                <a:latin typeface="+mn-lt"/>
-              </a:rPr>
-              <a:t>Useful mechanism to grant a set of permissions for making AWS service requests. </a:t>
-            </a:r>
-          </a:p>
-        </p:txBody>
-      </p:sp>
-      <p:pic>
-        <p:nvPicPr>
-          <p:cNvPr id="33" name="Graphic 54">
-            <a:extLst>
-              <a:ext uri="{FF2B5EF4-FFF2-40B4-BE49-F238E27FC236}">
-                <a16:creationId xmlns:a16="http://schemas.microsoft.com/office/drawing/2014/main" id="{E4245FA7-378A-D421-01DB-7EA8FF2F4CBB}"/>
-              </a:ext>
-              <a:ext uri="{C183D7F6-B498-43B3-948B-1728B52AA6E4}">
-                <adec:decorative xmlns:adec="http://schemas.microsoft.com/office/drawing/2017/decorative" val="1"/>
-              </a:ext>
-            </a:extLst>
-          </p:cNvPr>
-          <p:cNvPicPr>
-            <a:picLocks noChangeAspect="1"/>
-          </p:cNvPicPr>
-          <p:nvPr/>
-        </p:nvPicPr>
-        <p:blipFill>
-          <a:blip>
-            <a:duotone>
-              <a:prstClr val="black"/>
-              <a:schemeClr val="tx2">
-                <a:tint val="45000"/>
-                <a:satMod val="400000"/>
-              </a:schemeClr>
-            </a:duotone>
-            <a:extLst>
-              <a:ext uri="{96DAC541-7B7A-43D3-8B79-37D633B846F1}">
-                <asvg:svgBlip xmlns:asvg="http://schemas.microsoft.com/office/drawing/2016/SVG/main" r:embed="rId6"/>
-              </a:ext>
-            </a:extLst>
-          </a:blip>
-          <a:stretch>
-            <a:fillRect/>
-          </a:stretch>
-        </p:blipFill>
-        <p:spPr>
-          <a:xfrm>
-            <a:off x="1565189" y="5230734"/>
-            <a:ext cx="707053" cy="642963"/>
-          </a:xfrm>
-          <a:prstGeom prst="rect">
-            <a:avLst/>
-          </a:prstGeom>
-        </p:spPr>
-      </p:pic>
     </p:spTree>
   </p:cSld>
   <p:clrMapOvr>
@@ -5891,7 +4705,7 @@
 </file>
 
 <file path=ppt/slides/slide13.xml><?xml version="1.0" encoding="utf-8"?>
-<p:sld xmlns:a="http://schemas.openxmlformats.org/drawingml/2006/main" xmlns:r="http://schemas.openxmlformats.org/officeDocument/2006/relationships" xmlns:p="http://schemas.openxmlformats.org/presentationml/2006/main">
+<p:sld xmlns:a="http://schemas.openxmlformats.org/drawingml/2006/main" xmlns:p="http://schemas.openxmlformats.org/presentationml/2006/main" xmlns:r="http://schemas.openxmlformats.org/officeDocument/2006/relationships">
   <p:cSld>
     <p:bg>
       <p:bgPr>
@@ -5907,14 +4721,7 @@
         <p:cNvGrpSpPr/>
         <p:nvPr/>
       </p:nvGrpSpPr>
-      <p:grpSpPr>
-        <a:xfrm>
-          <a:off x="0" y="0"/>
-          <a:ext cx="0" cy="0"/>
-          <a:chOff x="0" y="0"/>
-          <a:chExt cx="0" cy="0"/>
-        </a:xfrm>
-      </p:grpSpPr>
+      <p:grpSpPr/>
       <p:sp>
         <p:nvSpPr>
           <p:cNvPr id="2" name="TextBox 1"/>
@@ -5932,7 +4739,7 @@
           <a:noFill/>
         </p:spPr>
         <p:txBody>
-          <a:bodyPr wrap="square" lIns="0" tIns="0" rIns="0" bIns="0" anchor="t">
+          <a:bodyPr wrap="square" anchor="t" lIns="0" rIns="0" tIns="0" bIns="0">
             <a:spAutoFit/>
           </a:bodyPr>
           <a:lstStyle/>
@@ -6006,7 +4813,6 @@
           <a:lstStyle/>
           <a:p>
             <a:pPr algn="ctr"/>
-            <a:endParaRPr/>
           </a:p>
         </p:txBody>
       </p:sp>
@@ -6027,7 +4833,7 @@
           <a:noFill/>
         </p:spPr>
         <p:txBody>
-          <a:bodyPr wrap="square" lIns="0" tIns="0" rIns="0" bIns="0" anchor="t">
+          <a:bodyPr wrap="square" anchor="t" lIns="0" rIns="0" tIns="0" bIns="0">
             <a:spAutoFit/>
           </a:bodyPr>
           <a:lstStyle/>
@@ -6143,7 +4949,16 @@
                 </a:solidFill>
                 <a:latin typeface="Roboto"/>
               </a:rPr>
-              <a:t>■  Roles, not long-lived keys, for services — an EC2 instance assumes a role to reach RDS / S3.</a:t>
+              <a:t>■  </a:t>
+            </a:r>
+            <a:r>
+              <a:rPr sz="1800" b="1" i="0">
+                <a:solidFill>
+                  <a:srgbClr val="27B5CE"/>
+                </a:solidFill>
+                <a:latin typeface="Roboto"/>
+              </a:rPr>
+              <a:t>Roles, not long-lived keys, for services — an EC2 instance assumes a role to reach RDS / S3.</a:t>
             </a:r>
           </a:p>
         </p:txBody>
@@ -6189,7 +5004,6 @@
           <a:lstStyle/>
           <a:p>
             <a:pPr algn="ctr"/>
-            <a:endParaRPr/>
           </a:p>
         </p:txBody>
       </p:sp>
@@ -6210,7 +5024,7 @@
           <a:noFill/>
         </p:spPr>
         <p:txBody>
-          <a:bodyPr wrap="square" lIns="0" tIns="0" rIns="0" bIns="0" anchor="t">
+          <a:bodyPr wrap="square" anchor="t" lIns="0" rIns="0" tIns="0" bIns="0">
             <a:spAutoFit/>
           </a:bodyPr>
           <a:lstStyle/>
@@ -6253,7 +5067,7 @@
           <a:noFill/>
         </p:spPr>
         <p:txBody>
-          <a:bodyPr wrap="square" lIns="0" tIns="0" rIns="0" bIns="0" anchor="t">
+          <a:bodyPr wrap="square" anchor="t" lIns="0" rIns="0" tIns="0" bIns="0">
             <a:spAutoFit/>
           </a:bodyPr>
           <a:lstStyle/>
@@ -6280,7 +5094,7 @@
 </file>
 
 <file path=ppt/slides/slide14.xml><?xml version="1.0" encoding="utf-8"?>
-<p:sld xmlns:a="http://schemas.openxmlformats.org/drawingml/2006/main" xmlns:r="http://schemas.openxmlformats.org/officeDocument/2006/relationships" xmlns:p="http://schemas.openxmlformats.org/presentationml/2006/main">
+<p:sld xmlns:a="http://schemas.openxmlformats.org/drawingml/2006/main" xmlns:p="http://schemas.openxmlformats.org/presentationml/2006/main" xmlns:r="http://schemas.openxmlformats.org/officeDocument/2006/relationships">
   <p:cSld>
     <p:bg>
       <p:bgPr>
@@ -6296,14 +5110,7 @@
         <p:cNvGrpSpPr/>
         <p:nvPr/>
       </p:nvGrpSpPr>
-      <p:grpSpPr>
-        <a:xfrm>
-          <a:off x="0" y="0"/>
-          <a:ext cx="0" cy="0"/>
-          <a:chOff x="0" y="0"/>
-          <a:chExt cx="0" cy="0"/>
-        </a:xfrm>
-      </p:grpSpPr>
+      <p:grpSpPr/>
       <p:sp>
         <p:nvSpPr>
           <p:cNvPr id="2" name="TextBox 1"/>
@@ -6321,7 +5128,7 @@
           <a:noFill/>
         </p:spPr>
         <p:txBody>
-          <a:bodyPr wrap="square" lIns="0" tIns="0" rIns="0" bIns="0" anchor="t">
+          <a:bodyPr wrap="square" anchor="t" lIns="0" rIns="0" tIns="0" bIns="0">
             <a:spAutoFit/>
           </a:bodyPr>
           <a:lstStyle/>
@@ -6395,7 +5202,6 @@
           <a:lstStyle/>
           <a:p>
             <a:pPr algn="ctr"/>
-            <a:endParaRPr/>
           </a:p>
         </p:txBody>
       </p:sp>
@@ -6416,7 +5222,7 @@
           <a:noFill/>
         </p:spPr>
         <p:txBody>
-          <a:bodyPr wrap="square" lIns="0" tIns="0" rIns="0" bIns="0" anchor="t">
+          <a:bodyPr wrap="square" anchor="t" lIns="0" rIns="0" tIns="0" bIns="0">
             <a:spAutoFit/>
           </a:bodyPr>
           <a:lstStyle/>
@@ -6563,7 +5369,16 @@
                 </a:solidFill>
                 <a:latin typeface="Roboto"/>
               </a:rPr>
-              <a:t>■  Enforce MFA on the human groups (Essential Eight).</a:t>
+              <a:t>■  </a:t>
+            </a:r>
+            <a:r>
+              <a:rPr sz="1800" b="1" i="0">
+                <a:solidFill>
+                  <a:srgbClr val="27B5CE"/>
+                </a:solidFill>
+                <a:latin typeface="Roboto"/>
+              </a:rPr>
+              <a:t>Enforce MFA on the human groups (Essential Eight).</a:t>
             </a:r>
           </a:p>
         </p:txBody>
@@ -6609,7 +5424,6 @@
           <a:lstStyle/>
           <a:p>
             <a:pPr algn="ctr"/>
-            <a:endParaRPr/>
           </a:p>
         </p:txBody>
       </p:sp>
@@ -6630,7 +5444,7 @@
           <a:noFill/>
         </p:spPr>
         <p:txBody>
-          <a:bodyPr wrap="square" lIns="0" tIns="0" rIns="0" bIns="0" anchor="t">
+          <a:bodyPr wrap="square" anchor="t" lIns="0" rIns="0" tIns="0" bIns="0">
             <a:spAutoFit/>
           </a:bodyPr>
           <a:lstStyle/>
@@ -6673,7 +5487,7 @@
           <a:noFill/>
         </p:spPr>
         <p:txBody>
-          <a:bodyPr wrap="square" lIns="0" tIns="0" rIns="0" bIns="0" anchor="t">
+          <a:bodyPr wrap="square" anchor="t" lIns="0" rIns="0" tIns="0" bIns="0">
             <a:spAutoFit/>
           </a:bodyPr>
           <a:lstStyle/>
@@ -6700,7 +5514,7 @@
 </file>
 
 <file path=ppt/slides/slide15.xml><?xml version="1.0" encoding="utf-8"?>
-<p:sld xmlns:a="http://schemas.openxmlformats.org/drawingml/2006/main" xmlns:r="http://schemas.openxmlformats.org/officeDocument/2006/relationships" xmlns:p="http://schemas.openxmlformats.org/presentationml/2006/main">
+<p:sld xmlns:a="http://schemas.openxmlformats.org/drawingml/2006/main" xmlns:p="http://schemas.openxmlformats.org/presentationml/2006/main" xmlns:r="http://schemas.openxmlformats.org/officeDocument/2006/relationships">
   <p:cSld>
     <p:bg>
       <p:bgPr>
@@ -6716,14 +5530,7 @@
         <p:cNvGrpSpPr/>
         <p:nvPr/>
       </p:nvGrpSpPr>
-      <p:grpSpPr>
-        <a:xfrm>
-          <a:off x="0" y="0"/>
-          <a:ext cx="0" cy="0"/>
-          <a:chOff x="0" y="0"/>
-          <a:chExt cx="0" cy="0"/>
-        </a:xfrm>
-      </p:grpSpPr>
+      <p:grpSpPr/>
       <p:sp>
         <p:nvSpPr>
           <p:cNvPr id="2" name="Rectangle 1"/>
@@ -6765,7 +5572,6 @@
           <a:lstStyle/>
           <a:p>
             <a:pPr algn="ctr"/>
-            <a:endParaRPr/>
           </a:p>
         </p:txBody>
       </p:sp>
@@ -6839,7 +5645,7 @@
           <a:noFill/>
         </p:spPr>
         <p:txBody>
-          <a:bodyPr wrap="square" lIns="0" tIns="0" rIns="0" bIns="0" anchor="ctr">
+          <a:bodyPr wrap="square" anchor="ctr" lIns="0" rIns="0" tIns="0" bIns="0">
             <a:spAutoFit/>
           </a:bodyPr>
           <a:lstStyle/>
@@ -6873,7 +5679,7 @@
           <a:noFill/>
         </p:spPr>
         <p:txBody>
-          <a:bodyPr wrap="square" lIns="0" tIns="0" rIns="0" bIns="0" anchor="t">
+          <a:bodyPr wrap="square" anchor="t" lIns="0" rIns="0" tIns="0" bIns="0">
             <a:spAutoFit/>
           </a:bodyPr>
           <a:lstStyle/>
@@ -7046,7 +5852,6 @@
           <a:lstStyle/>
           <a:p>
             <a:pPr algn="ctr"/>
-            <a:endParaRPr/>
           </a:p>
         </p:txBody>
       </p:sp>
@@ -7067,7 +5872,7 @@
           <a:noFill/>
         </p:spPr>
         <p:txBody>
-          <a:bodyPr wrap="square" lIns="0" tIns="0" rIns="0" bIns="0" anchor="ctr">
+          <a:bodyPr wrap="square" anchor="ctr" lIns="0" rIns="0" tIns="0" bIns="0">
             <a:spAutoFit/>
           </a:bodyPr>
           <a:lstStyle/>
@@ -7125,7 +5930,6 @@
           <a:lstStyle/>
           <a:p>
             <a:pPr algn="ctr"/>
-            <a:endParaRPr/>
           </a:p>
         </p:txBody>
       </p:sp>
@@ -7146,7 +5950,7 @@
           <a:noFill/>
         </p:spPr>
         <p:txBody>
-          <a:bodyPr wrap="square" lIns="0" tIns="0" rIns="0" bIns="0" anchor="t">
+          <a:bodyPr wrap="square" anchor="t" lIns="0" rIns="0" tIns="0" bIns="0">
             <a:spAutoFit/>
           </a:bodyPr>
           <a:lstStyle/>
@@ -7189,7 +5993,7 @@
           <a:noFill/>
         </p:spPr>
         <p:txBody>
-          <a:bodyPr wrap="square" lIns="0" tIns="0" rIns="0" bIns="0" anchor="t">
+          <a:bodyPr wrap="square" anchor="t" lIns="0" rIns="0" tIns="0" bIns="0">
             <a:spAutoFit/>
           </a:bodyPr>
           <a:lstStyle/>
@@ -7216,7 +6020,7 @@
 </file>
 
 <file path=ppt/slides/slide16.xml><?xml version="1.0" encoding="utf-8"?>
-<p:sld xmlns:a="http://schemas.openxmlformats.org/drawingml/2006/main" xmlns:r="http://schemas.openxmlformats.org/officeDocument/2006/relationships" xmlns:p="http://schemas.openxmlformats.org/presentationml/2006/main">
+<p:sld xmlns:a="http://schemas.openxmlformats.org/drawingml/2006/main" xmlns:p="http://schemas.openxmlformats.org/presentationml/2006/main" xmlns:r="http://schemas.openxmlformats.org/officeDocument/2006/relationships">
   <p:cSld>
     <p:bg>
       <p:bgPr>
@@ -7232,14 +6036,7 @@
         <p:cNvGrpSpPr/>
         <p:nvPr/>
       </p:nvGrpSpPr>
-      <p:grpSpPr>
-        <a:xfrm>
-          <a:off x="0" y="0"/>
-          <a:ext cx="0" cy="0"/>
-          <a:chOff x="0" y="0"/>
-          <a:chExt cx="0" cy="0"/>
-        </a:xfrm>
-      </p:grpSpPr>
+      <p:grpSpPr/>
       <p:sp>
         <p:nvSpPr>
           <p:cNvPr id="2" name="Rectangle 1"/>
@@ -7281,7 +6078,6 @@
           <a:lstStyle/>
           <a:p>
             <a:pPr algn="ctr"/>
-            <a:endParaRPr/>
           </a:p>
         </p:txBody>
       </p:sp>
@@ -7355,7 +6151,7 @@
           <a:noFill/>
         </p:spPr>
         <p:txBody>
-          <a:bodyPr wrap="square" lIns="0" tIns="0" rIns="0" bIns="0" anchor="ctr">
+          <a:bodyPr wrap="square" anchor="ctr" lIns="0" rIns="0" tIns="0" bIns="0">
             <a:spAutoFit/>
           </a:bodyPr>
           <a:lstStyle/>
@@ -7389,7 +6185,7 @@
           <a:noFill/>
         </p:spPr>
         <p:txBody>
-          <a:bodyPr wrap="square" lIns="0" tIns="0" rIns="0" bIns="0" anchor="t">
+          <a:bodyPr wrap="square" anchor="t" lIns="0" rIns="0" tIns="0" bIns="0">
             <a:spAutoFit/>
           </a:bodyPr>
           <a:lstStyle/>
@@ -7562,7 +6358,6 @@
           <a:lstStyle/>
           <a:p>
             <a:pPr algn="ctr"/>
-            <a:endParaRPr/>
           </a:p>
         </p:txBody>
       </p:sp>
@@ -7583,7 +6378,7 @@
           <a:noFill/>
         </p:spPr>
         <p:txBody>
-          <a:bodyPr wrap="square" lIns="0" tIns="0" rIns="0" bIns="0" anchor="ctr">
+          <a:bodyPr wrap="square" anchor="ctr" lIns="0" rIns="0" tIns="0" bIns="0">
             <a:spAutoFit/>
           </a:bodyPr>
           <a:lstStyle/>
@@ -7641,7 +6436,6 @@
           <a:lstStyle/>
           <a:p>
             <a:pPr algn="ctr"/>
-            <a:endParaRPr/>
           </a:p>
         </p:txBody>
       </p:sp>
@@ -7662,7 +6456,7 @@
           <a:noFill/>
         </p:spPr>
         <p:txBody>
-          <a:bodyPr wrap="square" lIns="0" tIns="0" rIns="0" bIns="0" anchor="t">
+          <a:bodyPr wrap="square" anchor="t" lIns="0" rIns="0" tIns="0" bIns="0">
             <a:spAutoFit/>
           </a:bodyPr>
           <a:lstStyle/>
@@ -7705,7 +6499,7 @@
           <a:noFill/>
         </p:spPr>
         <p:txBody>
-          <a:bodyPr wrap="square" lIns="0" tIns="0" rIns="0" bIns="0" anchor="t">
+          <a:bodyPr wrap="square" anchor="t" lIns="0" rIns="0" tIns="0" bIns="0">
             <a:spAutoFit/>
           </a:bodyPr>
           <a:lstStyle/>
@@ -7732,7 +6526,7 @@
 </file>
 
 <file path=ppt/slides/slide17.xml><?xml version="1.0" encoding="utf-8"?>
-<p:sld xmlns:a="http://schemas.openxmlformats.org/drawingml/2006/main" xmlns:r="http://schemas.openxmlformats.org/officeDocument/2006/relationships" xmlns:p="http://schemas.openxmlformats.org/presentationml/2006/main">
+<p:sld xmlns:a="http://schemas.openxmlformats.org/drawingml/2006/main" xmlns:p="http://schemas.openxmlformats.org/presentationml/2006/main" xmlns:r="http://schemas.openxmlformats.org/officeDocument/2006/relationships">
   <p:cSld>
     <p:bg>
       <p:bgPr>
@@ -7748,14 +6542,7 @@
         <p:cNvGrpSpPr/>
         <p:nvPr/>
       </p:nvGrpSpPr>
-      <p:grpSpPr>
-        <a:xfrm>
-          <a:off x="0" y="0"/>
-          <a:ext cx="0" cy="0"/>
-          <a:chOff x="0" y="0"/>
-          <a:chExt cx="0" cy="0"/>
-        </a:xfrm>
-      </p:grpSpPr>
+      <p:grpSpPr/>
       <p:sp>
         <p:nvSpPr>
           <p:cNvPr id="2" name="TextBox 1"/>
@@ -7773,7 +6560,7 @@
           <a:noFill/>
         </p:spPr>
         <p:txBody>
-          <a:bodyPr wrap="square" lIns="0" tIns="0" rIns="0" bIns="0" anchor="t">
+          <a:bodyPr wrap="square" anchor="t" lIns="0" rIns="0" tIns="0" bIns="0">
             <a:spAutoFit/>
           </a:bodyPr>
           <a:lstStyle/>
@@ -7847,7 +6634,6 @@
           <a:lstStyle/>
           <a:p>
             <a:pPr algn="ctr"/>
-            <a:endParaRPr/>
           </a:p>
         </p:txBody>
       </p:sp>
@@ -7894,7 +6680,6 @@
           <a:lstStyle/>
           <a:p>
             <a:pPr algn="ctr"/>
-            <a:endParaRPr/>
           </a:p>
         </p:txBody>
       </p:sp>
@@ -7939,7 +6724,6 @@
           <a:lstStyle/>
           <a:p>
             <a:pPr algn="ctr"/>
-            <a:endParaRPr/>
           </a:p>
         </p:txBody>
       </p:sp>
@@ -7960,7 +6744,7 @@
           <a:noFill/>
         </p:spPr>
         <p:txBody>
-          <a:bodyPr wrap="square" lIns="0" tIns="0" rIns="0" bIns="0" anchor="ctr">
+          <a:bodyPr wrap="square" anchor="ctr" lIns="0" rIns="0" tIns="0" bIns="0">
             <a:spAutoFit/>
           </a:bodyPr>
           <a:lstStyle/>
@@ -8025,7 +6809,6 @@
           <a:lstStyle/>
           <a:p>
             <a:pPr algn="ctr"/>
-            <a:endParaRPr/>
           </a:p>
         </p:txBody>
       </p:sp>
@@ -8070,7 +6853,6 @@
           <a:lstStyle/>
           <a:p>
             <a:pPr algn="ctr"/>
-            <a:endParaRPr/>
           </a:p>
         </p:txBody>
       </p:sp>
@@ -8091,7 +6873,7 @@
           <a:noFill/>
         </p:spPr>
         <p:txBody>
-          <a:bodyPr wrap="square" lIns="0" tIns="0" rIns="0" bIns="0" anchor="ctr">
+          <a:bodyPr wrap="square" anchor="ctr" lIns="0" rIns="0" tIns="0" bIns="0">
             <a:spAutoFit/>
           </a:bodyPr>
           <a:lstStyle/>
@@ -8156,7 +6938,6 @@
           <a:lstStyle/>
           <a:p>
             <a:pPr algn="ctr"/>
-            <a:endParaRPr/>
           </a:p>
         </p:txBody>
       </p:sp>
@@ -8201,7 +6982,6 @@
           <a:lstStyle/>
           <a:p>
             <a:pPr algn="ctr"/>
-            <a:endParaRPr/>
           </a:p>
         </p:txBody>
       </p:sp>
@@ -8222,7 +7002,7 @@
           <a:noFill/>
         </p:spPr>
         <p:txBody>
-          <a:bodyPr wrap="square" lIns="0" tIns="0" rIns="0" bIns="0" anchor="ctr">
+          <a:bodyPr wrap="square" anchor="ctr" lIns="0" rIns="0" tIns="0" bIns="0">
             <a:spAutoFit/>
           </a:bodyPr>
           <a:lstStyle/>
@@ -8285,7 +7065,6 @@
           <a:lstStyle/>
           <a:p>
             <a:pPr algn="ctr"/>
-            <a:endParaRPr/>
           </a:p>
         </p:txBody>
       </p:sp>
@@ -8306,7 +7085,7 @@
           <a:noFill/>
         </p:spPr>
         <p:txBody>
-          <a:bodyPr wrap="square" lIns="0" tIns="0" rIns="0" bIns="0" anchor="t">
+          <a:bodyPr wrap="square" anchor="t" lIns="0" rIns="0" tIns="0" bIns="0">
             <a:spAutoFit/>
           </a:bodyPr>
           <a:lstStyle/>
@@ -8349,7 +7128,7 @@
           <a:noFill/>
         </p:spPr>
         <p:txBody>
-          <a:bodyPr wrap="square" lIns="0" tIns="0" rIns="0" bIns="0" anchor="t">
+          <a:bodyPr wrap="square" anchor="t" lIns="0" rIns="0" tIns="0" bIns="0">
             <a:spAutoFit/>
           </a:bodyPr>
           <a:lstStyle/>
@@ -8376,7 +7155,7 @@
 </file>
 
 <file path=ppt/slides/slide18.xml><?xml version="1.0" encoding="utf-8"?>
-<p:sld xmlns:a="http://schemas.openxmlformats.org/drawingml/2006/main" xmlns:r="http://schemas.openxmlformats.org/officeDocument/2006/relationships" xmlns:p="http://schemas.openxmlformats.org/presentationml/2006/main">
+<p:sld xmlns:a="http://schemas.openxmlformats.org/drawingml/2006/main" xmlns:p="http://schemas.openxmlformats.org/presentationml/2006/main" xmlns:r="http://schemas.openxmlformats.org/officeDocument/2006/relationships">
   <p:cSld>
     <p:bg>
       <p:bgPr>
@@ -8392,14 +7171,7 @@
         <p:cNvGrpSpPr/>
         <p:nvPr/>
       </p:nvGrpSpPr>
-      <p:grpSpPr>
-        <a:xfrm>
-          <a:off x="0" y="0"/>
-          <a:ext cx="0" cy="0"/>
-          <a:chOff x="0" y="0"/>
-          <a:chExt cx="0" cy="0"/>
-        </a:xfrm>
-      </p:grpSpPr>
+      <p:grpSpPr/>
       <p:sp>
         <p:nvSpPr>
           <p:cNvPr id="2" name="Rectangle 1"/>
@@ -8441,7 +7213,6 @@
           <a:lstStyle/>
           <a:p>
             <a:pPr algn="ctr"/>
-            <a:endParaRPr/>
           </a:p>
         </p:txBody>
       </p:sp>
@@ -8462,7 +7233,7 @@
           <a:noFill/>
         </p:spPr>
         <p:txBody>
-          <a:bodyPr wrap="square" lIns="0" tIns="0" rIns="0" bIns="0" anchor="t">
+          <a:bodyPr wrap="square" anchor="t" lIns="0" rIns="0" tIns="0" bIns="0">
             <a:spAutoFit/>
           </a:bodyPr>
           <a:lstStyle/>
@@ -8496,7 +7267,7 @@
           <a:noFill/>
         </p:spPr>
         <p:txBody>
-          <a:bodyPr wrap="square" lIns="0" tIns="0" rIns="0" bIns="0" anchor="t">
+          <a:bodyPr wrap="square" anchor="t" lIns="0" rIns="0" tIns="0" bIns="0">
             <a:spAutoFit/>
           </a:bodyPr>
           <a:lstStyle/>
@@ -8586,7 +7357,6 @@
           <a:lstStyle/>
           <a:p>
             <a:pPr algn="ctr"/>
-            <a:endParaRPr/>
           </a:p>
         </p:txBody>
       </p:sp>
@@ -8607,7 +7377,7 @@
           <a:noFill/>
         </p:spPr>
         <p:txBody>
-          <a:bodyPr wrap="square" lIns="0" tIns="0" rIns="0" bIns="0" anchor="t">
+          <a:bodyPr wrap="square" anchor="t" lIns="0" rIns="0" tIns="0" bIns="0">
             <a:spAutoFit/>
           </a:bodyPr>
           <a:lstStyle/>
@@ -8650,13 +7420,21 @@
           <a:noFill/>
         </p:spPr>
         <p:txBody>
-          <a:bodyPr wrap="square" lIns="0" tIns="0" rIns="0" bIns="0" anchor="t">
+          <a:bodyPr wrap="square" anchor="t" lIns="0" rIns="0" tIns="0" bIns="0">
             <a:spAutoFit/>
           </a:bodyPr>
           <a:lstStyle/>
           <a:p>
             <a:pPr algn="r"/>
-            <a:endParaRPr/>
+            <a:r>
+              <a:rPr sz="1100" b="0" i="0">
+                <a:solidFill>
+                  <a:srgbClr val="7A7A7A"/>
+                </a:solidFill>
+                <a:latin typeface="Roboto"/>
+              </a:rPr>
+              <a:t/>
+            </a:r>
           </a:p>
         </p:txBody>
       </p:sp>
@@ -8669,422 +7447,7 @@
 </file>
 
 <file path=ppt/slides/slide19.xml><?xml version="1.0" encoding="utf-8"?>
-<p:sld xmlns:a="http://schemas.openxmlformats.org/drawingml/2006/main" xmlns:r="http://schemas.openxmlformats.org/officeDocument/2006/relationships" xmlns:p="http://schemas.openxmlformats.org/presentationml/2006/main">
-  <p:cSld>
-    <p:spTree>
-      <p:nvGrpSpPr>
-        <p:cNvPr id="1" name="">
-          <a:extLst>
-            <a:ext uri="{FF2B5EF4-FFF2-40B4-BE49-F238E27FC236}">
-              <a16:creationId xmlns:a16="http://schemas.microsoft.com/office/drawing/2014/main" id="{29D7B59B-1181-4A2B-2AB2-CFCF929FBAFE}"/>
-            </a:ext>
-          </a:extLst>
-        </p:cNvPr>
-        <p:cNvGrpSpPr/>
-        <p:nvPr/>
-      </p:nvGrpSpPr>
-      <p:grpSpPr>
-        <a:xfrm>
-          <a:off x="0" y="0"/>
-          <a:ext cx="0" cy="0"/>
-          <a:chOff x="0" y="0"/>
-          <a:chExt cx="0" cy="0"/>
-        </a:xfrm>
-      </p:grpSpPr>
-      <p:sp>
-        <p:nvSpPr>
-          <p:cNvPr id="2" name="TextBox 1">
-            <a:extLst>
-              <a:ext uri="{FF2B5EF4-FFF2-40B4-BE49-F238E27FC236}">
-                <a16:creationId xmlns:a16="http://schemas.microsoft.com/office/drawing/2014/main" id="{6D4CF0B4-2148-B86C-D201-8D93D25EE4F9}"/>
-              </a:ext>
-            </a:extLst>
-          </p:cNvPr>
-          <p:cNvSpPr txBox="1"/>
-          <p:nvPr/>
-        </p:nvSpPr>
-        <p:spPr>
-          <a:xfrm>
-            <a:off x="640080" y="457200"/>
-            <a:ext cx="10881360" cy="960120"/>
-          </a:xfrm>
-          <a:prstGeom prst="rect">
-            <a:avLst/>
-          </a:prstGeom>
-          <a:noFill/>
-        </p:spPr>
-        <p:txBody>
-          <a:bodyPr wrap="square" lIns="0" tIns="0" rIns="0" bIns="0" anchor="t">
-            <a:spAutoFit/>
-          </a:bodyPr>
-          <a:lstStyle/>
-          <a:p>
-            <a:r>
-              <a:rPr sz="2800" b="1" i="0">
-                <a:solidFill>
-                  <a:srgbClr val="2A2929"/>
-                </a:solidFill>
-                <a:latin typeface="Roboto"/>
-              </a:rPr>
-              <a:t>The shared responsibility model</a:t>
-            </a:r>
-          </a:p>
-          <a:p>
-            <a:pPr>
-              <a:spcBef>
-                <a:spcPts val="200"/>
-              </a:spcBef>
-            </a:pPr>
-            <a:r>
-              <a:rPr sz="1800" b="0" i="1">
-                <a:solidFill>
-                  <a:srgbClr val="D68E10"/>
-                </a:solidFill>
-                <a:latin typeface="Roboto Light"/>
-              </a:rPr>
-              <a:t>ACF M04</a:t>
-            </a:r>
-          </a:p>
-        </p:txBody>
-      </p:sp>
-      <p:sp>
-        <p:nvSpPr>
-          <p:cNvPr id="3" name="Rectangle 2">
-            <a:extLst>
-              <a:ext uri="{FF2B5EF4-FFF2-40B4-BE49-F238E27FC236}">
-                <a16:creationId xmlns:a16="http://schemas.microsoft.com/office/drawing/2014/main" id="{E5EBCECC-B5E0-6289-BCF5-F0CD966E6D19}"/>
-              </a:ext>
-            </a:extLst>
-          </p:cNvPr>
-          <p:cNvSpPr/>
-          <p:nvPr/>
-        </p:nvSpPr>
-        <p:spPr>
-          <a:xfrm>
-            <a:off x="658368" y="1371600"/>
-            <a:ext cx="1463040" cy="50800"/>
-          </a:xfrm>
-          <a:prstGeom prst="rect">
-            <a:avLst/>
-          </a:prstGeom>
-          <a:solidFill>
-            <a:srgbClr val="205F61"/>
-          </a:solidFill>
-          <a:ln>
-            <a:noFill/>
-          </a:ln>
-          <a:effectLst/>
-        </p:spPr>
-        <p:style>
-          <a:lnRef idx="1">
-            <a:schemeClr val="accent1"/>
-          </a:lnRef>
-          <a:fillRef idx="3">
-            <a:schemeClr val="accent1"/>
-          </a:fillRef>
-          <a:effectRef idx="2">
-            <a:schemeClr val="accent1"/>
-          </a:effectRef>
-          <a:fontRef idx="minor">
-            <a:schemeClr val="lt1"/>
-          </a:fontRef>
-        </p:style>
-        <p:txBody>
-          <a:bodyPr rtlCol="0" anchor="ctr"/>
-          <a:lstStyle/>
-          <a:p>
-            <a:pPr algn="ctr"/>
-            <a:endParaRPr/>
-          </a:p>
-        </p:txBody>
-      </p:sp>
-      <p:sp>
-        <p:nvSpPr>
-          <p:cNvPr id="4" name="TextBox 3">
-            <a:extLst>
-              <a:ext uri="{FF2B5EF4-FFF2-40B4-BE49-F238E27FC236}">
-                <a16:creationId xmlns:a16="http://schemas.microsoft.com/office/drawing/2014/main" id="{76BABDED-6450-7293-C04E-5FC1C84DBBE2}"/>
-              </a:ext>
-            </a:extLst>
-          </p:cNvPr>
-          <p:cNvSpPr txBox="1"/>
-          <p:nvPr/>
-        </p:nvSpPr>
-        <p:spPr>
-          <a:xfrm>
-            <a:off x="658368" y="1737360"/>
-            <a:ext cx="11533632" cy="1340367"/>
-          </a:xfrm>
-          <a:prstGeom prst="rect">
-            <a:avLst/>
-          </a:prstGeom>
-          <a:noFill/>
-        </p:spPr>
-        <p:txBody>
-          <a:bodyPr wrap="square" lIns="0" tIns="0" rIns="0" bIns="0" anchor="t">
-            <a:spAutoFit/>
-          </a:bodyPr>
-          <a:lstStyle/>
-          <a:p>
-            <a:pPr marL="0" indent="0">
-              <a:lnSpc>
-                <a:spcPct val="105000"/>
-              </a:lnSpc>
-              <a:spcBef>
-                <a:spcPts val="0"/>
-              </a:spcBef>
-              <a:spcAft>
-                <a:spcPts val="1000"/>
-              </a:spcAft>
-            </a:pPr>
-            <a:r>
-              <a:rPr sz="1700" b="1" i="0" dirty="0">
-                <a:solidFill>
-                  <a:srgbClr val="EDAB0C"/>
-                </a:solidFill>
-                <a:latin typeface="Roboto"/>
-              </a:rPr>
-              <a:t>■  </a:t>
-            </a:r>
-            <a:r>
-              <a:rPr sz="1700" b="0" i="0" dirty="0">
-                <a:solidFill>
-                  <a:srgbClr val="2A2929"/>
-                </a:solidFill>
-                <a:latin typeface="Roboto"/>
-              </a:rPr>
-              <a:t>AWS — security OF the cloud: physical data </a:t>
-            </a:r>
-            <a:r>
-              <a:rPr sz="1700" b="0" i="0" dirty="0" err="1">
-                <a:solidFill>
-                  <a:srgbClr val="2A2929"/>
-                </a:solidFill>
-                <a:latin typeface="Roboto"/>
-              </a:rPr>
-              <a:t>centres</a:t>
-            </a:r>
-            <a:r>
-              <a:rPr sz="1700" b="0" i="0" dirty="0">
-                <a:solidFill>
-                  <a:srgbClr val="2A2929"/>
-                </a:solidFill>
-                <a:latin typeface="Roboto"/>
-              </a:rPr>
-              <a:t>, hardware, network, virtualization infrastructure.</a:t>
-            </a:r>
-          </a:p>
-          <a:p>
-            <a:pPr marL="0" indent="0">
-              <a:lnSpc>
-                <a:spcPct val="105000"/>
-              </a:lnSpc>
-              <a:spcBef>
-                <a:spcPts val="0"/>
-              </a:spcBef>
-              <a:spcAft>
-                <a:spcPts val="1000"/>
-              </a:spcAft>
-            </a:pPr>
-            <a:r>
-              <a:rPr sz="1700" b="1" i="0" dirty="0">
-                <a:solidFill>
-                  <a:srgbClr val="EDAB0C"/>
-                </a:solidFill>
-                <a:latin typeface="Roboto"/>
-              </a:rPr>
-              <a:t>■  </a:t>
-            </a:r>
-            <a:r>
-              <a:rPr sz="1700" b="0" i="0" dirty="0">
-                <a:solidFill>
-                  <a:srgbClr val="2A2929"/>
-                </a:solidFill>
-                <a:latin typeface="Roboto"/>
-              </a:rPr>
-              <a:t>You — security IN the cloud: the EC2 OS (patching), applications, security-group config, IAM, account management, and your data.</a:t>
-            </a:r>
-          </a:p>
-          <a:p>
-            <a:pPr marL="0" indent="0">
-              <a:lnSpc>
-                <a:spcPct val="105000"/>
-              </a:lnSpc>
-              <a:spcBef>
-                <a:spcPts val="0"/>
-              </a:spcBef>
-              <a:spcAft>
-                <a:spcPts val="1000"/>
-              </a:spcAft>
-            </a:pPr>
-            <a:r>
-              <a:rPr sz="1700" b="1" i="0" dirty="0">
-                <a:solidFill>
-                  <a:srgbClr val="205F61"/>
-                </a:solidFill>
-                <a:latin typeface="Roboto"/>
-              </a:rPr>
-              <a:t>■  Knowing the line tells you what you must configure — and what you can rely on.</a:t>
-            </a:r>
-          </a:p>
-        </p:txBody>
-      </p:sp>
-      <p:sp>
-        <p:nvSpPr>
-          <p:cNvPr id="7" name="Rectangle 6">
-            <a:extLst>
-              <a:ext uri="{FF2B5EF4-FFF2-40B4-BE49-F238E27FC236}">
-                <a16:creationId xmlns:a16="http://schemas.microsoft.com/office/drawing/2014/main" id="{E4F934D3-1D0C-A2FB-468E-6FAB6C8F3D2E}"/>
-              </a:ext>
-            </a:extLst>
-          </p:cNvPr>
-          <p:cNvSpPr/>
-          <p:nvPr/>
-        </p:nvSpPr>
-        <p:spPr>
-          <a:xfrm>
-            <a:off x="0" y="6565392"/>
-            <a:ext cx="12191695" cy="38100"/>
-          </a:xfrm>
-          <a:prstGeom prst="rect">
-            <a:avLst/>
-          </a:prstGeom>
-          <a:solidFill>
-            <a:srgbClr val="205F61"/>
-          </a:solidFill>
-          <a:ln>
-            <a:noFill/>
-          </a:ln>
-          <a:effectLst/>
-        </p:spPr>
-        <p:style>
-          <a:lnRef idx="1">
-            <a:schemeClr val="accent1"/>
-          </a:lnRef>
-          <a:fillRef idx="3">
-            <a:schemeClr val="accent1"/>
-          </a:fillRef>
-          <a:effectRef idx="2">
-            <a:schemeClr val="accent1"/>
-          </a:effectRef>
-          <a:fontRef idx="minor">
-            <a:schemeClr val="lt1"/>
-          </a:fontRef>
-        </p:style>
-        <p:txBody>
-          <a:bodyPr rtlCol="0" anchor="ctr"/>
-          <a:lstStyle/>
-          <a:p>
-            <a:pPr algn="ctr"/>
-            <a:endParaRPr/>
-          </a:p>
-        </p:txBody>
-      </p:sp>
-      <p:sp>
-        <p:nvSpPr>
-          <p:cNvPr id="8" name="TextBox 7">
-            <a:extLst>
-              <a:ext uri="{FF2B5EF4-FFF2-40B4-BE49-F238E27FC236}">
-                <a16:creationId xmlns:a16="http://schemas.microsoft.com/office/drawing/2014/main" id="{CBDB69C2-4D10-EEB9-494B-CD8E46D5FF2F}"/>
-              </a:ext>
-            </a:extLst>
-          </p:cNvPr>
-          <p:cNvSpPr txBox="1"/>
-          <p:nvPr/>
-        </p:nvSpPr>
-        <p:spPr>
-          <a:xfrm>
-            <a:off x="502920" y="6400800"/>
-            <a:ext cx="5486400" cy="320040"/>
-          </a:xfrm>
-          <a:prstGeom prst="rect">
-            <a:avLst/>
-          </a:prstGeom>
-          <a:noFill/>
-        </p:spPr>
-        <p:txBody>
-          <a:bodyPr wrap="square" lIns="0" tIns="0" rIns="0" bIns="0" anchor="t">
-            <a:spAutoFit/>
-          </a:bodyPr>
-          <a:lstStyle/>
-          <a:p>
-            <a:r>
-              <a:rPr sz="1100" b="1" i="0">
-                <a:solidFill>
-                  <a:srgbClr val="2A2929"/>
-                </a:solidFill>
-                <a:latin typeface="Roboto"/>
-              </a:rPr>
-              <a:t>Kangan </a:t>
-            </a:r>
-            <a:r>
-              <a:rPr sz="1100" b="1" i="0">
-                <a:solidFill>
-                  <a:srgbClr val="D68E10"/>
-                </a:solidFill>
-                <a:latin typeface="Roboto"/>
-              </a:rPr>
-              <a:t>Institute</a:t>
-            </a:r>
-          </a:p>
-        </p:txBody>
-      </p:sp>
-      <p:sp>
-        <p:nvSpPr>
-          <p:cNvPr id="9" name="TextBox 8">
-            <a:extLst>
-              <a:ext uri="{FF2B5EF4-FFF2-40B4-BE49-F238E27FC236}">
-                <a16:creationId xmlns:a16="http://schemas.microsoft.com/office/drawing/2014/main" id="{DA70A2AE-7AF6-423E-BA72-7E5D742F4E9D}"/>
-              </a:ext>
-            </a:extLst>
-          </p:cNvPr>
-          <p:cNvSpPr txBox="1"/>
-          <p:nvPr/>
-        </p:nvSpPr>
-        <p:spPr>
-          <a:xfrm>
-            <a:off x="10515600" y="6400800"/>
-            <a:ext cx="1188720" cy="320040"/>
-          </a:xfrm>
-          <a:prstGeom prst="rect">
-            <a:avLst/>
-          </a:prstGeom>
-          <a:noFill/>
-        </p:spPr>
-        <p:txBody>
-          <a:bodyPr wrap="square" lIns="0" tIns="0" rIns="0" bIns="0" anchor="t">
-            <a:spAutoFit/>
-          </a:bodyPr>
-          <a:lstStyle/>
-          <a:p>
-            <a:pPr algn="r"/>
-            <a:r>
-              <a:rPr sz="1100" b="0" i="0">
-                <a:solidFill>
-                  <a:srgbClr val="7A7A7A"/>
-                </a:solidFill>
-                <a:latin typeface="Roboto"/>
-              </a:rPr>
-              <a:t>15</a:t>
-            </a:r>
-          </a:p>
-        </p:txBody>
-      </p:sp>
-    </p:spTree>
-    <p:extLst>
-      <p:ext uri="{BB962C8B-B14F-4D97-AF65-F5344CB8AC3E}">
-        <p14:creationId xmlns:p14="http://schemas.microsoft.com/office/powerpoint/2010/main" val="2658303037"/>
-      </p:ext>
-    </p:extLst>
-  </p:cSld>
-  <p:clrMapOvr>
-    <a:masterClrMapping/>
-  </p:clrMapOvr>
-</p:sld>
-</file>
-
-<file path=ppt/slides/slide2.xml><?xml version="1.0" encoding="utf-8"?>
-<p:sld xmlns:a="http://schemas.openxmlformats.org/drawingml/2006/main" xmlns:r="http://schemas.openxmlformats.org/officeDocument/2006/relationships" xmlns:p="http://schemas.openxmlformats.org/presentationml/2006/main">
+<p:sld xmlns:a="http://schemas.openxmlformats.org/drawingml/2006/main" xmlns:p="http://schemas.openxmlformats.org/presentationml/2006/main" xmlns:r="http://schemas.openxmlformats.org/officeDocument/2006/relationships">
   <p:cSld>
     <p:bg>
       <p:bgPr>
@@ -9100,14 +7463,7 @@
         <p:cNvGrpSpPr/>
         <p:nvPr/>
       </p:nvGrpSpPr>
-      <p:grpSpPr>
-        <a:xfrm>
-          <a:off x="0" y="0"/>
-          <a:ext cx="0" cy="0"/>
-          <a:chOff x="0" y="0"/>
-          <a:chExt cx="0" cy="0"/>
-        </a:xfrm>
-      </p:grpSpPr>
+      <p:grpSpPr/>
       <p:sp>
         <p:nvSpPr>
           <p:cNvPr id="2" name="TextBox 1"/>
@@ -9125,7 +7481,7 @@
           <a:noFill/>
         </p:spPr>
         <p:txBody>
-          <a:bodyPr wrap="square" lIns="0" tIns="0" rIns="0" bIns="0" anchor="t">
+          <a:bodyPr wrap="square" anchor="t" lIns="0" rIns="0" tIns="0" bIns="0">
             <a:spAutoFit/>
           </a:bodyPr>
           <a:lstStyle/>
@@ -9137,7 +7493,7 @@
                 </a:solidFill>
                 <a:latin typeface="Roboto"/>
               </a:rPr>
-              <a:t>From advising to building</a:t>
+              <a:t>The shared responsibility model</a:t>
             </a:r>
           </a:p>
           <a:p>
@@ -9153,7 +7509,7 @@
                 </a:solidFill>
                 <a:latin typeface="Roboto Light"/>
               </a:rPr>
-              <a:t>AT1 was advice; now you build</a:t>
+              <a:t>ACF M04</a:t>
             </a:r>
           </a:p>
         </p:txBody>
@@ -9173,7 +7529,7 @@
             <a:avLst/>
           </a:prstGeom>
           <a:solidFill>
-            <a:srgbClr val="EDAB0C"/>
+            <a:srgbClr val="205F61"/>
           </a:solidFill>
           <a:ln>
             <a:noFill/>
@@ -9199,7 +7555,6 @@
           <a:lstStyle/>
           <a:p>
             <a:pPr algn="ctr"/>
-            <a:endParaRPr/>
           </a:p>
         </p:txBody>
       </p:sp>
@@ -9211,8 +7566,8 @@
         </p:nvSpPr>
         <p:spPr>
           <a:xfrm>
-            <a:off x="658368" y="1691640"/>
-            <a:ext cx="10881360" cy="4480560"/>
+            <a:off x="658368" y="1737360"/>
+            <a:ext cx="5486400" cy="4297680"/>
           </a:xfrm>
           <a:prstGeom prst="rect">
             <a:avLst/>
@@ -9220,7 +7575,7 @@
           <a:noFill/>
         </p:spPr>
         <p:txBody>
-          <a:bodyPr wrap="square" lIns="0" tIns="0" rIns="0" bIns="0" anchor="t">
+          <a:bodyPr wrap="square" anchor="t" lIns="0" rIns="0" tIns="0" bIns="0">
             <a:spAutoFit/>
           </a:bodyPr>
           <a:lstStyle/>
@@ -9237,7 +7592,7 @@
               </a:spcAft>
             </a:pPr>
             <a:r>
-              <a:rPr sz="1800" b="1" i="0">
+              <a:rPr sz="1700" b="1" i="0">
                 <a:solidFill>
                   <a:srgbClr val="EDAB0C"/>
                 </a:solidFill>
@@ -9246,13 +7601,13 @@
               <a:t>■  </a:t>
             </a:r>
             <a:r>
-              <a:rPr sz="1800" b="0" i="0">
+              <a:rPr sz="1700" b="0" i="0">
                 <a:solidFill>
                   <a:srgbClr val="2A2929"/>
                 </a:solidFill>
                 <a:latin typeface="Roboto"/>
               </a:rPr>
-              <a:t>You implement a supplied design in the AWS lab — and evidence it.</a:t>
+              <a:t>AWS — security OF the cloud: physical data centres, hardware, network, virtualization infrastructure.</a:t>
             </a:r>
           </a:p>
           <a:p>
@@ -9268,13 +7623,22 @@
               </a:spcAft>
             </a:pPr>
             <a:r>
-              <a:rPr sz="1800" b="1" i="0">
-                <a:solidFill>
-                  <a:srgbClr val="92268F"/>
-                </a:solidFill>
-                <a:latin typeface="Roboto"/>
-              </a:rPr>
-              <a:t>■  New mode: work to a design you didn't write — read it, build it faithfully.</a:t>
+              <a:rPr sz="1700" b="1" i="0">
+                <a:solidFill>
+                  <a:srgbClr val="EDAB0C"/>
+                </a:solidFill>
+                <a:latin typeface="Roboto"/>
+              </a:rPr>
+              <a:t>■  </a:t>
+            </a:r>
+            <a:r>
+              <a:rPr sz="1700" b="0" i="0">
+                <a:solidFill>
+                  <a:srgbClr val="2A2929"/>
+                </a:solidFill>
+                <a:latin typeface="Roboto"/>
+              </a:rPr>
+              <a:t>You — security IN the cloud: the EC2 OS (patching), applications, security-group config, IAM, account management, and your data.</a:t>
             </a:r>
           </a:p>
           <a:p>
@@ -9290,91 +7654,143 @@
               </a:spcAft>
             </a:pPr>
             <a:r>
-              <a:rPr sz="1800" b="1" i="0">
-                <a:solidFill>
-                  <a:srgbClr val="EDAB0C"/>
+              <a:rPr sz="1700" b="1" i="0">
+                <a:solidFill>
+                  <a:srgbClr val="205F61"/>
                 </a:solidFill>
                 <a:latin typeface="Roboto"/>
               </a:rPr>
               <a:t>■  </a:t>
             </a:r>
             <a:r>
-              <a:rPr sz="1800" b="0" i="0">
-                <a:solidFill>
-                  <a:srgbClr val="2A2929"/>
-                </a:solidFill>
-                <a:latin typeface="Roboto"/>
-              </a:rPr>
-              <a:t>New discipline: capture evidence as you go — the Deployment Report is built from it.</a:t>
-            </a:r>
-          </a:p>
-          <a:p>
-            <a:pPr marL="0" indent="0">
-              <a:lnSpc>
-                <a:spcPct val="105000"/>
-              </a:lnSpc>
+              <a:rPr sz="1700" b="1" i="0">
+                <a:solidFill>
+                  <a:srgbClr val="205F61"/>
+                </a:solidFill>
+                <a:latin typeface="Roboto"/>
+              </a:rPr>
+              <a:t>Knowing the line tells you what you must configure — and what you can rely on.</a:t>
+            </a:r>
+          </a:p>
+        </p:txBody>
+      </p:sp>
+      <p:sp>
+        <p:nvSpPr>
+          <p:cNvPr id="5" name="Rounded Rectangle 4"/>
+          <p:cNvSpPr/>
+          <p:nvPr/>
+        </p:nvSpPr>
+        <p:spPr>
+          <a:xfrm>
+            <a:off x="6400800" y="1783080"/>
+            <a:ext cx="5120640" cy="4023360"/>
+          </a:xfrm>
+          <a:prstGeom prst="roundRect">
+            <a:avLst/>
+          </a:prstGeom>
+          <a:solidFill>
+            <a:srgbClr val="FBF6E6"/>
+          </a:solidFill>
+          <a:ln w="12700">
+            <a:solidFill>
+              <a:srgbClr val="205F61"/>
+            </a:solidFill>
+            <a:prstDash val="dash"/>
+          </a:ln>
+          <a:effectLst/>
+        </p:spPr>
+        <p:style>
+          <a:lnRef idx="1">
+            <a:schemeClr val="accent1"/>
+          </a:lnRef>
+          <a:fillRef idx="3">
+            <a:schemeClr val="accent1"/>
+          </a:fillRef>
+          <a:effectRef idx="2">
+            <a:schemeClr val="accent1"/>
+          </a:effectRef>
+          <a:fontRef idx="minor">
+            <a:schemeClr val="lt1"/>
+          </a:fontRef>
+        </p:style>
+        <p:txBody>
+          <a:bodyPr rtlCol="0" anchor="ctr"/>
+          <a:lstStyle/>
+          <a:p>
+            <a:pPr algn="ctr"/>
+          </a:p>
+        </p:txBody>
+      </p:sp>
+      <p:sp>
+        <p:nvSpPr>
+          <p:cNvPr id="6" name="TextBox 5"/>
+          <p:cNvSpPr txBox="1"/>
+          <p:nvPr/>
+        </p:nvSpPr>
+        <p:spPr>
+          <a:xfrm>
+            <a:off x="6400800" y="1783080"/>
+            <a:ext cx="5120640" cy="4023360"/>
+          </a:xfrm>
+          <a:prstGeom prst="rect">
+            <a:avLst/>
+          </a:prstGeom>
+          <a:noFill/>
+        </p:spPr>
+        <p:txBody>
+          <a:bodyPr wrap="square" anchor="ctr" lIns="0" rIns="0" tIns="0" bIns="0">
+            <a:spAutoFit/>
+          </a:bodyPr>
+          <a:lstStyle/>
+          <a:p>
+            <a:pPr algn="ctr"/>
+            <a:r>
+              <a:rPr sz="3000" b="0" i="0">
+                <a:solidFill>
+                  <a:srgbClr val="205F61"/>
+                </a:solidFill>
+                <a:latin typeface="Roboto"/>
+              </a:rPr>
+              <a:t>🖼</a:t>
+            </a:r>
+          </a:p>
+          <a:p>
+            <a:pPr algn="ctr">
               <a:spcBef>
-                <a:spcPts val="0"/>
+                <a:spcPts val="400"/>
               </a:spcBef>
-              <a:spcAft>
-                <a:spcPts val="1000"/>
-              </a:spcAft>
             </a:pPr>
             <a:r>
-              <a:rPr sz="1800" b="1" i="0">
-                <a:solidFill>
-                  <a:srgbClr val="EDAB0C"/>
-                </a:solidFill>
-                <a:latin typeface="Roboto"/>
-              </a:rPr>
-              <a:t>■  </a:t>
-            </a:r>
-            <a:r>
-              <a:rPr sz="1800" b="0" i="0">
-                <a:solidFill>
-                  <a:srgbClr val="2A2929"/>
-                </a:solidFill>
-                <a:latin typeface="Roboto"/>
-              </a:rPr>
-              <a:t>This Topic — the foundation tier: account &amp; Region, identity &amp; access, shared responsibility.</a:t>
-            </a:r>
-          </a:p>
-          <a:p>
-            <a:pPr marL="0" indent="0">
-              <a:lnSpc>
-                <a:spcPct val="105000"/>
-              </a:lnSpc>
+              <a:rPr sz="1200" b="1" i="0">
+                <a:solidFill>
+                  <a:srgbClr val="205F61"/>
+                </a:solidFill>
+                <a:latin typeface="Roboto"/>
+              </a:rPr>
+              <a:t>IMAGE</a:t>
+            </a:r>
+          </a:p>
+          <a:p>
+            <a:pPr algn="ctr">
               <a:spcBef>
-                <a:spcPts val="0"/>
+                <a:spcPts val="200"/>
               </a:spcBef>
-              <a:spcAft>
-                <a:spcPts val="1000"/>
-              </a:spcAft>
             </a:pPr>
             <a:r>
-              <a:rPr sz="1800" b="1" i="0">
-                <a:solidFill>
-                  <a:srgbClr val="EDAB0C"/>
-                </a:solidFill>
-                <a:latin typeface="Roboto"/>
-              </a:rPr>
-              <a:t>■  </a:t>
-            </a:r>
-            <a:r>
-              <a:rPr sz="1800" b="0" i="0">
-                <a:solidFill>
-                  <a:srgbClr val="2A2929"/>
-                </a:solidFill>
-                <a:latin typeface="Roboto"/>
-              </a:rPr>
-              <a:t>For every AWS task: watch the demo, then do it yourself.</a:t>
-            </a:r>
-          </a:p>
-        </p:txBody>
-      </p:sp>
-      <p:sp>
-        <p:nvSpPr>
-          <p:cNvPr id="5" name="Rectangle 4"/>
+              <a:rPr sz="1200" b="0" i="1">
+                <a:solidFill>
+                  <a:srgbClr val="484848"/>
+                </a:solidFill>
+                <a:latin typeface="Roboto Light"/>
+              </a:rPr>
+              <a:t>AWS — shared responsibility model (ACF M04 S05)</a:t>
+            </a:r>
+          </a:p>
+        </p:txBody>
+      </p:sp>
+      <p:sp>
+        <p:nvSpPr>
+          <p:cNvPr id="7" name="Rectangle 6"/>
           <p:cNvSpPr/>
           <p:nvPr/>
         </p:nvSpPr>
@@ -9387,7 +7803,7 @@
             <a:avLst/>
           </a:prstGeom>
           <a:solidFill>
-            <a:srgbClr val="EDAB0C"/>
+            <a:srgbClr val="205F61"/>
           </a:solidFill>
           <a:ln>
             <a:noFill/>
@@ -9413,13 +7829,12 @@
           <a:lstStyle/>
           <a:p>
             <a:pPr algn="ctr"/>
-            <a:endParaRPr/>
-          </a:p>
-        </p:txBody>
-      </p:sp>
-      <p:sp>
-        <p:nvSpPr>
-          <p:cNvPr id="6" name="TextBox 5"/>
+          </a:p>
+        </p:txBody>
+      </p:sp>
+      <p:sp>
+        <p:nvSpPr>
+          <p:cNvPr id="8" name="TextBox 7"/>
           <p:cNvSpPr txBox="1"/>
           <p:nvPr/>
         </p:nvSpPr>
@@ -9434,7 +7849,7 @@
           <a:noFill/>
         </p:spPr>
         <p:txBody>
-          <a:bodyPr wrap="square" lIns="0" tIns="0" rIns="0" bIns="0" anchor="t">
+          <a:bodyPr wrap="square" anchor="t" lIns="0" rIns="0" tIns="0" bIns="0">
             <a:spAutoFit/>
           </a:bodyPr>
           <a:lstStyle/>
@@ -9462,7 +7877,7 @@
       </p:sp>
       <p:sp>
         <p:nvSpPr>
-          <p:cNvPr id="7" name="TextBox 6"/>
+          <p:cNvPr id="9" name="TextBox 8"/>
           <p:cNvSpPr txBox="1"/>
           <p:nvPr/>
         </p:nvSpPr>
@@ -9477,7 +7892,7 @@
           <a:noFill/>
         </p:spPr>
         <p:txBody>
-          <a:bodyPr wrap="square" lIns="0" tIns="0" rIns="0" bIns="0" anchor="t">
+          <a:bodyPr wrap="square" anchor="t" lIns="0" rIns="0" tIns="0" bIns="0">
             <a:spAutoFit/>
           </a:bodyPr>
           <a:lstStyle/>
@@ -9490,7 +7905,7 @@
                 </a:solidFill>
                 <a:latin typeface="Roboto"/>
               </a:rPr>
-              <a:t>1</a:t>
+              <a:t>15</a:t>
             </a:r>
           </a:p>
         </p:txBody>
@@ -9503,8 +7918,8 @@
 </p:sld>
 </file>
 
-<file path=ppt/slides/slide20.xml><?xml version="1.0" encoding="utf-8"?>
-<p:sld xmlns:a="http://schemas.openxmlformats.org/drawingml/2006/main" xmlns:r="http://schemas.openxmlformats.org/officeDocument/2006/relationships" xmlns:p="http://schemas.openxmlformats.org/presentationml/2006/main">
+<file path=ppt/slides/slide2.xml><?xml version="1.0" encoding="utf-8"?>
+<p:sld xmlns:a="http://schemas.openxmlformats.org/drawingml/2006/main" xmlns:p="http://schemas.openxmlformats.org/presentationml/2006/main" xmlns:r="http://schemas.openxmlformats.org/officeDocument/2006/relationships">
   <p:cSld>
     <p:bg>
       <p:bgPr>
@@ -9520,14 +7935,7 @@
         <p:cNvGrpSpPr/>
         <p:nvPr/>
       </p:nvGrpSpPr>
-      <p:grpSpPr>
-        <a:xfrm>
-          <a:off x="0" y="0"/>
-          <a:ext cx="0" cy="0"/>
-          <a:chOff x="0" y="0"/>
-          <a:chExt cx="0" cy="0"/>
-        </a:xfrm>
-      </p:grpSpPr>
+      <p:grpSpPr/>
       <p:sp>
         <p:nvSpPr>
           <p:cNvPr id="2" name="TextBox 1"/>
@@ -9545,7 +7953,7 @@
           <a:noFill/>
         </p:spPr>
         <p:txBody>
-          <a:bodyPr wrap="square" lIns="0" tIns="0" rIns="0" bIns="0" anchor="t">
+          <a:bodyPr wrap="square" anchor="t" lIns="0" rIns="0" tIns="0" bIns="0">
             <a:spAutoFit/>
           </a:bodyPr>
           <a:lstStyle/>
@@ -9557,7 +7965,7 @@
                 </a:solidFill>
                 <a:latin typeface="Roboto"/>
               </a:rPr>
-              <a:t>The shared responsibility model</a:t>
+              <a:t>From advising to building</a:t>
             </a:r>
           </a:p>
           <a:p>
@@ -9573,7 +7981,7 @@
                 </a:solidFill>
                 <a:latin typeface="Roboto Light"/>
               </a:rPr>
-              <a:t>ACF M04</a:t>
+              <a:t>AT1 was advice; now you build</a:t>
             </a:r>
           </a:p>
         </p:txBody>
@@ -9593,7 +8001,7 @@
             <a:avLst/>
           </a:prstGeom>
           <a:solidFill>
-            <a:srgbClr val="205F61"/>
+            <a:srgbClr val="EDAB0C"/>
           </a:solidFill>
           <a:ln>
             <a:noFill/>
@@ -9619,13 +8027,190 @@
           <a:lstStyle/>
           <a:p>
             <a:pPr algn="ctr"/>
-            <a:endParaRPr/>
-          </a:p>
-        </p:txBody>
-      </p:sp>
-      <p:sp>
-        <p:nvSpPr>
-          <p:cNvPr id="7" name="Rectangle 6"/>
+          </a:p>
+        </p:txBody>
+      </p:sp>
+      <p:sp>
+        <p:nvSpPr>
+          <p:cNvPr id="4" name="TextBox 3"/>
+          <p:cNvSpPr txBox="1"/>
+          <p:nvPr/>
+        </p:nvSpPr>
+        <p:spPr>
+          <a:xfrm>
+            <a:off x="658368" y="1691640"/>
+            <a:ext cx="10881360" cy="4480560"/>
+          </a:xfrm>
+          <a:prstGeom prst="rect">
+            <a:avLst/>
+          </a:prstGeom>
+          <a:noFill/>
+        </p:spPr>
+        <p:txBody>
+          <a:bodyPr wrap="square" anchor="t" lIns="0" rIns="0" tIns="0" bIns="0">
+            <a:spAutoFit/>
+          </a:bodyPr>
+          <a:lstStyle/>
+          <a:p>
+            <a:pPr marL="0" indent="0">
+              <a:lnSpc>
+                <a:spcPct val="105000"/>
+              </a:lnSpc>
+              <a:spcBef>
+                <a:spcPts val="0"/>
+              </a:spcBef>
+              <a:spcAft>
+                <a:spcPts val="1000"/>
+              </a:spcAft>
+            </a:pPr>
+            <a:r>
+              <a:rPr sz="1800" b="1" i="0">
+                <a:solidFill>
+                  <a:srgbClr val="EDAB0C"/>
+                </a:solidFill>
+                <a:latin typeface="Roboto"/>
+              </a:rPr>
+              <a:t>■  </a:t>
+            </a:r>
+            <a:r>
+              <a:rPr sz="1800" b="0" i="0">
+                <a:solidFill>
+                  <a:srgbClr val="2A2929"/>
+                </a:solidFill>
+                <a:latin typeface="Roboto"/>
+              </a:rPr>
+              <a:t>You implement a supplied design in the AWS lab — and evidence it.</a:t>
+            </a:r>
+          </a:p>
+          <a:p>
+            <a:pPr marL="0" indent="0">
+              <a:lnSpc>
+                <a:spcPct val="105000"/>
+              </a:lnSpc>
+              <a:spcBef>
+                <a:spcPts val="0"/>
+              </a:spcBef>
+              <a:spcAft>
+                <a:spcPts val="1000"/>
+              </a:spcAft>
+            </a:pPr>
+            <a:r>
+              <a:rPr sz="1800" b="1" i="0">
+                <a:solidFill>
+                  <a:srgbClr val="92268F"/>
+                </a:solidFill>
+                <a:latin typeface="Roboto"/>
+              </a:rPr>
+              <a:t>■  </a:t>
+            </a:r>
+            <a:r>
+              <a:rPr sz="1800" b="1" i="0">
+                <a:solidFill>
+                  <a:srgbClr val="92268F"/>
+                </a:solidFill>
+                <a:latin typeface="Roboto"/>
+              </a:rPr>
+              <a:t>New mode: work to a design you didn't write — read it, build it faithfully.</a:t>
+            </a:r>
+          </a:p>
+          <a:p>
+            <a:pPr marL="0" indent="0">
+              <a:lnSpc>
+                <a:spcPct val="105000"/>
+              </a:lnSpc>
+              <a:spcBef>
+                <a:spcPts val="0"/>
+              </a:spcBef>
+              <a:spcAft>
+                <a:spcPts val="1000"/>
+              </a:spcAft>
+            </a:pPr>
+            <a:r>
+              <a:rPr sz="1800" b="1" i="0">
+                <a:solidFill>
+                  <a:srgbClr val="EDAB0C"/>
+                </a:solidFill>
+                <a:latin typeface="Roboto"/>
+              </a:rPr>
+              <a:t>■  </a:t>
+            </a:r>
+            <a:r>
+              <a:rPr sz="1800" b="0" i="0">
+                <a:solidFill>
+                  <a:srgbClr val="2A2929"/>
+                </a:solidFill>
+                <a:latin typeface="Roboto"/>
+              </a:rPr>
+              <a:t>New discipline: capture evidence as you go — the Deployment Report is built from it.</a:t>
+            </a:r>
+          </a:p>
+          <a:p>
+            <a:pPr marL="0" indent="0">
+              <a:lnSpc>
+                <a:spcPct val="105000"/>
+              </a:lnSpc>
+              <a:spcBef>
+                <a:spcPts val="0"/>
+              </a:spcBef>
+              <a:spcAft>
+                <a:spcPts val="1000"/>
+              </a:spcAft>
+            </a:pPr>
+            <a:r>
+              <a:rPr sz="1800" b="1" i="0">
+                <a:solidFill>
+                  <a:srgbClr val="EDAB0C"/>
+                </a:solidFill>
+                <a:latin typeface="Roboto"/>
+              </a:rPr>
+              <a:t>■  </a:t>
+            </a:r>
+            <a:r>
+              <a:rPr sz="1800" b="0" i="0">
+                <a:solidFill>
+                  <a:srgbClr val="2A2929"/>
+                </a:solidFill>
+                <a:latin typeface="Roboto"/>
+              </a:rPr>
+              <a:t>This Topic — the foundation tier: account &amp; Region, identity &amp; access, shared responsibility.</a:t>
+            </a:r>
+          </a:p>
+          <a:p>
+            <a:pPr marL="0" indent="0">
+              <a:lnSpc>
+                <a:spcPct val="105000"/>
+              </a:lnSpc>
+              <a:spcBef>
+                <a:spcPts val="0"/>
+              </a:spcBef>
+              <a:spcAft>
+                <a:spcPts val="1000"/>
+              </a:spcAft>
+            </a:pPr>
+            <a:r>
+              <a:rPr sz="1800" b="1" i="0">
+                <a:solidFill>
+                  <a:srgbClr val="EDAB0C"/>
+                </a:solidFill>
+                <a:latin typeface="Roboto"/>
+              </a:rPr>
+              <a:t>■  </a:t>
+            </a:r>
+            <a:r>
+              <a:rPr sz="1800" b="0" i="0">
+                <a:solidFill>
+                  <a:srgbClr val="2A2929"/>
+                </a:solidFill>
+                <a:latin typeface="Roboto"/>
+              </a:rPr>
+              <a:t>For every AWS task: watch the demo, then do it yourself.</a:t>
+            </a:r>
+          </a:p>
+        </p:txBody>
+      </p:sp>
+      <p:sp>
+        <p:nvSpPr>
+          <p:cNvPr id="5" name="Rectangle 4"/>
           <p:cNvSpPr/>
           <p:nvPr/>
         </p:nvSpPr>
@@ -9638,7 +8223,7 @@
             <a:avLst/>
           </a:prstGeom>
           <a:solidFill>
-            <a:srgbClr val="205F61"/>
+            <a:srgbClr val="EDAB0C"/>
           </a:solidFill>
           <a:ln>
             <a:noFill/>
@@ -9664,13 +8249,12 @@
           <a:lstStyle/>
           <a:p>
             <a:pPr algn="ctr"/>
-            <a:endParaRPr/>
-          </a:p>
-        </p:txBody>
-      </p:sp>
-      <p:sp>
-        <p:nvSpPr>
-          <p:cNvPr id="8" name="TextBox 7"/>
+          </a:p>
+        </p:txBody>
+      </p:sp>
+      <p:sp>
+        <p:nvSpPr>
+          <p:cNvPr id="6" name="TextBox 5"/>
           <p:cNvSpPr txBox="1"/>
           <p:nvPr/>
         </p:nvSpPr>
@@ -9685,7 +8269,7 @@
           <a:noFill/>
         </p:spPr>
         <p:txBody>
-          <a:bodyPr wrap="square" lIns="0" tIns="0" rIns="0" bIns="0" anchor="t">
+          <a:bodyPr wrap="square" anchor="t" lIns="0" rIns="0" tIns="0" bIns="0">
             <a:spAutoFit/>
           </a:bodyPr>
           <a:lstStyle/>
@@ -9713,7 +8297,7 @@
       </p:sp>
       <p:sp>
         <p:nvSpPr>
-          <p:cNvPr id="9" name="TextBox 8"/>
+          <p:cNvPr id="7" name="TextBox 6"/>
           <p:cNvSpPr txBox="1"/>
           <p:nvPr/>
         </p:nvSpPr>
@@ -9728,7 +8312,7 @@
           <a:noFill/>
         </p:spPr>
         <p:txBody>
-          <a:bodyPr wrap="square" lIns="0" tIns="0" rIns="0" bIns="0" anchor="t">
+          <a:bodyPr wrap="square" anchor="t" lIns="0" rIns="0" tIns="0" bIns="0">
             <a:spAutoFit/>
           </a:bodyPr>
           <a:lstStyle/>
@@ -9741,41 +8325,11 @@
                 </a:solidFill>
                 <a:latin typeface="Roboto"/>
               </a:rPr>
-              <a:t>15</a:t>
-            </a:r>
-          </a:p>
-        </p:txBody>
-      </p:sp>
-      <p:pic>
-        <p:nvPicPr>
-          <p:cNvPr id="10" name="Picture 9" descr="Table showing AWS and customer responsibilities outlines in the notes.">
-            <a:extLst>
-              <a:ext uri="{FF2B5EF4-FFF2-40B4-BE49-F238E27FC236}">
-                <a16:creationId xmlns:a16="http://schemas.microsoft.com/office/drawing/2014/main" id="{4481B9B0-712B-01A6-8685-B12A90D67C7C}"/>
-              </a:ext>
-            </a:extLst>
-          </p:cNvPr>
-          <p:cNvPicPr>
-            <a:picLocks noChangeAspect="1"/>
-          </p:cNvPicPr>
-          <p:nvPr/>
-        </p:nvPicPr>
-        <p:blipFill>
-          <a:blip r:embed="rId2"/>
-          <a:stretch>
-            <a:fillRect/>
-          </a:stretch>
-        </p:blipFill>
-        <p:spPr>
-          <a:xfrm>
-            <a:off x="1624960" y="1523190"/>
-            <a:ext cx="8941774" cy="4924854"/>
-          </a:xfrm>
-          <a:prstGeom prst="rect">
-            <a:avLst/>
-          </a:prstGeom>
-        </p:spPr>
-      </p:pic>
+              <a:t>1</a:t>
+            </a:r>
+          </a:p>
+        </p:txBody>
+      </p:sp>
     </p:spTree>
   </p:cSld>
   <p:clrMapOvr>
@@ -9784,8 +8338,8 @@
 </p:sld>
 </file>
 
-<file path=ppt/slides/slide21.xml><?xml version="1.0" encoding="utf-8"?>
-<p:sld xmlns:a="http://schemas.openxmlformats.org/drawingml/2006/main" xmlns:r="http://schemas.openxmlformats.org/officeDocument/2006/relationships" xmlns:p="http://schemas.openxmlformats.org/presentationml/2006/main">
+<file path=ppt/slides/slide20.xml><?xml version="1.0" encoding="utf-8"?>
+<p:sld xmlns:a="http://schemas.openxmlformats.org/drawingml/2006/main" xmlns:p="http://schemas.openxmlformats.org/presentationml/2006/main" xmlns:r="http://schemas.openxmlformats.org/officeDocument/2006/relationships">
   <p:cSld>
     <p:bg>
       <p:bgPr>
@@ -9801,14 +8355,7 @@
         <p:cNvGrpSpPr/>
         <p:nvPr/>
       </p:nvGrpSpPr>
-      <p:grpSpPr>
-        <a:xfrm>
-          <a:off x="0" y="0"/>
-          <a:ext cx="0" cy="0"/>
-          <a:chOff x="0" y="0"/>
-          <a:chExt cx="0" cy="0"/>
-        </a:xfrm>
-      </p:grpSpPr>
+      <p:grpSpPr/>
       <p:sp>
         <p:nvSpPr>
           <p:cNvPr id="2" name="TextBox 1"/>
@@ -9826,7 +8373,7 @@
           <a:noFill/>
         </p:spPr>
         <p:txBody>
-          <a:bodyPr wrap="square" lIns="0" tIns="0" rIns="0" bIns="0" anchor="t">
+          <a:bodyPr wrap="square" anchor="t" lIns="0" rIns="0" tIns="0" bIns="0">
             <a:spAutoFit/>
           </a:bodyPr>
           <a:lstStyle/>
@@ -9900,7 +8447,6 @@
           <a:lstStyle/>
           <a:p>
             <a:pPr algn="ctr"/>
-            <a:endParaRPr/>
           </a:p>
         </p:txBody>
       </p:sp>
@@ -9921,7 +8467,7 @@
           <a:noFill/>
         </p:spPr>
         <p:txBody>
-          <a:bodyPr wrap="square" lIns="0" tIns="0" rIns="0" bIns="0" anchor="t">
+          <a:bodyPr wrap="square" anchor="t" lIns="0" rIns="0" tIns="0" bIns="0">
             <a:spAutoFit/>
           </a:bodyPr>
           <a:lstStyle/>
@@ -10006,7 +8552,16 @@
                 </a:solidFill>
                 <a:latin typeface="Roboto"/>
               </a:rPr>
-              <a:t>■  More managed = more on AWS. The service type sets where the line falls.</a:t>
+              <a:t>■  </a:t>
+            </a:r>
+            <a:r>
+              <a:rPr sz="1800" b="1" i="0">
+                <a:solidFill>
+                  <a:srgbClr val="205F61"/>
+                </a:solidFill>
+                <a:latin typeface="Roboto"/>
+              </a:rPr>
+              <a:t>More managed = more on AWS. The service type sets where the line falls.</a:t>
             </a:r>
           </a:p>
         </p:txBody>
@@ -10052,7 +8607,6 @@
           <a:lstStyle/>
           <a:p>
             <a:pPr algn="ctr"/>
-            <a:endParaRPr/>
           </a:p>
         </p:txBody>
       </p:sp>
@@ -10073,7 +8627,7 @@
           <a:noFill/>
         </p:spPr>
         <p:txBody>
-          <a:bodyPr wrap="square" lIns="0" tIns="0" rIns="0" bIns="0" anchor="t">
+          <a:bodyPr wrap="square" anchor="t" lIns="0" rIns="0" tIns="0" bIns="0">
             <a:spAutoFit/>
           </a:bodyPr>
           <a:lstStyle/>
@@ -10116,7 +8670,7 @@
           <a:noFill/>
         </p:spPr>
         <p:txBody>
-          <a:bodyPr wrap="square" lIns="0" tIns="0" rIns="0" bIns="0" anchor="t">
+          <a:bodyPr wrap="square" anchor="t" lIns="0" rIns="0" tIns="0" bIns="0">
             <a:spAutoFit/>
           </a:bodyPr>
           <a:lstStyle/>
@@ -10142,8 +8696,8 @@
 </p:sld>
 </file>
 
-<file path=ppt/slides/slide22.xml><?xml version="1.0" encoding="utf-8"?>
-<p:sld xmlns:a="http://schemas.openxmlformats.org/drawingml/2006/main" xmlns:r="http://schemas.openxmlformats.org/officeDocument/2006/relationships" xmlns:p="http://schemas.openxmlformats.org/presentationml/2006/main">
+<file path=ppt/slides/slide21.xml><?xml version="1.0" encoding="utf-8"?>
+<p:sld xmlns:a="http://schemas.openxmlformats.org/drawingml/2006/main" xmlns:p="http://schemas.openxmlformats.org/presentationml/2006/main" xmlns:r="http://schemas.openxmlformats.org/officeDocument/2006/relationships">
   <p:cSld>
     <p:bg>
       <p:bgPr>
@@ -10159,14 +8713,7 @@
         <p:cNvGrpSpPr/>
         <p:nvPr/>
       </p:nvGrpSpPr>
-      <p:grpSpPr>
-        <a:xfrm>
-          <a:off x="0" y="0"/>
-          <a:ext cx="0" cy="0"/>
-          <a:chOff x="0" y="0"/>
-          <a:chExt cx="0" cy="0"/>
-        </a:xfrm>
-      </p:grpSpPr>
+      <p:grpSpPr/>
       <p:sp>
         <p:nvSpPr>
           <p:cNvPr id="2" name="TextBox 1"/>
@@ -10184,7 +8731,7 @@
           <a:noFill/>
         </p:spPr>
         <p:txBody>
-          <a:bodyPr wrap="square" lIns="0" tIns="0" rIns="0" bIns="0" anchor="t">
+          <a:bodyPr wrap="square" anchor="t" lIns="0" rIns="0" tIns="0" bIns="0">
             <a:spAutoFit/>
           </a:bodyPr>
           <a:lstStyle/>
@@ -10242,7 +8789,6 @@
           <a:lstStyle/>
           <a:p>
             <a:pPr algn="ctr"/>
-            <a:endParaRPr/>
           </a:p>
         </p:txBody>
       </p:sp>
@@ -10263,7 +8809,7 @@
           <a:noFill/>
         </p:spPr>
         <p:txBody>
-          <a:bodyPr wrap="square" lIns="0" tIns="0" rIns="0" bIns="0" anchor="t">
+          <a:bodyPr wrap="square" anchor="t" lIns="0" rIns="0" tIns="0" bIns="0">
             <a:spAutoFit/>
           </a:bodyPr>
           <a:lstStyle/>
@@ -10403,7 +8949,6 @@
           <a:lstStyle/>
           <a:p>
             <a:pPr algn="ctr"/>
-            <a:endParaRPr/>
           </a:p>
         </p:txBody>
       </p:sp>
@@ -10424,7 +8969,7 @@
           <a:noFill/>
         </p:spPr>
         <p:txBody>
-          <a:bodyPr wrap="square" lIns="0" tIns="0" rIns="0" bIns="0" anchor="t">
+          <a:bodyPr wrap="square" anchor="t" lIns="0" rIns="0" tIns="0" bIns="0">
             <a:spAutoFit/>
           </a:bodyPr>
           <a:lstStyle/>
@@ -10467,7 +9012,7 @@
           <a:noFill/>
         </p:spPr>
         <p:txBody>
-          <a:bodyPr wrap="square" lIns="0" tIns="0" rIns="0" bIns="0" anchor="t">
+          <a:bodyPr wrap="square" anchor="t" lIns="0" rIns="0" tIns="0" bIns="0">
             <a:spAutoFit/>
           </a:bodyPr>
           <a:lstStyle/>
@@ -10493,8 +9038,8 @@
 </p:sld>
 </file>
 
-<file path=ppt/slides/slide23.xml><?xml version="1.0" encoding="utf-8"?>
-<p:sld xmlns:a="http://schemas.openxmlformats.org/drawingml/2006/main" xmlns:r="http://schemas.openxmlformats.org/officeDocument/2006/relationships" xmlns:p="http://schemas.openxmlformats.org/presentationml/2006/main">
+<file path=ppt/slides/slide22.xml><?xml version="1.0" encoding="utf-8"?>
+<p:sld xmlns:a="http://schemas.openxmlformats.org/drawingml/2006/main" xmlns:p="http://schemas.openxmlformats.org/presentationml/2006/main" xmlns:r="http://schemas.openxmlformats.org/officeDocument/2006/relationships">
   <p:cSld>
     <p:bg>
       <p:bgPr>
@@ -10510,14 +9055,7 @@
         <p:cNvGrpSpPr/>
         <p:nvPr/>
       </p:nvGrpSpPr>
-      <p:grpSpPr>
-        <a:xfrm>
-          <a:off x="0" y="0"/>
-          <a:ext cx="0" cy="0"/>
-          <a:chOff x="0" y="0"/>
-          <a:chExt cx="0" cy="0"/>
-        </a:xfrm>
-      </p:grpSpPr>
+      <p:grpSpPr/>
       <p:sp>
         <p:nvSpPr>
           <p:cNvPr id="2" name="Rectangle 1"/>
@@ -10559,7 +9097,6 @@
           <a:lstStyle/>
           <a:p>
             <a:pPr algn="ctr"/>
-            <a:endParaRPr/>
           </a:p>
         </p:txBody>
       </p:sp>
@@ -10633,7 +9170,7 @@
           <a:noFill/>
         </p:spPr>
         <p:txBody>
-          <a:bodyPr wrap="square" lIns="0" tIns="0" rIns="0" bIns="0" anchor="ctr">
+          <a:bodyPr wrap="square" anchor="ctr" lIns="0" rIns="0" tIns="0" bIns="0">
             <a:spAutoFit/>
           </a:bodyPr>
           <a:lstStyle/>
@@ -10667,7 +9204,7 @@
           <a:noFill/>
         </p:spPr>
         <p:txBody>
-          <a:bodyPr wrap="square" lIns="0" tIns="0" rIns="0" bIns="0" anchor="t">
+          <a:bodyPr wrap="square" anchor="t" lIns="0" rIns="0" tIns="0" bIns="0">
             <a:spAutoFit/>
           </a:bodyPr>
           <a:lstStyle/>
@@ -10871,7 +9408,6 @@
           <a:lstStyle/>
           <a:p>
             <a:pPr algn="ctr"/>
-            <a:endParaRPr/>
           </a:p>
         </p:txBody>
       </p:sp>
@@ -10892,7 +9428,7 @@
           <a:noFill/>
         </p:spPr>
         <p:txBody>
-          <a:bodyPr wrap="square" lIns="0" tIns="0" rIns="0" bIns="0" anchor="ctr">
+          <a:bodyPr wrap="square" anchor="ctr" lIns="0" rIns="0" tIns="0" bIns="0">
             <a:spAutoFit/>
           </a:bodyPr>
           <a:lstStyle/>
@@ -10950,7 +9486,6 @@
           <a:lstStyle/>
           <a:p>
             <a:pPr algn="ctr"/>
-            <a:endParaRPr/>
           </a:p>
         </p:txBody>
       </p:sp>
@@ -10971,7 +9506,7 @@
           <a:noFill/>
         </p:spPr>
         <p:txBody>
-          <a:bodyPr wrap="square" lIns="0" tIns="0" rIns="0" bIns="0" anchor="t">
+          <a:bodyPr wrap="square" anchor="t" lIns="0" rIns="0" tIns="0" bIns="0">
             <a:spAutoFit/>
           </a:bodyPr>
           <a:lstStyle/>
@@ -11014,7 +9549,7 @@
           <a:noFill/>
         </p:spPr>
         <p:txBody>
-          <a:bodyPr wrap="square" lIns="0" tIns="0" rIns="0" bIns="0" anchor="t">
+          <a:bodyPr wrap="square" anchor="t" lIns="0" rIns="0" tIns="0" bIns="0">
             <a:spAutoFit/>
           </a:bodyPr>
           <a:lstStyle/>
@@ -11040,8 +9575,8 @@
 </p:sld>
 </file>
 
-<file path=ppt/slides/slide24.xml><?xml version="1.0" encoding="utf-8"?>
-<p:sld xmlns:a="http://schemas.openxmlformats.org/drawingml/2006/main" xmlns:r="http://schemas.openxmlformats.org/officeDocument/2006/relationships" xmlns:p="http://schemas.openxmlformats.org/presentationml/2006/main">
+<file path=ppt/slides/slide23.xml><?xml version="1.0" encoding="utf-8"?>
+<p:sld xmlns:a="http://schemas.openxmlformats.org/drawingml/2006/main" xmlns:p="http://schemas.openxmlformats.org/presentationml/2006/main" xmlns:r="http://schemas.openxmlformats.org/officeDocument/2006/relationships">
   <p:cSld>
     <p:bg>
       <p:bgPr>
@@ -11057,14 +9592,7 @@
         <p:cNvGrpSpPr/>
         <p:nvPr/>
       </p:nvGrpSpPr>
-      <p:grpSpPr>
-        <a:xfrm>
-          <a:off x="0" y="0"/>
-          <a:ext cx="0" cy="0"/>
-          <a:chOff x="0" y="0"/>
-          <a:chExt cx="0" cy="0"/>
-        </a:xfrm>
-      </p:grpSpPr>
+      <p:grpSpPr/>
       <p:sp>
         <p:nvSpPr>
           <p:cNvPr id="2" name="TextBox 1"/>
@@ -11082,7 +9610,7 @@
           <a:noFill/>
         </p:spPr>
         <p:txBody>
-          <a:bodyPr wrap="square" lIns="0" tIns="0" rIns="0" bIns="0" anchor="t">
+          <a:bodyPr wrap="square" anchor="t" lIns="0" rIns="0" tIns="0" bIns="0">
             <a:spAutoFit/>
           </a:bodyPr>
           <a:lstStyle/>
@@ -11156,7 +9684,6 @@
           <a:lstStyle/>
           <a:p>
             <a:pPr algn="ctr"/>
-            <a:endParaRPr/>
           </a:p>
         </p:txBody>
       </p:sp>
@@ -11203,7 +9730,6 @@
           <a:lstStyle/>
           <a:p>
             <a:pPr algn="ctr"/>
-            <a:endParaRPr/>
           </a:p>
         </p:txBody>
       </p:sp>
@@ -11248,7 +9774,6 @@
           <a:lstStyle/>
           <a:p>
             <a:pPr algn="ctr"/>
-            <a:endParaRPr/>
           </a:p>
         </p:txBody>
       </p:sp>
@@ -11269,7 +9794,7 @@
           <a:noFill/>
         </p:spPr>
         <p:txBody>
-          <a:bodyPr wrap="square" lIns="0" tIns="0" rIns="0" bIns="0" anchor="ctr">
+          <a:bodyPr wrap="square" anchor="ctr" lIns="0" rIns="0" tIns="0" bIns="0">
             <a:spAutoFit/>
           </a:bodyPr>
           <a:lstStyle/>
@@ -11334,7 +9859,6 @@
           <a:lstStyle/>
           <a:p>
             <a:pPr algn="ctr"/>
-            <a:endParaRPr/>
           </a:p>
         </p:txBody>
       </p:sp>
@@ -11379,7 +9903,6 @@
           <a:lstStyle/>
           <a:p>
             <a:pPr algn="ctr"/>
-            <a:endParaRPr/>
           </a:p>
         </p:txBody>
       </p:sp>
@@ -11400,7 +9923,7 @@
           <a:noFill/>
         </p:spPr>
         <p:txBody>
-          <a:bodyPr wrap="square" lIns="0" tIns="0" rIns="0" bIns="0" anchor="ctr">
+          <a:bodyPr wrap="square" anchor="ctr" lIns="0" rIns="0" tIns="0" bIns="0">
             <a:spAutoFit/>
           </a:bodyPr>
           <a:lstStyle/>
@@ -11465,7 +9988,6 @@
           <a:lstStyle/>
           <a:p>
             <a:pPr algn="ctr"/>
-            <a:endParaRPr/>
           </a:p>
         </p:txBody>
       </p:sp>
@@ -11510,7 +10032,6 @@
           <a:lstStyle/>
           <a:p>
             <a:pPr algn="ctr"/>
-            <a:endParaRPr/>
           </a:p>
         </p:txBody>
       </p:sp>
@@ -11531,7 +10052,7 @@
           <a:noFill/>
         </p:spPr>
         <p:txBody>
-          <a:bodyPr wrap="square" lIns="0" tIns="0" rIns="0" bIns="0" anchor="ctr">
+          <a:bodyPr wrap="square" anchor="ctr" lIns="0" rIns="0" tIns="0" bIns="0">
             <a:spAutoFit/>
           </a:bodyPr>
           <a:lstStyle/>
@@ -11594,7 +10115,6 @@
           <a:lstStyle/>
           <a:p>
             <a:pPr algn="ctr"/>
-            <a:endParaRPr/>
           </a:p>
         </p:txBody>
       </p:sp>
@@ -11615,7 +10135,7 @@
           <a:noFill/>
         </p:spPr>
         <p:txBody>
-          <a:bodyPr wrap="square" lIns="0" tIns="0" rIns="0" bIns="0" anchor="t">
+          <a:bodyPr wrap="square" anchor="t" lIns="0" rIns="0" tIns="0" bIns="0">
             <a:spAutoFit/>
           </a:bodyPr>
           <a:lstStyle/>
@@ -11658,7 +10178,7 @@
           <a:noFill/>
         </p:spPr>
         <p:txBody>
-          <a:bodyPr wrap="square" lIns="0" tIns="0" rIns="0" bIns="0" anchor="t">
+          <a:bodyPr wrap="square" anchor="t" lIns="0" rIns="0" tIns="0" bIns="0">
             <a:spAutoFit/>
           </a:bodyPr>
           <a:lstStyle/>
@@ -11684,8 +10204,8 @@
 </p:sld>
 </file>
 
-<file path=ppt/slides/slide25.xml><?xml version="1.0" encoding="utf-8"?>
-<p:sld xmlns:a="http://schemas.openxmlformats.org/drawingml/2006/main" xmlns:r="http://schemas.openxmlformats.org/officeDocument/2006/relationships" xmlns:p="http://schemas.openxmlformats.org/presentationml/2006/main">
+<file path=ppt/slides/slide24.xml><?xml version="1.0" encoding="utf-8"?>
+<p:sld xmlns:a="http://schemas.openxmlformats.org/drawingml/2006/main" xmlns:p="http://schemas.openxmlformats.org/presentationml/2006/main" xmlns:r="http://schemas.openxmlformats.org/officeDocument/2006/relationships">
   <p:cSld>
     <p:bg>
       <p:bgPr>
@@ -11701,14 +10221,7 @@
         <p:cNvGrpSpPr/>
         <p:nvPr/>
       </p:nvGrpSpPr>
-      <p:grpSpPr>
-        <a:xfrm>
-          <a:off x="0" y="0"/>
-          <a:ext cx="0" cy="0"/>
-          <a:chOff x="0" y="0"/>
-          <a:chExt cx="0" cy="0"/>
-        </a:xfrm>
-      </p:grpSpPr>
+      <p:grpSpPr/>
       <p:sp>
         <p:nvSpPr>
           <p:cNvPr id="2" name="Rectangle 1"/>
@@ -11750,7 +10263,6 @@
           <a:lstStyle/>
           <a:p>
             <a:pPr algn="ctr"/>
-            <a:endParaRPr/>
           </a:p>
         </p:txBody>
       </p:sp>
@@ -11771,7 +10283,7 @@
           <a:noFill/>
         </p:spPr>
         <p:txBody>
-          <a:bodyPr wrap="square" lIns="0" tIns="0" rIns="0" bIns="0" anchor="t">
+          <a:bodyPr wrap="square" anchor="t" lIns="0" rIns="0" tIns="0" bIns="0">
             <a:spAutoFit/>
           </a:bodyPr>
           <a:lstStyle/>
@@ -11854,7 +10366,7 @@
 </file>
 
 <file path=ppt/slides/slide3.xml><?xml version="1.0" encoding="utf-8"?>
-<p:sld xmlns:a="http://schemas.openxmlformats.org/drawingml/2006/main" xmlns:r="http://schemas.openxmlformats.org/officeDocument/2006/relationships" xmlns:p="http://schemas.openxmlformats.org/presentationml/2006/main">
+<p:sld xmlns:a="http://schemas.openxmlformats.org/drawingml/2006/main" xmlns:p="http://schemas.openxmlformats.org/presentationml/2006/main" xmlns:r="http://schemas.openxmlformats.org/officeDocument/2006/relationships">
   <p:cSld>
     <p:bg>
       <p:bgPr>
@@ -11870,14 +10382,7 @@
         <p:cNvGrpSpPr/>
         <p:nvPr/>
       </p:nvGrpSpPr>
-      <p:grpSpPr>
-        <a:xfrm>
-          <a:off x="0" y="0"/>
-          <a:ext cx="0" cy="0"/>
-          <a:chOff x="0" y="0"/>
-          <a:chExt cx="0" cy="0"/>
-        </a:xfrm>
-      </p:grpSpPr>
+      <p:grpSpPr/>
       <p:sp>
         <p:nvSpPr>
           <p:cNvPr id="2" name="Rectangle 1"/>
@@ -11919,7 +10424,6 @@
           <a:lstStyle/>
           <a:p>
             <a:pPr algn="ctr"/>
-            <a:endParaRPr/>
           </a:p>
         </p:txBody>
       </p:sp>
@@ -11940,7 +10444,7 @@
           <a:noFill/>
         </p:spPr>
         <p:txBody>
-          <a:bodyPr wrap="square" lIns="0" tIns="0" rIns="0" bIns="0" anchor="t">
+          <a:bodyPr wrap="square" anchor="t" lIns="0" rIns="0" tIns="0" bIns="0">
             <a:spAutoFit/>
           </a:bodyPr>
           <a:lstStyle/>
@@ -11974,7 +10478,7 @@
           <a:noFill/>
         </p:spPr>
         <p:txBody>
-          <a:bodyPr wrap="square" lIns="0" tIns="0" rIns="0" bIns="0" anchor="t">
+          <a:bodyPr wrap="square" anchor="t" lIns="0" rIns="0" tIns="0" bIns="0">
             <a:spAutoFit/>
           </a:bodyPr>
           <a:lstStyle/>
@@ -12064,7 +10568,6 @@
           <a:lstStyle/>
           <a:p>
             <a:pPr algn="ctr"/>
-            <a:endParaRPr/>
           </a:p>
         </p:txBody>
       </p:sp>
@@ -12085,7 +10588,7 @@
           <a:noFill/>
         </p:spPr>
         <p:txBody>
-          <a:bodyPr wrap="square" lIns="0" tIns="0" rIns="0" bIns="0" anchor="t">
+          <a:bodyPr wrap="square" anchor="t" lIns="0" rIns="0" tIns="0" bIns="0">
             <a:spAutoFit/>
           </a:bodyPr>
           <a:lstStyle/>
@@ -12128,13 +10631,21 @@
           <a:noFill/>
         </p:spPr>
         <p:txBody>
-          <a:bodyPr wrap="square" lIns="0" tIns="0" rIns="0" bIns="0" anchor="t">
+          <a:bodyPr wrap="square" anchor="t" lIns="0" rIns="0" tIns="0" bIns="0">
             <a:spAutoFit/>
           </a:bodyPr>
           <a:lstStyle/>
           <a:p>
             <a:pPr algn="r"/>
-            <a:endParaRPr/>
+            <a:r>
+              <a:rPr sz="1100" b="0" i="0">
+                <a:solidFill>
+                  <a:srgbClr val="7A7A7A"/>
+                </a:solidFill>
+                <a:latin typeface="Roboto"/>
+              </a:rPr>
+              <a:t/>
+            </a:r>
           </a:p>
         </p:txBody>
       </p:sp>
@@ -12147,7 +10658,7 @@
 </file>
 
 <file path=ppt/slides/slide4.xml><?xml version="1.0" encoding="utf-8"?>
-<p:sld xmlns:a="http://schemas.openxmlformats.org/drawingml/2006/main" xmlns:r="http://schemas.openxmlformats.org/officeDocument/2006/relationships" xmlns:p="http://schemas.openxmlformats.org/presentationml/2006/main">
+<p:sld xmlns:a="http://schemas.openxmlformats.org/drawingml/2006/main" xmlns:p="http://schemas.openxmlformats.org/presentationml/2006/main" xmlns:r="http://schemas.openxmlformats.org/officeDocument/2006/relationships">
   <p:cSld>
     <p:bg>
       <p:bgPr>
@@ -12163,14 +10674,7 @@
         <p:cNvGrpSpPr/>
         <p:nvPr/>
       </p:nvGrpSpPr>
-      <p:grpSpPr>
-        <a:xfrm>
-          <a:off x="0" y="0"/>
-          <a:ext cx="0" cy="0"/>
-          <a:chOff x="0" y="0"/>
-          <a:chExt cx="0" cy="0"/>
-        </a:xfrm>
-      </p:grpSpPr>
+      <p:grpSpPr/>
       <p:sp>
         <p:nvSpPr>
           <p:cNvPr id="2" name="TextBox 1"/>
@@ -12188,7 +10692,7 @@
           <a:noFill/>
         </p:spPr>
         <p:txBody>
-          <a:bodyPr wrap="square" lIns="0" tIns="0" rIns="0" bIns="0" anchor="t">
+          <a:bodyPr wrap="square" anchor="t" lIns="0" rIns="0" tIns="0" bIns="0">
             <a:spAutoFit/>
           </a:bodyPr>
           <a:lstStyle/>
@@ -12262,7 +10766,6 @@
           <a:lstStyle/>
           <a:p>
             <a:pPr algn="ctr"/>
-            <a:endParaRPr/>
           </a:p>
         </p:txBody>
       </p:sp>
@@ -12283,7 +10786,7 @@
           <a:noFill/>
         </p:spPr>
         <p:txBody>
-          <a:bodyPr wrap="square" lIns="0" tIns="0" rIns="0" bIns="0" anchor="t">
+          <a:bodyPr wrap="square" anchor="t" lIns="0" rIns="0" tIns="0" bIns="0">
             <a:spAutoFit/>
           </a:bodyPr>
           <a:lstStyle/>
@@ -12368,7 +10871,130 @@
                 </a:solidFill>
                 <a:latin typeface="Roboto"/>
               </a:rPr>
-              <a:t>■  In AT2 you're the delivery crew — the design is already done.</a:t>
+              <a:t>■  </a:t>
+            </a:r>
+            <a:r>
+              <a:rPr sz="1700" b="1" i="0">
+                <a:solidFill>
+                  <a:srgbClr val="92268F"/>
+                </a:solidFill>
+                <a:latin typeface="Roboto"/>
+              </a:rPr>
+              <a:t>In AT2 you're the delivery crew — the design is already done.</a:t>
+            </a:r>
+          </a:p>
+        </p:txBody>
+      </p:sp>
+      <p:sp>
+        <p:nvSpPr>
+          <p:cNvPr id="5" name="Rounded Rectangle 4"/>
+          <p:cNvSpPr/>
+          <p:nvPr/>
+        </p:nvSpPr>
+        <p:spPr>
+          <a:xfrm>
+            <a:off x="6400800" y="1783080"/>
+            <a:ext cx="5120640" cy="4023360"/>
+          </a:xfrm>
+          <a:prstGeom prst="roundRect">
+            <a:avLst/>
+          </a:prstGeom>
+          <a:solidFill>
+            <a:srgbClr val="FBF6E6"/>
+          </a:solidFill>
+          <a:ln w="12700">
+            <a:solidFill>
+              <a:srgbClr val="92268F"/>
+            </a:solidFill>
+            <a:prstDash val="dash"/>
+          </a:ln>
+          <a:effectLst/>
+        </p:spPr>
+        <p:style>
+          <a:lnRef idx="1">
+            <a:schemeClr val="accent1"/>
+          </a:lnRef>
+          <a:fillRef idx="3">
+            <a:schemeClr val="accent1"/>
+          </a:fillRef>
+          <a:effectRef idx="2">
+            <a:schemeClr val="accent1"/>
+          </a:effectRef>
+          <a:fontRef idx="minor">
+            <a:schemeClr val="lt1"/>
+          </a:fontRef>
+        </p:style>
+        <p:txBody>
+          <a:bodyPr rtlCol="0" anchor="ctr"/>
+          <a:lstStyle/>
+          <a:p>
+            <a:pPr algn="ctr"/>
+          </a:p>
+        </p:txBody>
+      </p:sp>
+      <p:sp>
+        <p:nvSpPr>
+          <p:cNvPr id="6" name="TextBox 5"/>
+          <p:cNvSpPr txBox="1"/>
+          <p:nvPr/>
+        </p:nvSpPr>
+        <p:spPr>
+          <a:xfrm>
+            <a:off x="6400800" y="1783080"/>
+            <a:ext cx="5120640" cy="4023360"/>
+          </a:xfrm>
+          <a:prstGeom prst="rect">
+            <a:avLst/>
+          </a:prstGeom>
+          <a:noFill/>
+        </p:spPr>
+        <p:txBody>
+          <a:bodyPr wrap="square" anchor="ctr" lIns="0" rIns="0" tIns="0" bIns="0">
+            <a:spAutoFit/>
+          </a:bodyPr>
+          <a:lstStyle/>
+          <a:p>
+            <a:pPr algn="ctr"/>
+            <a:r>
+              <a:rPr sz="3000" b="0" i="0">
+                <a:solidFill>
+                  <a:srgbClr val="92268F"/>
+                </a:solidFill>
+                <a:latin typeface="Roboto"/>
+              </a:rPr>
+              <a:t>🖼</a:t>
+            </a:r>
+          </a:p>
+          <a:p>
+            <a:pPr algn="ctr">
+              <a:spcBef>
+                <a:spcPts val="400"/>
+              </a:spcBef>
+            </a:pPr>
+            <a:r>
+              <a:rPr sz="1200" b="1" i="0">
+                <a:solidFill>
+                  <a:srgbClr val="92268F"/>
+                </a:solidFill>
+                <a:latin typeface="Roboto"/>
+              </a:rPr>
+              <a:t>IMAGE</a:t>
+            </a:r>
+          </a:p>
+          <a:p>
+            <a:pPr algn="ctr">
+              <a:spcBef>
+                <a:spcPts val="200"/>
+              </a:spcBef>
+            </a:pPr>
+            <a:r>
+              <a:rPr sz="1200" b="0" i="1">
+                <a:solidFill>
+                  <a:srgbClr val="484848"/>
+                </a:solidFill>
+                <a:latin typeface="Roboto Light"/>
+              </a:rPr>
+              <a:t>AWS — cloud architecture: requirements→design→structure (ACA M02 S08)</a:t>
             </a:r>
           </a:p>
         </p:txBody>
@@ -12414,7 +11040,6 @@
           <a:lstStyle/>
           <a:p>
             <a:pPr algn="ctr"/>
-            <a:endParaRPr/>
           </a:p>
         </p:txBody>
       </p:sp>
@@ -12435,7 +11060,7 @@
           <a:noFill/>
         </p:spPr>
         <p:txBody>
-          <a:bodyPr wrap="square" lIns="0" tIns="0" rIns="0" bIns="0" anchor="t">
+          <a:bodyPr wrap="square" anchor="t" lIns="0" rIns="0" tIns="0" bIns="0">
             <a:spAutoFit/>
           </a:bodyPr>
           <a:lstStyle/>
@@ -12478,7 +11103,7 @@
           <a:noFill/>
         </p:spPr>
         <p:txBody>
-          <a:bodyPr wrap="square" lIns="0" tIns="0" rIns="0" bIns="0" anchor="t">
+          <a:bodyPr wrap="square" anchor="t" lIns="0" rIns="0" tIns="0" bIns="0">
             <a:spAutoFit/>
           </a:bodyPr>
           <a:lstStyle/>
@@ -12496,611 +11121,6 @@
           </a:p>
         </p:txBody>
       </p:sp>
-      <p:grpSp>
-        <p:nvGrpSpPr>
-          <p:cNvPr id="22" name="Group 21">
-            <a:extLst>
-              <a:ext uri="{FF2B5EF4-FFF2-40B4-BE49-F238E27FC236}">
-                <a16:creationId xmlns:a16="http://schemas.microsoft.com/office/drawing/2014/main" id="{08385032-5F6F-2F3C-C937-D2D4B8C7E379}"/>
-              </a:ext>
-              <a:ext uri="{C183D7F6-B498-43B3-948B-1728B52AA6E4}">
-                <adec:decorative xmlns:adec="http://schemas.microsoft.com/office/drawing/2017/decorative" val="1"/>
-              </a:ext>
-            </a:extLst>
-          </p:cNvPr>
-          <p:cNvGrpSpPr/>
-          <p:nvPr/>
-        </p:nvGrpSpPr>
-        <p:grpSpPr>
-          <a:xfrm>
-            <a:off x="6352674" y="1800787"/>
-            <a:ext cx="5272840" cy="2466900"/>
-            <a:chOff x="2049403" y="2636108"/>
-            <a:chExt cx="7224671" cy="3138291"/>
-          </a:xfrm>
-        </p:grpSpPr>
-        <p:sp>
-          <p:nvSpPr>
-            <p:cNvPr id="23" name="Rounded Rectangle 25">
-              <a:extLst>
-                <a:ext uri="{FF2B5EF4-FFF2-40B4-BE49-F238E27FC236}">
-                  <a16:creationId xmlns:a16="http://schemas.microsoft.com/office/drawing/2014/main" id="{A9FDE3AF-89E2-7AB9-2214-A9F60E60004A}"/>
-                </a:ext>
-                <a:ext uri="{C183D7F6-B498-43B3-948B-1728B52AA6E4}">
-                  <adec:decorative xmlns:adec="http://schemas.microsoft.com/office/drawing/2017/decorative" val="1"/>
-                </a:ext>
-              </a:extLst>
-            </p:cNvPr>
-            <p:cNvSpPr/>
-            <p:nvPr/>
-          </p:nvSpPr>
-          <p:spPr bwMode="auto">
-            <a:xfrm>
-              <a:off x="2049403" y="2636108"/>
-              <a:ext cx="7224671" cy="3138291"/>
-            </a:xfrm>
-            <a:prstGeom prst="roundRect">
-              <a:avLst>
-                <a:gd name="adj" fmla="val 10132"/>
-              </a:avLst>
-            </a:prstGeom>
-            <a:solidFill>
-              <a:schemeClr val="bg1"/>
-            </a:solidFill>
-            <a:ln w="38100">
-              <a:solidFill>
-                <a:schemeClr val="tx1"/>
-              </a:solidFill>
-              <a:headEnd type="none" w="med" len="med"/>
-              <a:tailEnd type="none" w="med" len="med"/>
-            </a:ln>
-            <a:effectLst>
-              <a:outerShdw blurRad="50800" dist="38100" dir="2700000" algn="tl" rotWithShape="0">
-                <a:prstClr val="black">
-                  <a:alpha val="40000"/>
-                </a:prstClr>
-              </a:outerShdw>
-            </a:effectLst>
-          </p:spPr>
-          <p:style>
-            <a:lnRef idx="1">
-              <a:schemeClr val="accent2"/>
-            </a:lnRef>
-            <a:fillRef idx="3">
-              <a:schemeClr val="accent2"/>
-            </a:fillRef>
-            <a:effectRef idx="2">
-              <a:schemeClr val="accent2"/>
-            </a:effectRef>
-            <a:fontRef idx="minor">
-              <a:schemeClr val="lt1"/>
-            </a:fontRef>
-          </p:style>
-          <p:txBody>
-            <a:bodyPr rot="0" spcFirstLastPara="0" vertOverflow="overflow" horzOverflow="overflow" vert="horz" wrap="square" lIns="182880" tIns="146304" rIns="182880" bIns="146304" numCol="1" spcCol="0" rtlCol="0" fromWordArt="0" anchor="t" anchorCtr="0" forceAA="0" compatLnSpc="1">
-              <a:prstTxWarp prst="textNoShape">
-                <a:avLst/>
-              </a:prstTxWarp>
-              <a:noAutofit/>
-            </a:bodyPr>
-            <a:lstStyle/>
-            <a:p>
-              <a:pPr algn="ctr" defTabSz="932472" fontAlgn="base">
-                <a:lnSpc>
-                  <a:spcPct val="90000"/>
-                </a:lnSpc>
-                <a:spcBef>
-                  <a:spcPct val="0"/>
-                </a:spcBef>
-                <a:spcAft>
-                  <a:spcPct val="0"/>
-                </a:spcAft>
-              </a:pPr>
-              <a:endParaRPr lang="en-US" sz="2400" dirty="0">
-                <a:solidFill>
-                  <a:schemeClr val="tx1"/>
-                </a:solidFill>
-                <a:ea typeface="Segoe UI" pitchFamily="34" charset="0"/>
-                <a:cs typeface="Segoe UI" pitchFamily="34" charset="0"/>
-              </a:endParaRPr>
-            </a:p>
-          </p:txBody>
-        </p:sp>
-        <p:pic>
-          <p:nvPicPr>
-            <p:cNvPr id="24" name="Picture 8" descr="On Demand costs.">
-              <a:extLst>
-                <a:ext uri="{FF2B5EF4-FFF2-40B4-BE49-F238E27FC236}">
-                  <a16:creationId xmlns:a16="http://schemas.microsoft.com/office/drawing/2014/main" id="{14DBE19C-4BF5-9104-0BBB-9F65D39305A4}"/>
-                </a:ext>
-              </a:extLst>
-            </p:cNvPr>
-            <p:cNvPicPr>
-              <a:picLocks noChangeAspect="1" noChangeArrowheads="1"/>
-            </p:cNvPicPr>
-            <p:nvPr/>
-          </p:nvPicPr>
-          <p:blipFill>
-            <a:blip r:embed="rId2">
-              <a:extLst>
-                <a:ext uri="{28A0092B-C50C-407E-A947-70E740481C1C}">
-                  <a14:useLocalDpi xmlns:a14="http://schemas.microsoft.com/office/drawing/2010/main" val="0"/>
-                </a:ext>
-              </a:extLst>
-            </a:blip>
-            <a:srcRect/>
-            <a:stretch>
-              <a:fillRect/>
-            </a:stretch>
-          </p:blipFill>
-          <p:spPr bwMode="auto">
-            <a:xfrm>
-              <a:off x="4497806" y="2759221"/>
-              <a:ext cx="714375" cy="2143125"/>
-            </a:xfrm>
-            <a:prstGeom prst="rect">
-              <a:avLst/>
-            </a:prstGeom>
-            <a:noFill/>
-            <a:extLst>
-              <a:ext uri="{909E8E84-426E-40DD-AFC4-6F175D3DCCD1}">
-                <a14:hiddenFill xmlns:a14="http://schemas.microsoft.com/office/drawing/2010/main">
-                  <a:solidFill>
-                    <a:srgbClr val="FFFFFF"/>
-                  </a:solidFill>
-                </a14:hiddenFill>
-              </a:ext>
-            </a:extLst>
-          </p:spPr>
-        </p:pic>
-        <p:sp>
-          <p:nvSpPr>
-            <p:cNvPr id="25" name="TextBox 24">
-              <a:extLst>
-                <a:ext uri="{FF2B5EF4-FFF2-40B4-BE49-F238E27FC236}">
-                  <a16:creationId xmlns:a16="http://schemas.microsoft.com/office/drawing/2014/main" id="{9C151DAA-28C9-F1CD-A566-94C4A7DACD7E}"/>
-                </a:ext>
-              </a:extLst>
-            </p:cNvPr>
-            <p:cNvSpPr txBox="1"/>
-            <p:nvPr/>
-          </p:nvSpPr>
-          <p:spPr>
-            <a:xfrm>
-              <a:off x="4183285" y="4819156"/>
-              <a:ext cx="1278234" cy="794064"/>
-            </a:xfrm>
-            <a:prstGeom prst="rect">
-              <a:avLst/>
-            </a:prstGeom>
-            <a:noFill/>
-          </p:spPr>
-          <p:txBody>
-            <a:bodyPr wrap="none" lIns="182880" tIns="146304" rIns="182880" bIns="146304" rtlCol="0">
-              <a:spAutoFit/>
-            </a:bodyPr>
-            <a:lstStyle/>
-            <a:p>
-              <a:pPr algn="ctr">
-                <a:lnSpc>
-                  <a:spcPct val="90000"/>
-                </a:lnSpc>
-                <a:spcAft>
-                  <a:spcPts val="1800"/>
-                </a:spcAft>
-              </a:pPr>
-              <a:r>
-                <a:rPr lang="en-US" sz="1800" b="1" dirty="0">
-                  <a:gradFill>
-                    <a:gsLst>
-                      <a:gs pos="2917">
-                        <a:schemeClr val="tx1"/>
-                      </a:gs>
-                      <a:gs pos="30000">
-                        <a:schemeClr val="tx1"/>
-                      </a:gs>
-                    </a:gsLst>
-                    <a:lin ang="5400000" scaled="0"/>
-                  </a:gradFill>
-                </a:rPr>
-                <a:t>On</a:t>
-              </a:r>
-              <a:br>
-                <a:rPr lang="en-US" sz="1800" b="1" dirty="0">
-                  <a:gradFill>
-                    <a:gsLst>
-                      <a:gs pos="2917">
-                        <a:schemeClr val="tx1"/>
-                      </a:gs>
-                      <a:gs pos="30000">
-                        <a:schemeClr val="tx1"/>
-                      </a:gs>
-                    </a:gsLst>
-                    <a:lin ang="5400000" scaled="0"/>
-                  </a:gradFill>
-                </a:rPr>
-              </a:br>
-              <a:r>
-                <a:rPr lang="en-US" sz="1800" b="1" dirty="0">
-                  <a:gradFill>
-                    <a:gsLst>
-                      <a:gs pos="2917">
-                        <a:schemeClr val="tx1"/>
-                      </a:gs>
-                      <a:gs pos="30000">
-                        <a:schemeClr val="tx1"/>
-                      </a:gs>
-                    </a:gsLst>
-                    <a:lin ang="5400000" scaled="0"/>
-                  </a:gradFill>
-                </a:rPr>
-                <a:t>Demand</a:t>
-              </a:r>
-            </a:p>
-          </p:txBody>
-        </p:sp>
-        <p:pic>
-          <p:nvPicPr>
-            <p:cNvPr id="26" name="Picture 25" descr="No upfront payments.">
-              <a:extLst>
-                <a:ext uri="{FF2B5EF4-FFF2-40B4-BE49-F238E27FC236}">
-                  <a16:creationId xmlns:a16="http://schemas.microsoft.com/office/drawing/2014/main" id="{A4F6D1D8-4B8D-4111-486B-3A9D070E323D}"/>
-                </a:ext>
-              </a:extLst>
-            </p:cNvPr>
-            <p:cNvPicPr>
-              <a:picLocks noChangeAspect="1" noChangeArrowheads="1"/>
-            </p:cNvPicPr>
-            <p:nvPr/>
-          </p:nvPicPr>
-          <p:blipFill>
-            <a:blip r:embed="rId3">
-              <a:extLst>
-                <a:ext uri="{28A0092B-C50C-407E-A947-70E740481C1C}">
-                  <a14:useLocalDpi xmlns:a14="http://schemas.microsoft.com/office/drawing/2010/main" val="0"/>
-                </a:ext>
-              </a:extLst>
-            </a:blip>
-            <a:srcRect/>
-            <a:stretch>
-              <a:fillRect/>
-            </a:stretch>
-          </p:blipFill>
-          <p:spPr bwMode="auto">
-            <a:xfrm>
-              <a:off x="5686593" y="2738340"/>
-              <a:ext cx="714375" cy="2143125"/>
-            </a:xfrm>
-            <a:prstGeom prst="rect">
-              <a:avLst/>
-            </a:prstGeom>
-            <a:noFill/>
-            <a:extLst>
-              <a:ext uri="{909E8E84-426E-40DD-AFC4-6F175D3DCCD1}">
-                <a14:hiddenFill xmlns:a14="http://schemas.microsoft.com/office/drawing/2010/main">
-                  <a:solidFill>
-                    <a:srgbClr val="FFFFFF"/>
-                  </a:solidFill>
-                </a14:hiddenFill>
-              </a:ext>
-            </a:extLst>
-          </p:spPr>
-        </p:pic>
-        <p:sp>
-          <p:nvSpPr>
-            <p:cNvPr id="27" name="TextBox 26">
-              <a:extLst>
-                <a:ext uri="{FF2B5EF4-FFF2-40B4-BE49-F238E27FC236}">
-                  <a16:creationId xmlns:a16="http://schemas.microsoft.com/office/drawing/2014/main" id="{6CDC9B06-4C76-1572-0A52-8BA305EB01E8}"/>
-                </a:ext>
-              </a:extLst>
-            </p:cNvPr>
-            <p:cNvSpPr txBox="1"/>
-            <p:nvPr/>
-          </p:nvSpPr>
-          <p:spPr>
-            <a:xfrm>
-              <a:off x="5677217" y="4819156"/>
-              <a:ext cx="927177" cy="544765"/>
-            </a:xfrm>
-            <a:prstGeom prst="rect">
-              <a:avLst/>
-            </a:prstGeom>
-            <a:noFill/>
-          </p:spPr>
-          <p:txBody>
-            <a:bodyPr wrap="none" lIns="182880" tIns="146304" rIns="182880" bIns="146304" rtlCol="0">
-              <a:spAutoFit/>
-            </a:bodyPr>
-            <a:lstStyle/>
-            <a:p>
-              <a:pPr algn="ctr">
-                <a:lnSpc>
-                  <a:spcPct val="90000"/>
-                </a:lnSpc>
-                <a:spcAft>
-                  <a:spcPts val="1800"/>
-                </a:spcAft>
-              </a:pPr>
-              <a:r>
-                <a:rPr lang="en-US" sz="1800" b="1" dirty="0">
-                  <a:solidFill>
-                    <a:srgbClr val="DB4949"/>
-                  </a:solidFill>
-                </a:rPr>
-                <a:t>NURI</a:t>
-              </a:r>
-            </a:p>
-          </p:txBody>
-        </p:sp>
-        <p:pic>
-          <p:nvPicPr>
-            <p:cNvPr id="28" name="Picture 12" descr="Partial upfront reserved instance.">
-              <a:extLst>
-                <a:ext uri="{FF2B5EF4-FFF2-40B4-BE49-F238E27FC236}">
-                  <a16:creationId xmlns:a16="http://schemas.microsoft.com/office/drawing/2014/main" id="{C1696E4F-EED1-63B5-9066-68ADA02B78C1}"/>
-                </a:ext>
-              </a:extLst>
-            </p:cNvPr>
-            <p:cNvPicPr>
-              <a:picLocks noChangeAspect="1" noChangeArrowheads="1"/>
-            </p:cNvPicPr>
-            <p:nvPr/>
-          </p:nvPicPr>
-          <p:blipFill>
-            <a:blip r:embed="rId4">
-              <a:extLst>
-                <a:ext uri="{28A0092B-C50C-407E-A947-70E740481C1C}">
-                  <a14:useLocalDpi xmlns:a14="http://schemas.microsoft.com/office/drawing/2010/main" val="0"/>
-                </a:ext>
-              </a:extLst>
-            </a:blip>
-            <a:srcRect/>
-            <a:stretch>
-              <a:fillRect/>
-            </a:stretch>
-          </p:blipFill>
-          <p:spPr bwMode="auto">
-            <a:xfrm>
-              <a:off x="6919325" y="2738340"/>
-              <a:ext cx="714375" cy="2143125"/>
-            </a:xfrm>
-            <a:prstGeom prst="rect">
-              <a:avLst/>
-            </a:prstGeom>
-            <a:noFill/>
-            <a:extLst>
-              <a:ext uri="{909E8E84-426E-40DD-AFC4-6F175D3DCCD1}">
-                <a14:hiddenFill xmlns:a14="http://schemas.microsoft.com/office/drawing/2010/main">
-                  <a:solidFill>
-                    <a:srgbClr val="FFFFFF"/>
-                  </a:solidFill>
-                </a14:hiddenFill>
-              </a:ext>
-            </a:extLst>
-          </p:spPr>
-        </p:pic>
-        <p:sp>
-          <p:nvSpPr>
-            <p:cNvPr id="29" name="TextBox 28">
-              <a:extLst>
-                <a:ext uri="{FF2B5EF4-FFF2-40B4-BE49-F238E27FC236}">
-                  <a16:creationId xmlns:a16="http://schemas.microsoft.com/office/drawing/2014/main" id="{AF9F7824-B521-B0FA-C71D-BD53CD452739}"/>
-                </a:ext>
-              </a:extLst>
-            </p:cNvPr>
-            <p:cNvSpPr txBox="1"/>
-            <p:nvPr/>
-          </p:nvSpPr>
-          <p:spPr>
-            <a:xfrm>
-              <a:off x="6851993" y="4819156"/>
-              <a:ext cx="927177" cy="544765"/>
-            </a:xfrm>
-            <a:prstGeom prst="rect">
-              <a:avLst/>
-            </a:prstGeom>
-            <a:noFill/>
-          </p:spPr>
-          <p:txBody>
-            <a:bodyPr wrap="none" lIns="182880" tIns="146304" rIns="182880" bIns="146304" rtlCol="0">
-              <a:spAutoFit/>
-            </a:bodyPr>
-            <a:lstStyle/>
-            <a:p>
-              <a:pPr algn="ctr">
-                <a:lnSpc>
-                  <a:spcPct val="90000"/>
-                </a:lnSpc>
-                <a:spcAft>
-                  <a:spcPts val="1800"/>
-                </a:spcAft>
-              </a:pPr>
-              <a:r>
-                <a:rPr lang="en-US" sz="1800" b="1" dirty="0">
-                  <a:solidFill>
-                    <a:srgbClr val="F98E13"/>
-                  </a:solidFill>
-                </a:rPr>
-                <a:t>PURI</a:t>
-              </a:r>
-            </a:p>
-          </p:txBody>
-        </p:sp>
-        <p:pic>
-          <p:nvPicPr>
-            <p:cNvPr id="30" name="Picture 14" descr="All upfront reserved instance.">
-              <a:extLst>
-                <a:ext uri="{FF2B5EF4-FFF2-40B4-BE49-F238E27FC236}">
-                  <a16:creationId xmlns:a16="http://schemas.microsoft.com/office/drawing/2014/main" id="{770CC490-FAEE-EB98-B32B-DA181CCD25B2}"/>
-                </a:ext>
-              </a:extLst>
-            </p:cNvPr>
-            <p:cNvPicPr>
-              <a:picLocks noChangeAspect="1" noChangeArrowheads="1"/>
-            </p:cNvPicPr>
-            <p:nvPr/>
-          </p:nvPicPr>
-          <p:blipFill>
-            <a:blip r:embed="rId5">
-              <a:extLst>
-                <a:ext uri="{28A0092B-C50C-407E-A947-70E740481C1C}">
-                  <a14:useLocalDpi xmlns:a14="http://schemas.microsoft.com/office/drawing/2010/main" val="0"/>
-                </a:ext>
-              </a:extLst>
-            </a:blip>
-            <a:srcRect/>
-            <a:stretch>
-              <a:fillRect/>
-            </a:stretch>
-          </p:blipFill>
-          <p:spPr bwMode="auto">
-            <a:xfrm>
-              <a:off x="8152057" y="2738339"/>
-              <a:ext cx="714375" cy="2143125"/>
-            </a:xfrm>
-            <a:prstGeom prst="rect">
-              <a:avLst/>
-            </a:prstGeom>
-            <a:noFill/>
-            <a:extLst>
-              <a:ext uri="{909E8E84-426E-40DD-AFC4-6F175D3DCCD1}">
-                <a14:hiddenFill xmlns:a14="http://schemas.microsoft.com/office/drawing/2010/main">
-                  <a:solidFill>
-                    <a:srgbClr val="FFFFFF"/>
-                  </a:solidFill>
-                </a14:hiddenFill>
-              </a:ext>
-            </a:extLst>
-          </p:spPr>
-        </p:pic>
-        <p:sp>
-          <p:nvSpPr>
-            <p:cNvPr id="31" name="TextBox 30">
-              <a:extLst>
-                <a:ext uri="{FF2B5EF4-FFF2-40B4-BE49-F238E27FC236}">
-                  <a16:creationId xmlns:a16="http://schemas.microsoft.com/office/drawing/2014/main" id="{405B917B-79C5-9138-361D-60BF3C642035}"/>
-                </a:ext>
-              </a:extLst>
-            </p:cNvPr>
-            <p:cNvSpPr txBox="1"/>
-            <p:nvPr/>
-          </p:nvSpPr>
-          <p:spPr>
-            <a:xfrm>
-              <a:off x="8045655" y="4819156"/>
-              <a:ext cx="927177" cy="544765"/>
-            </a:xfrm>
-            <a:prstGeom prst="rect">
-              <a:avLst/>
-            </a:prstGeom>
-            <a:noFill/>
-          </p:spPr>
-          <p:txBody>
-            <a:bodyPr wrap="none" lIns="182880" tIns="146304" rIns="182880" bIns="146304" rtlCol="0">
-              <a:spAutoFit/>
-            </a:bodyPr>
-            <a:lstStyle/>
-            <a:p>
-              <a:pPr algn="ctr">
-                <a:lnSpc>
-                  <a:spcPct val="90000"/>
-                </a:lnSpc>
-                <a:spcAft>
-                  <a:spcPts val="1800"/>
-                </a:spcAft>
-              </a:pPr>
-              <a:r>
-                <a:rPr lang="en-US" sz="1800" b="1" dirty="0">
-                  <a:solidFill>
-                    <a:srgbClr val="577AFB"/>
-                  </a:solidFill>
-                </a:rPr>
-                <a:t>AURI</a:t>
-              </a:r>
-            </a:p>
-          </p:txBody>
-        </p:sp>
-        <p:pic>
-          <p:nvPicPr>
-            <p:cNvPr id="32" name="Graphic 135" descr="EC2 instance.">
-              <a:extLst>
-                <a:ext uri="{FF2B5EF4-FFF2-40B4-BE49-F238E27FC236}">
-                  <a16:creationId xmlns:a16="http://schemas.microsoft.com/office/drawing/2014/main" id="{E68C8D9A-3A0E-CD13-575D-BD940AE91781}"/>
-                </a:ext>
-              </a:extLst>
-            </p:cNvPr>
-            <p:cNvPicPr>
-              <a:picLocks noChangeAspect="1"/>
-            </p:cNvPicPr>
-            <p:nvPr/>
-          </p:nvPicPr>
-          <p:blipFill>
-            <a:blip>
-              <a:extLst>
-                <a:ext uri="{96DAC541-7B7A-43D3-8B79-37D633B846F1}">
-                  <asvg:svgBlip xmlns:asvg="http://schemas.microsoft.com/office/drawing/2016/SVG/main" r:embed="rId6"/>
-                </a:ext>
-              </a:extLst>
-            </a:blip>
-            <a:stretch>
-              <a:fillRect/>
-            </a:stretch>
-          </p:blipFill>
-          <p:spPr>
-            <a:xfrm>
-              <a:off x="2360735" y="3155099"/>
-              <a:ext cx="1632947" cy="1632947"/>
-            </a:xfrm>
-            <a:prstGeom prst="rect">
-              <a:avLst/>
-            </a:prstGeom>
-          </p:spPr>
-        </p:pic>
-        <p:sp>
-          <p:nvSpPr>
-            <p:cNvPr id="33" name="TextBox 32" descr="EC2 instance.">
-              <a:extLst>
-                <a:ext uri="{FF2B5EF4-FFF2-40B4-BE49-F238E27FC236}">
-                  <a16:creationId xmlns:a16="http://schemas.microsoft.com/office/drawing/2014/main" id="{6301DAEF-9D30-A742-AE57-B2A4D964F84D}"/>
-                </a:ext>
-              </a:extLst>
-            </p:cNvPr>
-            <p:cNvSpPr txBox="1"/>
-            <p:nvPr/>
-          </p:nvSpPr>
-          <p:spPr>
-            <a:xfrm>
-              <a:off x="2420555" y="3648406"/>
-              <a:ext cx="1513305" cy="646331"/>
-            </a:xfrm>
-            <a:prstGeom prst="rect">
-              <a:avLst/>
-            </a:prstGeom>
-            <a:noFill/>
-          </p:spPr>
-          <p:txBody>
-            <a:bodyPr wrap="square" rtlCol="0">
-              <a:spAutoFit/>
-            </a:bodyPr>
-            <a:lstStyle/>
-            <a:p>
-              <a:pPr algn="ctr"/>
-              <a:r>
-                <a:rPr lang="en-US" dirty="0"/>
-                <a:t>EC2</a:t>
-              </a:r>
-            </a:p>
-            <a:p>
-              <a:pPr algn="ctr"/>
-              <a:r>
-                <a:rPr lang="en-US" dirty="0"/>
-                <a:t>instance</a:t>
-              </a:r>
-            </a:p>
-          </p:txBody>
-        </p:sp>
-      </p:grpSp>
     </p:spTree>
   </p:cSld>
   <p:clrMapOvr>
@@ -13110,7 +11130,7 @@
 </file>
 
 <file path=ppt/slides/slide5.xml><?xml version="1.0" encoding="utf-8"?>
-<p:sld xmlns:a="http://schemas.openxmlformats.org/drawingml/2006/main" xmlns:r="http://schemas.openxmlformats.org/officeDocument/2006/relationships" xmlns:p="http://schemas.openxmlformats.org/presentationml/2006/main">
+<p:sld xmlns:a="http://schemas.openxmlformats.org/drawingml/2006/main" xmlns:p="http://schemas.openxmlformats.org/presentationml/2006/main" xmlns:r="http://schemas.openxmlformats.org/officeDocument/2006/relationships">
   <p:cSld>
     <p:bg>
       <p:bgPr>
@@ -13126,14 +11146,7 @@
         <p:cNvGrpSpPr/>
         <p:nvPr/>
       </p:nvGrpSpPr>
-      <p:grpSpPr>
-        <a:xfrm>
-          <a:off x="0" y="0"/>
-          <a:ext cx="0" cy="0"/>
-          <a:chOff x="0" y="0"/>
-          <a:chExt cx="0" cy="0"/>
-        </a:xfrm>
-      </p:grpSpPr>
+      <p:grpSpPr/>
       <p:sp>
         <p:nvSpPr>
           <p:cNvPr id="2" name="TextBox 1"/>
@@ -13151,7 +11164,7 @@
           <a:noFill/>
         </p:spPr>
         <p:txBody>
-          <a:bodyPr wrap="square" lIns="0" tIns="0" rIns="0" bIns="0" anchor="t">
+          <a:bodyPr wrap="square" anchor="t" lIns="0" rIns="0" tIns="0" bIns="0">
             <a:spAutoFit/>
           </a:bodyPr>
           <a:lstStyle/>
@@ -13225,7 +11238,6 @@
           <a:lstStyle/>
           <a:p>
             <a:pPr algn="ctr"/>
-            <a:endParaRPr/>
           </a:p>
         </p:txBody>
       </p:sp>
@@ -13246,7 +11258,7 @@
           <a:noFill/>
         </p:spPr>
         <p:txBody>
-          <a:bodyPr wrap="square" lIns="0" tIns="0" rIns="0" bIns="0" anchor="t">
+          <a:bodyPr wrap="square" anchor="t" lIns="0" rIns="0" tIns="0" bIns="0">
             <a:spAutoFit/>
           </a:bodyPr>
           <a:lstStyle/>
@@ -13331,7 +11343,16 @@
                 </a:solidFill>
                 <a:latin typeface="Roboto"/>
               </a:rPr>
-              <a:t>■  “Implementer decision” = where your judgement is assessed.</a:t>
+              <a:t>■  </a:t>
+            </a:r>
+            <a:r>
+              <a:rPr sz="1800" b="1" i="0">
+                <a:solidFill>
+                  <a:srgbClr val="92268F"/>
+                </a:solidFill>
+                <a:latin typeface="Roboto"/>
+              </a:rPr>
+              <a:t>“Implementer decision” = where your judgement is assessed.</a:t>
             </a:r>
           </a:p>
         </p:txBody>
@@ -13377,7 +11398,6 @@
           <a:lstStyle/>
           <a:p>
             <a:pPr algn="ctr"/>
-            <a:endParaRPr/>
           </a:p>
         </p:txBody>
       </p:sp>
@@ -13398,7 +11418,7 @@
           <a:noFill/>
         </p:spPr>
         <p:txBody>
-          <a:bodyPr wrap="square" lIns="0" tIns="0" rIns="0" bIns="0" anchor="t">
+          <a:bodyPr wrap="square" anchor="t" lIns="0" rIns="0" tIns="0" bIns="0">
             <a:spAutoFit/>
           </a:bodyPr>
           <a:lstStyle/>
@@ -13441,7 +11461,7 @@
           <a:noFill/>
         </p:spPr>
         <p:txBody>
-          <a:bodyPr wrap="square" lIns="0" tIns="0" rIns="0" bIns="0" anchor="t">
+          <a:bodyPr wrap="square" anchor="t" lIns="0" rIns="0" tIns="0" bIns="0">
             <a:spAutoFit/>
           </a:bodyPr>
           <a:lstStyle/>
@@ -13468,7 +11488,7 @@
 </file>
 
 <file path=ppt/slides/slide6.xml><?xml version="1.0" encoding="utf-8"?>
-<p:sld xmlns:a="http://schemas.openxmlformats.org/drawingml/2006/main" xmlns:r="http://schemas.openxmlformats.org/officeDocument/2006/relationships" xmlns:p="http://schemas.openxmlformats.org/presentationml/2006/main">
+<p:sld xmlns:a="http://schemas.openxmlformats.org/drawingml/2006/main" xmlns:p="http://schemas.openxmlformats.org/presentationml/2006/main" xmlns:r="http://schemas.openxmlformats.org/officeDocument/2006/relationships">
   <p:cSld>
     <p:bg>
       <p:bgPr>
@@ -13484,14 +11504,7 @@
         <p:cNvGrpSpPr/>
         <p:nvPr/>
       </p:nvGrpSpPr>
-      <p:grpSpPr>
-        <a:xfrm>
-          <a:off x="0" y="0"/>
-          <a:ext cx="0" cy="0"/>
-          <a:chOff x="0" y="0"/>
-          <a:chExt cx="0" cy="0"/>
-        </a:xfrm>
-      </p:grpSpPr>
+      <p:grpSpPr/>
       <p:sp>
         <p:nvSpPr>
           <p:cNvPr id="2" name="TextBox 1"/>
@@ -13509,7 +11522,7 @@
           <a:noFill/>
         </p:spPr>
         <p:txBody>
-          <a:bodyPr wrap="square" lIns="0" tIns="0" rIns="0" bIns="0" anchor="t">
+          <a:bodyPr wrap="square" anchor="t" lIns="0" rIns="0" tIns="0" bIns="0">
             <a:spAutoFit/>
           </a:bodyPr>
           <a:lstStyle/>
@@ -13583,7 +11596,6 @@
           <a:lstStyle/>
           <a:p>
             <a:pPr algn="ctr"/>
-            <a:endParaRPr/>
           </a:p>
         </p:txBody>
       </p:sp>
@@ -13604,7 +11616,7 @@
           <a:noFill/>
         </p:spPr>
         <p:txBody>
-          <a:bodyPr wrap="square" lIns="0" tIns="0" rIns="0" bIns="0" anchor="t">
+          <a:bodyPr wrap="square" anchor="t" lIns="0" rIns="0" tIns="0" bIns="0">
             <a:spAutoFit/>
           </a:bodyPr>
           <a:lstStyle/>
@@ -13698,7 +11710,7 @@
                 </a:solidFill>
                 <a:latin typeface="Roboto"/>
               </a:rPr>
-              <a:t>Set the console Region before creating anything — resources are Region-scoped.</a:t>
+              <a:t>In the AWS Academy Learner Lab you deploy to us-east-1 — [scenario: ap-southeast-2 (Sydney) | deploy: us-east-1]. Same build; only the location label changes.</a:t>
             </a:r>
           </a:p>
           <a:p>
@@ -13716,11 +11728,51 @@
             <a:r>
               <a:rPr sz="1800" b="1" i="0">
                 <a:solidFill>
+                  <a:srgbClr val="EDAB0C"/>
+                </a:solidFill>
+                <a:latin typeface="Roboto"/>
+              </a:rPr>
+              <a:t>■  </a:t>
+            </a:r>
+            <a:r>
+              <a:rPr sz="1800" b="0" i="0">
+                <a:solidFill>
+                  <a:srgbClr val="2A2929"/>
+                </a:solidFill>
+                <a:latin typeface="Roboto"/>
+              </a:rPr>
+              <a:t>Set the console Region before creating anything — resources are Region-scoped.</a:t>
+            </a:r>
+          </a:p>
+          <a:p>
+            <a:pPr marL="0" indent="0">
+              <a:lnSpc>
+                <a:spcPct val="105000"/>
+              </a:lnSpc>
+              <a:spcBef>
+                <a:spcPts val="0"/>
+              </a:spcBef>
+              <a:spcAft>
+                <a:spcPts val="1000"/>
+              </a:spcAft>
+            </a:pPr>
+            <a:r>
+              <a:rPr sz="1800" b="1" i="0">
+                <a:solidFill>
                   <a:srgbClr val="92268F"/>
                 </a:solidFill>
                 <a:latin typeface="Roboto"/>
               </a:rPr>
-              <a:t>■  Wrong-Region resources are wrong evidence — the assessor checks the Region in every screenshot.</a:t>
+              <a:t>■  </a:t>
+            </a:r>
+            <a:r>
+              <a:rPr sz="1800" b="1" i="0">
+                <a:solidFill>
+                  <a:srgbClr val="92268F"/>
+                </a:solidFill>
+                <a:latin typeface="Roboto"/>
+              </a:rPr>
+              <a:t>Deploy everything in the lab's Region (us-east-1) — the assessor checks the Region matches in every screenshot.</a:t>
             </a:r>
           </a:p>
         </p:txBody>
@@ -13766,7 +11818,6 @@
           <a:lstStyle/>
           <a:p>
             <a:pPr algn="ctr"/>
-            <a:endParaRPr/>
           </a:p>
         </p:txBody>
       </p:sp>
@@ -13787,7 +11838,7 @@
           <a:noFill/>
         </p:spPr>
         <p:txBody>
-          <a:bodyPr wrap="square" lIns="0" tIns="0" rIns="0" bIns="0" anchor="t">
+          <a:bodyPr wrap="square" anchor="t" lIns="0" rIns="0" tIns="0" bIns="0">
             <a:spAutoFit/>
           </a:bodyPr>
           <a:lstStyle/>
@@ -13830,7 +11881,7 @@
           <a:noFill/>
         </p:spPr>
         <p:txBody>
-          <a:bodyPr wrap="square" lIns="0" tIns="0" rIns="0" bIns="0" anchor="t">
+          <a:bodyPr wrap="square" anchor="t" lIns="0" rIns="0" tIns="0" bIns="0">
             <a:spAutoFit/>
           </a:bodyPr>
           <a:lstStyle/>
@@ -13857,7 +11908,7 @@
 </file>
 
 <file path=ppt/slides/slide7.xml><?xml version="1.0" encoding="utf-8"?>
-<p:sld xmlns:a="http://schemas.openxmlformats.org/drawingml/2006/main" xmlns:r="http://schemas.openxmlformats.org/officeDocument/2006/relationships" xmlns:p="http://schemas.openxmlformats.org/presentationml/2006/main">
+<p:sld xmlns:a="http://schemas.openxmlformats.org/drawingml/2006/main" xmlns:p="http://schemas.openxmlformats.org/presentationml/2006/main" xmlns:r="http://schemas.openxmlformats.org/officeDocument/2006/relationships">
   <p:cSld>
     <p:bg>
       <p:bgPr>
@@ -13873,14 +11924,7 @@
         <p:cNvGrpSpPr/>
         <p:nvPr/>
       </p:nvGrpSpPr>
-      <p:grpSpPr>
-        <a:xfrm>
-          <a:off x="0" y="0"/>
-          <a:ext cx="0" cy="0"/>
-          <a:chOff x="0" y="0"/>
-          <a:chExt cx="0" cy="0"/>
-        </a:xfrm>
-      </p:grpSpPr>
+      <p:grpSpPr/>
       <p:sp>
         <p:nvSpPr>
           <p:cNvPr id="2" name="TextBox 1"/>
@@ -13898,7 +11942,7 @@
           <a:noFill/>
         </p:spPr>
         <p:txBody>
-          <a:bodyPr wrap="square" lIns="0" tIns="0" rIns="0" bIns="0" anchor="t">
+          <a:bodyPr wrap="square" anchor="t" lIns="0" rIns="0" tIns="0" bIns="0">
             <a:spAutoFit/>
           </a:bodyPr>
           <a:lstStyle/>
@@ -13956,7 +12000,6 @@
           <a:lstStyle/>
           <a:p>
             <a:pPr algn="ctr"/>
-            <a:endParaRPr/>
           </a:p>
         </p:txBody>
       </p:sp>
@@ -13977,7 +12020,7 @@
           <a:noFill/>
         </p:spPr>
         <p:txBody>
-          <a:bodyPr wrap="square" lIns="0" tIns="0" rIns="0" bIns="0" anchor="t">
+          <a:bodyPr wrap="square" anchor="t" lIns="0" rIns="0" tIns="0" bIns="0">
             <a:spAutoFit/>
           </a:bodyPr>
           <a:lstStyle/>
@@ -14093,7 +12136,16 @@
                 </a:solidFill>
                 <a:latin typeface="Roboto"/>
               </a:rPr>
-              <a:t>■  Build → capture → move on. Evidence is part of the build, not a write-up afterwards.</a:t>
+              <a:t>■  </a:t>
+            </a:r>
+            <a:r>
+              <a:rPr sz="1800" b="1" i="0">
+                <a:solidFill>
+                  <a:srgbClr val="92268F"/>
+                </a:solidFill>
+                <a:latin typeface="Roboto"/>
+              </a:rPr>
+              <a:t>Build → capture → move on. Evidence is part of the build, not a write-up afterwards.</a:t>
             </a:r>
           </a:p>
         </p:txBody>
@@ -14139,7 +12191,6 @@
           <a:lstStyle/>
           <a:p>
             <a:pPr algn="ctr"/>
-            <a:endParaRPr/>
           </a:p>
         </p:txBody>
       </p:sp>
@@ -14160,7 +12211,7 @@
           <a:noFill/>
         </p:spPr>
         <p:txBody>
-          <a:bodyPr wrap="square" lIns="0" tIns="0" rIns="0" bIns="0" anchor="t">
+          <a:bodyPr wrap="square" anchor="t" lIns="0" rIns="0" tIns="0" bIns="0">
             <a:spAutoFit/>
           </a:bodyPr>
           <a:lstStyle/>
@@ -14203,7 +12254,7 @@
           <a:noFill/>
         </p:spPr>
         <p:txBody>
-          <a:bodyPr wrap="square" lIns="0" tIns="0" rIns="0" bIns="0" anchor="t">
+          <a:bodyPr wrap="square" anchor="t" lIns="0" rIns="0" tIns="0" bIns="0">
             <a:spAutoFit/>
           </a:bodyPr>
           <a:lstStyle/>
@@ -14230,7 +12281,7 @@
 </file>
 
 <file path=ppt/slides/slide8.xml><?xml version="1.0" encoding="utf-8"?>
-<p:sld xmlns:a="http://schemas.openxmlformats.org/drawingml/2006/main" xmlns:r="http://schemas.openxmlformats.org/officeDocument/2006/relationships" xmlns:p="http://schemas.openxmlformats.org/presentationml/2006/main">
+<p:sld xmlns:a="http://schemas.openxmlformats.org/drawingml/2006/main" xmlns:p="http://schemas.openxmlformats.org/presentationml/2006/main" xmlns:r="http://schemas.openxmlformats.org/officeDocument/2006/relationships">
   <p:cSld>
     <p:bg>
       <p:bgPr>
@@ -14246,14 +12297,7 @@
         <p:cNvGrpSpPr/>
         <p:nvPr/>
       </p:nvGrpSpPr>
-      <p:grpSpPr>
-        <a:xfrm>
-          <a:off x="0" y="0"/>
-          <a:ext cx="0" cy="0"/>
-          <a:chOff x="0" y="0"/>
-          <a:chExt cx="0" cy="0"/>
-        </a:xfrm>
-      </p:grpSpPr>
+      <p:grpSpPr/>
       <p:sp>
         <p:nvSpPr>
           <p:cNvPr id="2" name="Rectangle 1"/>
@@ -14295,7 +12339,6 @@
           <a:lstStyle/>
           <a:p>
             <a:pPr algn="ctr"/>
-            <a:endParaRPr/>
           </a:p>
         </p:txBody>
       </p:sp>
@@ -14369,7 +12412,7 @@
           <a:noFill/>
         </p:spPr>
         <p:txBody>
-          <a:bodyPr wrap="square" lIns="0" tIns="0" rIns="0" bIns="0" anchor="ctr">
+          <a:bodyPr wrap="square" anchor="ctr" lIns="0" rIns="0" tIns="0" bIns="0">
             <a:spAutoFit/>
           </a:bodyPr>
           <a:lstStyle/>
@@ -14403,7 +12446,7 @@
           <a:noFill/>
         </p:spPr>
         <p:txBody>
-          <a:bodyPr wrap="square" lIns="0" tIns="0" rIns="0" bIns="0" anchor="t">
+          <a:bodyPr wrap="square" anchor="t" lIns="0" rIns="0" tIns="0" bIns="0">
             <a:spAutoFit/>
           </a:bodyPr>
           <a:lstStyle/>
@@ -14435,7 +12478,7 @@
                 </a:solidFill>
                 <a:latin typeface="Roboto"/>
               </a:rPr>
-              <a:t>Sign in to the AWS Academy lab; set the Region to ap-southeast-2.</a:t>
+              <a:t>Sign in to the AWS Academy Learner Lab; set the Region to us-east-1 — [scenario: ap-southeast-2 (Sydney) | deploy: us-east-1].</a:t>
             </a:r>
           </a:p>
           <a:p>
@@ -14576,7 +12619,6 @@
           <a:lstStyle/>
           <a:p>
             <a:pPr algn="ctr"/>
-            <a:endParaRPr/>
           </a:p>
         </p:txBody>
       </p:sp>
@@ -14597,7 +12639,7 @@
           <a:noFill/>
         </p:spPr>
         <p:txBody>
-          <a:bodyPr wrap="square" lIns="0" tIns="0" rIns="0" bIns="0" anchor="ctr">
+          <a:bodyPr wrap="square" anchor="ctr" lIns="0" rIns="0" tIns="0" bIns="0">
             <a:spAutoFit/>
           </a:bodyPr>
           <a:lstStyle/>
@@ -14655,7 +12697,6 @@
           <a:lstStyle/>
           <a:p>
             <a:pPr algn="ctr"/>
-            <a:endParaRPr/>
           </a:p>
         </p:txBody>
       </p:sp>
@@ -14676,7 +12717,7 @@
           <a:noFill/>
         </p:spPr>
         <p:txBody>
-          <a:bodyPr wrap="square" lIns="0" tIns="0" rIns="0" bIns="0" anchor="t">
+          <a:bodyPr wrap="square" anchor="t" lIns="0" rIns="0" tIns="0" bIns="0">
             <a:spAutoFit/>
           </a:bodyPr>
           <a:lstStyle/>
@@ -14719,7 +12760,7 @@
           <a:noFill/>
         </p:spPr>
         <p:txBody>
-          <a:bodyPr wrap="square" lIns="0" tIns="0" rIns="0" bIns="0" anchor="t">
+          <a:bodyPr wrap="square" anchor="t" lIns="0" rIns="0" tIns="0" bIns="0">
             <a:spAutoFit/>
           </a:bodyPr>
           <a:lstStyle/>
@@ -14746,7 +12787,7 @@
 </file>
 
 <file path=ppt/slides/slide9.xml><?xml version="1.0" encoding="utf-8"?>
-<p:sld xmlns:a="http://schemas.openxmlformats.org/drawingml/2006/main" xmlns:r="http://schemas.openxmlformats.org/officeDocument/2006/relationships" xmlns:p="http://schemas.openxmlformats.org/presentationml/2006/main">
+<p:sld xmlns:a="http://schemas.openxmlformats.org/drawingml/2006/main" xmlns:p="http://schemas.openxmlformats.org/presentationml/2006/main" xmlns:r="http://schemas.openxmlformats.org/officeDocument/2006/relationships">
   <p:cSld>
     <p:bg>
       <p:bgPr>
@@ -14762,14 +12803,7 @@
         <p:cNvGrpSpPr/>
         <p:nvPr/>
       </p:nvGrpSpPr>
-      <p:grpSpPr>
-        <a:xfrm>
-          <a:off x="0" y="0"/>
-          <a:ext cx="0" cy="0"/>
-          <a:chOff x="0" y="0"/>
-          <a:chExt cx="0" cy="0"/>
-        </a:xfrm>
-      </p:grpSpPr>
+      <p:grpSpPr/>
       <p:sp>
         <p:nvSpPr>
           <p:cNvPr id="2" name="Rectangle 1"/>
@@ -14811,7 +12845,6 @@
           <a:lstStyle/>
           <a:p>
             <a:pPr algn="ctr"/>
-            <a:endParaRPr/>
           </a:p>
         </p:txBody>
       </p:sp>
@@ -14885,7 +12918,7 @@
           <a:noFill/>
         </p:spPr>
         <p:txBody>
-          <a:bodyPr wrap="square" lIns="0" tIns="0" rIns="0" bIns="0" anchor="ctr">
+          <a:bodyPr wrap="square" anchor="ctr" lIns="0" rIns="0" tIns="0" bIns="0">
             <a:spAutoFit/>
           </a:bodyPr>
           <a:lstStyle/>
@@ -14919,7 +12952,7 @@
           <a:noFill/>
         </p:spPr>
         <p:txBody>
-          <a:bodyPr wrap="square" lIns="0" tIns="0" rIns="0" bIns="0" anchor="t">
+          <a:bodyPr wrap="square" anchor="t" lIns="0" rIns="0" tIns="0" bIns="0">
             <a:spAutoFit/>
           </a:bodyPr>
           <a:lstStyle/>
@@ -14951,7 +12984,7 @@
                 </a:solidFill>
                 <a:latin typeface="Roboto"/>
               </a:rPr>
-              <a:t>In the AWS Academy lab, set up to build the Accounting System foundation:</a:t>
+              <a:t>In the AWS Academy Learner Lab, set up to build the Accounting System foundation:</a:t>
             </a:r>
           </a:p>
           <a:p>
@@ -14982,7 +13015,7 @@
                 </a:solidFill>
                 <a:latin typeface="Roboto"/>
               </a:rPr>
-              <a:t>set the Region to ap-southeast-2 (confirm it — data residency)</a:t>
+              <a:t>set the Region to us-east-1 — [scenario: ap-southeast-2 (Sydney) | deploy: us-east-1] (confirm it in your evidence)</a:t>
             </a:r>
           </a:p>
           <a:p>
@@ -15123,7 +13156,6 @@
           <a:lstStyle/>
           <a:p>
             <a:pPr algn="ctr"/>
-            <a:endParaRPr/>
           </a:p>
         </p:txBody>
       </p:sp>
@@ -15144,7 +13176,7 @@
           <a:noFill/>
         </p:spPr>
         <p:txBody>
-          <a:bodyPr wrap="square" lIns="0" tIns="0" rIns="0" bIns="0" anchor="ctr">
+          <a:bodyPr wrap="square" anchor="ctr" lIns="0" rIns="0" tIns="0" bIns="0">
             <a:spAutoFit/>
           </a:bodyPr>
           <a:lstStyle/>
@@ -15202,7 +13234,6 @@
           <a:lstStyle/>
           <a:p>
             <a:pPr algn="ctr"/>
-            <a:endParaRPr/>
           </a:p>
         </p:txBody>
       </p:sp>
@@ -15223,7 +13254,7 @@
           <a:noFill/>
         </p:spPr>
         <p:txBody>
-          <a:bodyPr wrap="square" lIns="0" tIns="0" rIns="0" bIns="0" anchor="t">
+          <a:bodyPr wrap="square" anchor="t" lIns="0" rIns="0" tIns="0" bIns="0">
             <a:spAutoFit/>
           </a:bodyPr>
           <a:lstStyle/>
@@ -15266,7 +13297,7 @@
           <a:noFill/>
         </p:spPr>
         <p:txBody>
-          <a:bodyPr wrap="square" lIns="0" tIns="0" rIns="0" bIns="0" anchor="t">
+          <a:bodyPr wrap="square" anchor="t" lIns="0" rIns="0" tIns="0" bIns="0">
             <a:spAutoFit/>
           </a:bodyPr>
           <a:lstStyle/>
